--- a/techbold_template.pptx
+++ b/techbold_template.pptx
@@ -4,17 +4,23 @@
   <p:sldMasterIdLst>
     <p:sldMasterId id="2147483648" r:id="rId1"/>
   </p:sldMasterIdLst>
+  <p:notesMasterIdLst>
+    <p:notesMasterId r:id="rId13"/>
+  </p:notesMasterIdLst>
   <p:sldIdLst>
-    <p:sldId id="256" r:id="rId7"/>
-    <p:sldId id="257" r:id="rId8"/>
-    <p:sldId id="258" r:id="rId9"/>
-    <p:sldId id="259" r:id="rId10"/>
-    <p:sldId id="260" r:id="rId11"/>
-    <p:sldId id="261" r:id="rId12"/>
-    <p:sldId id="262" r:id="rId13"/>
-    <p:sldId id="263" r:id="rId14"/>
+    <p:sldId id="256" r:id="rId2"/>
+    <p:sldId id="266" r:id="rId3"/>
+    <p:sldId id="261" r:id="rId4"/>
+    <p:sldId id="258" r:id="rId5"/>
+    <p:sldId id="259" r:id="rId6"/>
+    <p:sldId id="264" r:id="rId7"/>
+    <p:sldId id="265" r:id="rId8"/>
+    <p:sldId id="262" r:id="rId9"/>
+    <p:sldId id="260" r:id="rId10"/>
+    <p:sldId id="263" r:id="rId11"/>
+    <p:sldId id="257" r:id="rId12"/>
   </p:sldIdLst>
-  <p:sldSz cx="12188952" cy="6858000" type="screen4x3"/>
+  <p:sldSz cx="12188825" cy="6858000"/>
   <p:notesSz cx="6858000" cy="9144000"/>
   <p:defaultTextStyle>
     <a:defPPr>
@@ -111,7 +117,625 @@
       </a:defRPr>
     </a:lvl9pPr>
   </p:defaultTextStyle>
+  <p:extLst>
+    <p:ext uri="{EFAFB233-063F-42B5-8137-9DF3F51BA10A}">
+      <p15:sldGuideLst xmlns:p15="http://schemas.microsoft.com/office/powerpoint/2012/main">
+        <p15:guide id="1" orient="horz" pos="2160">
+          <p15:clr>
+            <a:srgbClr val="A4A3A4"/>
+          </p15:clr>
+        </p15:guide>
+        <p15:guide id="2" pos="2880">
+          <p15:clr>
+            <a:srgbClr val="A4A3A4"/>
+          </p15:clr>
+        </p15:guide>
+      </p15:sldGuideLst>
+    </p:ext>
+  </p:extLst>
 </p:presentation>
+</file>
+
+<file path=ppt/notesMasters/notesMaster1.xml><?xml version="1.0" encoding="utf-8"?>
+<p:notesMaster xmlns:a="http://schemas.openxmlformats.org/drawingml/2006/main" xmlns:r="http://schemas.openxmlformats.org/officeDocument/2006/relationships" xmlns:p="http://schemas.openxmlformats.org/presentationml/2006/main">
+  <p:cSld>
+    <p:bg>
+      <p:bgRef idx="1001">
+        <a:schemeClr val="bg1"/>
+      </p:bgRef>
+    </p:bg>
+    <p:spTree>
+      <p:nvGrpSpPr>
+        <p:cNvPr id="1" name=""/>
+        <p:cNvGrpSpPr/>
+        <p:nvPr/>
+      </p:nvGrpSpPr>
+      <p:grpSpPr>
+        <a:xfrm>
+          <a:off x="0" y="0"/>
+          <a:ext cx="0" cy="0"/>
+          <a:chOff x="0" y="0"/>
+          <a:chExt cx="0" cy="0"/>
+        </a:xfrm>
+      </p:grpSpPr>
+      <p:sp>
+        <p:nvSpPr>
+          <p:cNvPr id="2" name="Header Placeholder 1"/>
+          <p:cNvSpPr>
+            <a:spLocks noGrp="1"/>
+          </p:cNvSpPr>
+          <p:nvPr>
+            <p:ph type="hdr" sz="quarter"/>
+          </p:nvPr>
+        </p:nvSpPr>
+        <p:spPr>
+          <a:xfrm>
+            <a:off x="0" y="0"/>
+            <a:ext cx="2971800" cy="458788"/>
+          </a:xfrm>
+          <a:prstGeom prst="rect">
+            <a:avLst/>
+          </a:prstGeom>
+        </p:spPr>
+        <p:txBody>
+          <a:bodyPr vert="horz" lIns="91440" tIns="45720" rIns="91440" bIns="45720" rtlCol="0"/>
+          <a:lstStyle>
+            <a:lvl1pPr algn="l">
+              <a:defRPr sz="1200"/>
+            </a:lvl1pPr>
+          </a:lstStyle>
+          <a:p>
+            <a:endParaRPr lang="en-001"/>
+          </a:p>
+        </p:txBody>
+      </p:sp>
+      <p:sp>
+        <p:nvSpPr>
+          <p:cNvPr id="3" name="Date Placeholder 2"/>
+          <p:cNvSpPr>
+            <a:spLocks noGrp="1"/>
+          </p:cNvSpPr>
+          <p:nvPr>
+            <p:ph type="dt" idx="1"/>
+          </p:nvPr>
+        </p:nvSpPr>
+        <p:spPr>
+          <a:xfrm>
+            <a:off x="3884613" y="0"/>
+            <a:ext cx="2971800" cy="458788"/>
+          </a:xfrm>
+          <a:prstGeom prst="rect">
+            <a:avLst/>
+          </a:prstGeom>
+        </p:spPr>
+        <p:txBody>
+          <a:bodyPr vert="horz" lIns="91440" tIns="45720" rIns="91440" bIns="45720" rtlCol="0"/>
+          <a:lstStyle>
+            <a:lvl1pPr algn="r">
+              <a:defRPr sz="1200"/>
+            </a:lvl1pPr>
+          </a:lstStyle>
+          <a:p>
+            <a:fld id="{0B68D3AC-AE0E-E34A-95A2-29C3F0C3303D}" type="datetimeFigureOut">
+              <a:rPr lang="en-001" smtClean="0"/>
+              <a:t>06/06/2026</a:t>
+            </a:fld>
+            <a:endParaRPr lang="en-001"/>
+          </a:p>
+        </p:txBody>
+      </p:sp>
+      <p:sp>
+        <p:nvSpPr>
+          <p:cNvPr id="4" name="Slide Image Placeholder 3"/>
+          <p:cNvSpPr>
+            <a:spLocks noGrp="1" noRot="1" noChangeAspect="1"/>
+          </p:cNvSpPr>
+          <p:nvPr>
+            <p:ph type="sldImg" idx="2"/>
+          </p:nvPr>
+        </p:nvSpPr>
+        <p:spPr>
+          <a:xfrm>
+            <a:off x="685800" y="1143000"/>
+            <a:ext cx="5486400" cy="3086100"/>
+          </a:xfrm>
+          <a:prstGeom prst="rect">
+            <a:avLst/>
+          </a:prstGeom>
+          <a:noFill/>
+          <a:ln w="12700">
+            <a:solidFill>
+              <a:prstClr val="black"/>
+            </a:solidFill>
+          </a:ln>
+        </p:spPr>
+        <p:txBody>
+          <a:bodyPr vert="horz" lIns="91440" tIns="45720" rIns="91440" bIns="45720" rtlCol="0" anchor="ctr"/>
+          <a:lstStyle/>
+          <a:p>
+            <a:endParaRPr lang="en-001"/>
+          </a:p>
+        </p:txBody>
+      </p:sp>
+      <p:sp>
+        <p:nvSpPr>
+          <p:cNvPr id="5" name="Notes Placeholder 4"/>
+          <p:cNvSpPr>
+            <a:spLocks noGrp="1"/>
+          </p:cNvSpPr>
+          <p:nvPr>
+            <p:ph type="body" sz="quarter" idx="3"/>
+          </p:nvPr>
+        </p:nvSpPr>
+        <p:spPr>
+          <a:xfrm>
+            <a:off x="685800" y="4400550"/>
+            <a:ext cx="5486400" cy="3600450"/>
+          </a:xfrm>
+          <a:prstGeom prst="rect">
+            <a:avLst/>
+          </a:prstGeom>
+        </p:spPr>
+        <p:txBody>
+          <a:bodyPr vert="horz" lIns="91440" tIns="45720" rIns="91440" bIns="45720" rtlCol="0"/>
+          <a:lstStyle/>
+          <a:p>
+            <a:pPr lvl="0"/>
+            <a:r>
+              <a:rPr lang="en-US"/>
+              <a:t>Click to edit Master text styles</a:t>
+            </a:r>
+          </a:p>
+          <a:p>
+            <a:pPr lvl="1"/>
+            <a:r>
+              <a:rPr lang="en-US"/>
+              <a:t>Second level</a:t>
+            </a:r>
+          </a:p>
+          <a:p>
+            <a:pPr lvl="2"/>
+            <a:r>
+              <a:rPr lang="en-US"/>
+              <a:t>Third level</a:t>
+            </a:r>
+          </a:p>
+          <a:p>
+            <a:pPr lvl="3"/>
+            <a:r>
+              <a:rPr lang="en-US"/>
+              <a:t>Fourth level</a:t>
+            </a:r>
+          </a:p>
+          <a:p>
+            <a:pPr lvl="4"/>
+            <a:r>
+              <a:rPr lang="en-US"/>
+              <a:t>Fifth level</a:t>
+            </a:r>
+            <a:endParaRPr lang="en-001"/>
+          </a:p>
+        </p:txBody>
+      </p:sp>
+      <p:sp>
+        <p:nvSpPr>
+          <p:cNvPr id="6" name="Footer Placeholder 5"/>
+          <p:cNvSpPr>
+            <a:spLocks noGrp="1"/>
+          </p:cNvSpPr>
+          <p:nvPr>
+            <p:ph type="ftr" sz="quarter" idx="4"/>
+          </p:nvPr>
+        </p:nvSpPr>
+        <p:spPr>
+          <a:xfrm>
+            <a:off x="0" y="8685213"/>
+            <a:ext cx="2971800" cy="458787"/>
+          </a:xfrm>
+          <a:prstGeom prst="rect">
+            <a:avLst/>
+          </a:prstGeom>
+        </p:spPr>
+        <p:txBody>
+          <a:bodyPr vert="horz" lIns="91440" tIns="45720" rIns="91440" bIns="45720" rtlCol="0" anchor="b"/>
+          <a:lstStyle>
+            <a:lvl1pPr algn="l">
+              <a:defRPr sz="1200"/>
+            </a:lvl1pPr>
+          </a:lstStyle>
+          <a:p>
+            <a:endParaRPr lang="en-001"/>
+          </a:p>
+        </p:txBody>
+      </p:sp>
+      <p:sp>
+        <p:nvSpPr>
+          <p:cNvPr id="7" name="Slide Number Placeholder 6"/>
+          <p:cNvSpPr>
+            <a:spLocks noGrp="1"/>
+          </p:cNvSpPr>
+          <p:nvPr>
+            <p:ph type="sldNum" sz="quarter" idx="5"/>
+          </p:nvPr>
+        </p:nvSpPr>
+        <p:spPr>
+          <a:xfrm>
+            <a:off x="3884613" y="8685213"/>
+            <a:ext cx="2971800" cy="458787"/>
+          </a:xfrm>
+          <a:prstGeom prst="rect">
+            <a:avLst/>
+          </a:prstGeom>
+        </p:spPr>
+        <p:txBody>
+          <a:bodyPr vert="horz" lIns="91440" tIns="45720" rIns="91440" bIns="45720" rtlCol="0" anchor="b"/>
+          <a:lstStyle>
+            <a:lvl1pPr algn="r">
+              <a:defRPr sz="1200"/>
+            </a:lvl1pPr>
+          </a:lstStyle>
+          <a:p>
+            <a:fld id="{5AA9E0DB-BE02-8B44-97C1-0EB94687C9D8}" type="slidenum">
+              <a:rPr lang="en-001" smtClean="0"/>
+              <a:t>‹#›</a:t>
+            </a:fld>
+            <a:endParaRPr lang="en-001"/>
+          </a:p>
+        </p:txBody>
+      </p:sp>
+    </p:spTree>
+    <p:extLst>
+      <p:ext uri="{BB962C8B-B14F-4D97-AF65-F5344CB8AC3E}">
+        <p14:creationId xmlns:p14="http://schemas.microsoft.com/office/powerpoint/2010/main" val="1868762664"/>
+      </p:ext>
+    </p:extLst>
+  </p:cSld>
+  <p:clrMap bg1="lt1" tx1="dk1" bg2="lt2" tx2="dk2" accent1="accent1" accent2="accent2" accent3="accent3" accent4="accent4" accent5="accent5" accent6="accent6" hlink="hlink" folHlink="folHlink"/>
+  <p:notesStyle>
+    <a:lvl1pPr marL="0" algn="l" defTabSz="914400" rtl="0" eaLnBrk="1" latinLnBrk="0" hangingPunct="1">
+      <a:defRPr sz="1200" kern="1200">
+        <a:solidFill>
+          <a:schemeClr val="tx1"/>
+        </a:solidFill>
+        <a:latin typeface="+mn-lt"/>
+        <a:ea typeface="+mn-ea"/>
+        <a:cs typeface="+mn-cs"/>
+      </a:defRPr>
+    </a:lvl1pPr>
+    <a:lvl2pPr marL="457200" algn="l" defTabSz="914400" rtl="0" eaLnBrk="1" latinLnBrk="0" hangingPunct="1">
+      <a:defRPr sz="1200" kern="1200">
+        <a:solidFill>
+          <a:schemeClr val="tx1"/>
+        </a:solidFill>
+        <a:latin typeface="+mn-lt"/>
+        <a:ea typeface="+mn-ea"/>
+        <a:cs typeface="+mn-cs"/>
+      </a:defRPr>
+    </a:lvl2pPr>
+    <a:lvl3pPr marL="914400" algn="l" defTabSz="914400" rtl="0" eaLnBrk="1" latinLnBrk="0" hangingPunct="1">
+      <a:defRPr sz="1200" kern="1200">
+        <a:solidFill>
+          <a:schemeClr val="tx1"/>
+        </a:solidFill>
+        <a:latin typeface="+mn-lt"/>
+        <a:ea typeface="+mn-ea"/>
+        <a:cs typeface="+mn-cs"/>
+      </a:defRPr>
+    </a:lvl3pPr>
+    <a:lvl4pPr marL="1371600" algn="l" defTabSz="914400" rtl="0" eaLnBrk="1" latinLnBrk="0" hangingPunct="1">
+      <a:defRPr sz="1200" kern="1200">
+        <a:solidFill>
+          <a:schemeClr val="tx1"/>
+        </a:solidFill>
+        <a:latin typeface="+mn-lt"/>
+        <a:ea typeface="+mn-ea"/>
+        <a:cs typeface="+mn-cs"/>
+      </a:defRPr>
+    </a:lvl4pPr>
+    <a:lvl5pPr marL="1828800" algn="l" defTabSz="914400" rtl="0" eaLnBrk="1" latinLnBrk="0" hangingPunct="1">
+      <a:defRPr sz="1200" kern="1200">
+        <a:solidFill>
+          <a:schemeClr val="tx1"/>
+        </a:solidFill>
+        <a:latin typeface="+mn-lt"/>
+        <a:ea typeface="+mn-ea"/>
+        <a:cs typeface="+mn-cs"/>
+      </a:defRPr>
+    </a:lvl5pPr>
+    <a:lvl6pPr marL="2286000" algn="l" defTabSz="914400" rtl="0" eaLnBrk="1" latinLnBrk="0" hangingPunct="1">
+      <a:defRPr sz="1200" kern="1200">
+        <a:solidFill>
+          <a:schemeClr val="tx1"/>
+        </a:solidFill>
+        <a:latin typeface="+mn-lt"/>
+        <a:ea typeface="+mn-ea"/>
+        <a:cs typeface="+mn-cs"/>
+      </a:defRPr>
+    </a:lvl6pPr>
+    <a:lvl7pPr marL="2743200" algn="l" defTabSz="914400" rtl="0" eaLnBrk="1" latinLnBrk="0" hangingPunct="1">
+      <a:defRPr sz="1200" kern="1200">
+        <a:solidFill>
+          <a:schemeClr val="tx1"/>
+        </a:solidFill>
+        <a:latin typeface="+mn-lt"/>
+        <a:ea typeface="+mn-ea"/>
+        <a:cs typeface="+mn-cs"/>
+      </a:defRPr>
+    </a:lvl7pPr>
+    <a:lvl8pPr marL="3200400" algn="l" defTabSz="914400" rtl="0" eaLnBrk="1" latinLnBrk="0" hangingPunct="1">
+      <a:defRPr sz="1200" kern="1200">
+        <a:solidFill>
+          <a:schemeClr val="tx1"/>
+        </a:solidFill>
+        <a:latin typeface="+mn-lt"/>
+        <a:ea typeface="+mn-ea"/>
+        <a:cs typeface="+mn-cs"/>
+      </a:defRPr>
+    </a:lvl8pPr>
+    <a:lvl9pPr marL="3657600" algn="l" defTabSz="914400" rtl="0" eaLnBrk="1" latinLnBrk="0" hangingPunct="1">
+      <a:defRPr sz="1200" kern="1200">
+        <a:solidFill>
+          <a:schemeClr val="tx1"/>
+        </a:solidFill>
+        <a:latin typeface="+mn-lt"/>
+        <a:ea typeface="+mn-ea"/>
+        <a:cs typeface="+mn-cs"/>
+      </a:defRPr>
+    </a:lvl9pPr>
+  </p:notesStyle>
+</p:notesMaster>
+</file>
+
+<file path=ppt/notesSlides/notesSlide1.xml><?xml version="1.0" encoding="utf-8"?>
+<p:notes xmlns:a="http://schemas.openxmlformats.org/drawingml/2006/main" xmlns:r="http://schemas.openxmlformats.org/officeDocument/2006/relationships" xmlns:p="http://schemas.openxmlformats.org/presentationml/2006/main">
+  <p:cSld>
+    <p:spTree>
+      <p:nvGrpSpPr>
+        <p:cNvPr id="1" name=""/>
+        <p:cNvGrpSpPr/>
+        <p:nvPr/>
+      </p:nvGrpSpPr>
+      <p:grpSpPr>
+        <a:xfrm>
+          <a:off x="0" y="0"/>
+          <a:ext cx="0" cy="0"/>
+          <a:chOff x="0" y="0"/>
+          <a:chExt cx="0" cy="0"/>
+        </a:xfrm>
+      </p:grpSpPr>
+      <p:sp>
+        <p:nvSpPr>
+          <p:cNvPr id="2" name="Slide Image Placeholder 1"/>
+          <p:cNvSpPr>
+            <a:spLocks noGrp="1" noRot="1" noChangeAspect="1"/>
+          </p:cNvSpPr>
+          <p:nvPr>
+            <p:ph type="sldImg"/>
+          </p:nvPr>
+        </p:nvSpPr>
+        <p:spPr/>
+      </p:sp>
+      <p:sp>
+        <p:nvSpPr>
+          <p:cNvPr id="3" name="Notes Placeholder 2"/>
+          <p:cNvSpPr>
+            <a:spLocks noGrp="1"/>
+          </p:cNvSpPr>
+          <p:nvPr>
+            <p:ph type="body" idx="1"/>
+          </p:nvPr>
+        </p:nvSpPr>
+        <p:spPr/>
+        <p:txBody>
+          <a:bodyPr/>
+          <a:lstStyle/>
+          <a:p>
+            <a:endParaRPr lang="en-001" dirty="0"/>
+          </a:p>
+        </p:txBody>
+      </p:sp>
+      <p:sp>
+        <p:nvSpPr>
+          <p:cNvPr id="4" name="Slide Number Placeholder 3"/>
+          <p:cNvSpPr>
+            <a:spLocks noGrp="1"/>
+          </p:cNvSpPr>
+          <p:nvPr>
+            <p:ph type="sldNum" sz="quarter" idx="5"/>
+          </p:nvPr>
+        </p:nvSpPr>
+        <p:spPr/>
+        <p:txBody>
+          <a:bodyPr/>
+          <a:lstStyle/>
+          <a:p>
+            <a:fld id="{5AA9E0DB-BE02-8B44-97C1-0EB94687C9D8}" type="slidenum">
+              <a:rPr lang="en-001" smtClean="0"/>
+              <a:t>1</a:t>
+            </a:fld>
+            <a:endParaRPr lang="en-001"/>
+          </a:p>
+        </p:txBody>
+      </p:sp>
+    </p:spTree>
+    <p:extLst>
+      <p:ext uri="{BB962C8B-B14F-4D97-AF65-F5344CB8AC3E}">
+        <p14:creationId xmlns:p14="http://schemas.microsoft.com/office/powerpoint/2010/main" val="2060361394"/>
+      </p:ext>
+    </p:extLst>
+  </p:cSld>
+  <p:clrMapOvr>
+    <a:masterClrMapping/>
+  </p:clrMapOvr>
+</p:notes>
+</file>
+
+<file path=ppt/notesSlides/notesSlide2.xml><?xml version="1.0" encoding="utf-8"?>
+<p:notes xmlns:a="http://schemas.openxmlformats.org/drawingml/2006/main" xmlns:r="http://schemas.openxmlformats.org/officeDocument/2006/relationships" xmlns:p="http://schemas.openxmlformats.org/presentationml/2006/main">
+  <p:cSld>
+    <p:spTree>
+      <p:nvGrpSpPr>
+        <p:cNvPr id="1" name=""/>
+        <p:cNvGrpSpPr/>
+        <p:nvPr/>
+      </p:nvGrpSpPr>
+      <p:grpSpPr>
+        <a:xfrm>
+          <a:off x="0" y="0"/>
+          <a:ext cx="0" cy="0"/>
+          <a:chOff x="0" y="0"/>
+          <a:chExt cx="0" cy="0"/>
+        </a:xfrm>
+      </p:grpSpPr>
+      <p:sp>
+        <p:nvSpPr>
+          <p:cNvPr id="2" name="Slide Image Placeholder 1"/>
+          <p:cNvSpPr>
+            <a:spLocks noGrp="1" noRot="1" noChangeAspect="1"/>
+          </p:cNvSpPr>
+          <p:nvPr>
+            <p:ph type="sldImg"/>
+          </p:nvPr>
+        </p:nvSpPr>
+        <p:spPr/>
+      </p:sp>
+      <p:sp>
+        <p:nvSpPr>
+          <p:cNvPr id="3" name="Notes Placeholder 2"/>
+          <p:cNvSpPr>
+            <a:spLocks noGrp="1"/>
+          </p:cNvSpPr>
+          <p:nvPr>
+            <p:ph type="body" idx="1"/>
+          </p:nvPr>
+        </p:nvSpPr>
+        <p:spPr/>
+        <p:txBody>
+          <a:bodyPr/>
+          <a:lstStyle/>
+          <a:p>
+            <a:endParaRPr lang="en-001" dirty="0"/>
+          </a:p>
+        </p:txBody>
+      </p:sp>
+      <p:sp>
+        <p:nvSpPr>
+          <p:cNvPr id="4" name="Slide Number Placeholder 3"/>
+          <p:cNvSpPr>
+            <a:spLocks noGrp="1"/>
+          </p:cNvSpPr>
+          <p:nvPr>
+            <p:ph type="sldNum" sz="quarter" idx="5"/>
+          </p:nvPr>
+        </p:nvSpPr>
+        <p:spPr/>
+        <p:txBody>
+          <a:bodyPr/>
+          <a:lstStyle/>
+          <a:p>
+            <a:fld id="{5AA9E0DB-BE02-8B44-97C1-0EB94687C9D8}" type="slidenum">
+              <a:rPr lang="en-001" smtClean="0"/>
+              <a:t>9</a:t>
+            </a:fld>
+            <a:endParaRPr lang="en-001"/>
+          </a:p>
+        </p:txBody>
+      </p:sp>
+    </p:spTree>
+    <p:extLst>
+      <p:ext uri="{BB962C8B-B14F-4D97-AF65-F5344CB8AC3E}">
+        <p14:creationId xmlns:p14="http://schemas.microsoft.com/office/powerpoint/2010/main" val="1735198613"/>
+      </p:ext>
+    </p:extLst>
+  </p:cSld>
+  <p:clrMapOvr>
+    <a:masterClrMapping/>
+  </p:clrMapOvr>
+</p:notes>
+</file>
+
+<file path=ppt/notesSlides/notesSlide3.xml><?xml version="1.0" encoding="utf-8"?>
+<p:notes xmlns:a="http://schemas.openxmlformats.org/drawingml/2006/main" xmlns:r="http://schemas.openxmlformats.org/officeDocument/2006/relationships" xmlns:p="http://schemas.openxmlformats.org/presentationml/2006/main">
+  <p:cSld>
+    <p:spTree>
+      <p:nvGrpSpPr>
+        <p:cNvPr id="1" name=""/>
+        <p:cNvGrpSpPr/>
+        <p:nvPr/>
+      </p:nvGrpSpPr>
+      <p:grpSpPr>
+        <a:xfrm>
+          <a:off x="0" y="0"/>
+          <a:ext cx="0" cy="0"/>
+          <a:chOff x="0" y="0"/>
+          <a:chExt cx="0" cy="0"/>
+        </a:xfrm>
+      </p:grpSpPr>
+      <p:sp>
+        <p:nvSpPr>
+          <p:cNvPr id="2" name="Slide Image Placeholder 1"/>
+          <p:cNvSpPr>
+            <a:spLocks noGrp="1" noRot="1" noChangeAspect="1"/>
+          </p:cNvSpPr>
+          <p:nvPr>
+            <p:ph type="sldImg"/>
+          </p:nvPr>
+        </p:nvSpPr>
+        <p:spPr/>
+      </p:sp>
+      <p:sp>
+        <p:nvSpPr>
+          <p:cNvPr id="3" name="Notes Placeholder 2"/>
+          <p:cNvSpPr>
+            <a:spLocks noGrp="1"/>
+          </p:cNvSpPr>
+          <p:nvPr>
+            <p:ph type="body" idx="1"/>
+          </p:nvPr>
+        </p:nvSpPr>
+        <p:spPr/>
+        <p:txBody>
+          <a:bodyPr/>
+          <a:lstStyle/>
+          <a:p>
+            <a:endParaRPr lang="en-001" dirty="0"/>
+          </a:p>
+        </p:txBody>
+      </p:sp>
+      <p:sp>
+        <p:nvSpPr>
+          <p:cNvPr id="4" name="Slide Number Placeholder 3"/>
+          <p:cNvSpPr>
+            <a:spLocks noGrp="1"/>
+          </p:cNvSpPr>
+          <p:nvPr>
+            <p:ph type="sldNum" sz="quarter" idx="5"/>
+          </p:nvPr>
+        </p:nvSpPr>
+        <p:spPr/>
+        <p:txBody>
+          <a:bodyPr/>
+          <a:lstStyle/>
+          <a:p>
+            <a:fld id="{5AA9E0DB-BE02-8B44-97C1-0EB94687C9D8}" type="slidenum">
+              <a:rPr lang="en-001" smtClean="0"/>
+              <a:t>10</a:t>
+            </a:fld>
+            <a:endParaRPr lang="en-001"/>
+          </a:p>
+        </p:txBody>
+      </p:sp>
+    </p:spTree>
+    <p:extLst>
+      <p:ext uri="{BB962C8B-B14F-4D97-AF65-F5344CB8AC3E}">
+        <p14:creationId xmlns:p14="http://schemas.microsoft.com/office/powerpoint/2010/main" val="1323760144"/>
+      </p:ext>
+    </p:extLst>
+  </p:cSld>
+  <p:clrMapOvr>
+    <a:masterClrMapping/>
+  </p:clrMapOvr>
+</p:notes>
 </file>
 
 <file path=ppt/slideLayouts/slideLayout1.xml><?xml version="1.0" encoding="utf-8"?>
@@ -152,10 +776,9 @@
           <a:lstStyle/>
           <a:p>
             <a:r>
-              <a:rPr lang="en-US" smtClean="0"/>
+              <a:rPr lang="en-US"/>
               <a:t>Click to edit Master title style</a:t>
             </a:r>
-            <a:endParaRPr lang="en-US"/>
           </a:p>
         </p:txBody>
       </p:sp>
@@ -271,10 +894,9 @@
           </a:lstStyle>
           <a:p>
             <a:r>
-              <a:rPr lang="en-US" smtClean="0"/>
+              <a:rPr lang="en-US"/>
               <a:t>Click to edit Master subtitle style</a:t>
             </a:r>
-            <a:endParaRPr lang="en-US"/>
           </a:p>
         </p:txBody>
       </p:sp>
@@ -295,7 +917,7 @@
           <a:p>
             <a:fld id="{5BCAD085-E8A6-8845-BD4E-CB4CCA059FC4}" type="datetimeFigureOut">
               <a:rPr lang="en-US" smtClean="0"/>
-              <a:t>1/27/13</a:t>
+              <a:t>6/6/26</a:t>
             </a:fld>
             <a:endParaRPr lang="en-US"/>
           </a:p>
@@ -389,10 +1011,9 @@
           <a:lstStyle/>
           <a:p>
             <a:r>
-              <a:rPr lang="en-US" smtClean="0"/>
+              <a:rPr lang="en-US"/>
               <a:t>Click to edit Master title style</a:t>
             </a:r>
-            <a:endParaRPr lang="en-US"/>
           </a:p>
         </p:txBody>
       </p:sp>
@@ -413,38 +1034,37 @@
           <a:p>
             <a:pPr lvl="0"/>
             <a:r>
-              <a:rPr lang="en-US" smtClean="0"/>
+              <a:rPr lang="en-US"/>
               <a:t>Click to edit Master text styles</a:t>
             </a:r>
           </a:p>
           <a:p>
             <a:pPr lvl="1"/>
             <a:r>
-              <a:rPr lang="en-US" smtClean="0"/>
+              <a:rPr lang="en-US"/>
               <a:t>Second level</a:t>
             </a:r>
           </a:p>
           <a:p>
             <a:pPr lvl="2"/>
             <a:r>
-              <a:rPr lang="en-US" smtClean="0"/>
+              <a:rPr lang="en-US"/>
               <a:t>Third level</a:t>
             </a:r>
           </a:p>
           <a:p>
             <a:pPr lvl="3"/>
             <a:r>
-              <a:rPr lang="en-US" smtClean="0"/>
+              <a:rPr lang="en-US"/>
               <a:t>Fourth level</a:t>
             </a:r>
           </a:p>
           <a:p>
             <a:pPr lvl="4"/>
             <a:r>
-              <a:rPr lang="en-US" smtClean="0"/>
+              <a:rPr lang="en-US"/>
               <a:t>Fifth level</a:t>
             </a:r>
-            <a:endParaRPr lang="en-US"/>
           </a:p>
         </p:txBody>
       </p:sp>
@@ -465,7 +1085,7 @@
           <a:p>
             <a:fld id="{5BCAD085-E8A6-8845-BD4E-CB4CCA059FC4}" type="datetimeFigureOut">
               <a:rPr lang="en-US" smtClean="0"/>
-              <a:t>1/27/13</a:t>
+              <a:t>6/6/26</a:t>
             </a:fld>
             <a:endParaRPr lang="en-US"/>
           </a:p>
@@ -564,10 +1184,9 @@
           <a:lstStyle/>
           <a:p>
             <a:r>
-              <a:rPr lang="en-US" smtClean="0"/>
+              <a:rPr lang="en-US"/>
               <a:t>Click to edit Master title style</a:t>
             </a:r>
-            <a:endParaRPr lang="en-US"/>
           </a:p>
         </p:txBody>
       </p:sp>
@@ -593,38 +1212,37 @@
           <a:p>
             <a:pPr lvl="0"/>
             <a:r>
-              <a:rPr lang="en-US" smtClean="0"/>
+              <a:rPr lang="en-US"/>
               <a:t>Click to edit Master text styles</a:t>
             </a:r>
           </a:p>
           <a:p>
             <a:pPr lvl="1"/>
             <a:r>
-              <a:rPr lang="en-US" smtClean="0"/>
+              <a:rPr lang="en-US"/>
               <a:t>Second level</a:t>
             </a:r>
           </a:p>
           <a:p>
             <a:pPr lvl="2"/>
             <a:r>
-              <a:rPr lang="en-US" smtClean="0"/>
+              <a:rPr lang="en-US"/>
               <a:t>Third level</a:t>
             </a:r>
           </a:p>
           <a:p>
             <a:pPr lvl="3"/>
             <a:r>
-              <a:rPr lang="en-US" smtClean="0"/>
+              <a:rPr lang="en-US"/>
               <a:t>Fourth level</a:t>
             </a:r>
           </a:p>
           <a:p>
             <a:pPr lvl="4"/>
             <a:r>
-              <a:rPr lang="en-US" smtClean="0"/>
+              <a:rPr lang="en-US"/>
               <a:t>Fifth level</a:t>
             </a:r>
-            <a:endParaRPr lang="en-US"/>
           </a:p>
         </p:txBody>
       </p:sp>
@@ -645,7 +1263,7 @@
           <a:p>
             <a:fld id="{5BCAD085-E8A6-8845-BD4E-CB4CCA059FC4}" type="datetimeFigureOut">
               <a:rPr lang="en-US" smtClean="0"/>
-              <a:t>1/27/13</a:t>
+              <a:t>6/6/26</a:t>
             </a:fld>
             <a:endParaRPr lang="en-US"/>
           </a:p>
@@ -739,10 +1357,9 @@
           <a:lstStyle/>
           <a:p>
             <a:r>
-              <a:rPr lang="en-US" smtClean="0"/>
+              <a:rPr lang="en-US"/>
               <a:t>Click to edit Master title style</a:t>
             </a:r>
-            <a:endParaRPr lang="en-US"/>
           </a:p>
         </p:txBody>
       </p:sp>
@@ -763,38 +1380,37 @@
           <a:p>
             <a:pPr lvl="0"/>
             <a:r>
-              <a:rPr lang="en-US" smtClean="0"/>
+              <a:rPr lang="en-US"/>
               <a:t>Click to edit Master text styles</a:t>
             </a:r>
           </a:p>
           <a:p>
             <a:pPr lvl="1"/>
             <a:r>
-              <a:rPr lang="en-US" smtClean="0"/>
+              <a:rPr lang="en-US"/>
               <a:t>Second level</a:t>
             </a:r>
           </a:p>
           <a:p>
             <a:pPr lvl="2"/>
             <a:r>
-              <a:rPr lang="en-US" smtClean="0"/>
+              <a:rPr lang="en-US"/>
               <a:t>Third level</a:t>
             </a:r>
           </a:p>
           <a:p>
             <a:pPr lvl="3"/>
             <a:r>
-              <a:rPr lang="en-US" smtClean="0"/>
+              <a:rPr lang="en-US"/>
               <a:t>Fourth level</a:t>
             </a:r>
           </a:p>
           <a:p>
             <a:pPr lvl="4"/>
             <a:r>
-              <a:rPr lang="en-US" smtClean="0"/>
+              <a:rPr lang="en-US"/>
               <a:t>Fifth level</a:t>
             </a:r>
-            <a:endParaRPr lang="en-US"/>
           </a:p>
         </p:txBody>
       </p:sp>
@@ -815,7 +1431,7 @@
           <a:p>
             <a:fld id="{5BCAD085-E8A6-8845-BD4E-CB4CCA059FC4}" type="datetimeFigureOut">
               <a:rPr lang="en-US" smtClean="0"/>
-              <a:t>1/27/13</a:t>
+              <a:t>6/6/26</a:t>
             </a:fld>
             <a:endParaRPr lang="en-US"/>
           </a:p>
@@ -918,10 +1534,9 @@
           </a:lstStyle>
           <a:p>
             <a:r>
-              <a:rPr lang="en-US" smtClean="0"/>
+              <a:rPr lang="en-US"/>
               <a:t>Click to edit Master title style</a:t>
             </a:r>
-            <a:endParaRPr lang="en-US"/>
           </a:p>
         </p:txBody>
       </p:sp>
@@ -1038,7 +1653,7 @@
           <a:p>
             <a:pPr lvl="0"/>
             <a:r>
-              <a:rPr lang="en-US" smtClean="0"/>
+              <a:rPr lang="en-US"/>
               <a:t>Click to edit Master text styles</a:t>
             </a:r>
           </a:p>
@@ -1061,7 +1676,7 @@
           <a:p>
             <a:fld id="{5BCAD085-E8A6-8845-BD4E-CB4CCA059FC4}" type="datetimeFigureOut">
               <a:rPr lang="en-US" smtClean="0"/>
-              <a:t>1/27/13</a:t>
+              <a:t>6/6/26</a:t>
             </a:fld>
             <a:endParaRPr lang="en-US"/>
           </a:p>
@@ -1155,10 +1770,9 @@
           <a:lstStyle/>
           <a:p>
             <a:r>
-              <a:rPr lang="en-US" smtClean="0"/>
+              <a:rPr lang="en-US"/>
               <a:t>Click to edit Master title style</a:t>
             </a:r>
-            <a:endParaRPr lang="en-US"/>
           </a:p>
         </p:txBody>
       </p:sp>
@@ -1212,38 +1826,37 @@
           <a:p>
             <a:pPr lvl="0"/>
             <a:r>
-              <a:rPr lang="en-US" smtClean="0"/>
+              <a:rPr lang="en-US"/>
               <a:t>Click to edit Master text styles</a:t>
             </a:r>
           </a:p>
           <a:p>
             <a:pPr lvl="1"/>
             <a:r>
-              <a:rPr lang="en-US" smtClean="0"/>
+              <a:rPr lang="en-US"/>
               <a:t>Second level</a:t>
             </a:r>
           </a:p>
           <a:p>
             <a:pPr lvl="2"/>
             <a:r>
-              <a:rPr lang="en-US" smtClean="0"/>
+              <a:rPr lang="en-US"/>
               <a:t>Third level</a:t>
             </a:r>
           </a:p>
           <a:p>
             <a:pPr lvl="3"/>
             <a:r>
-              <a:rPr lang="en-US" smtClean="0"/>
+              <a:rPr lang="en-US"/>
               <a:t>Fourth level</a:t>
             </a:r>
           </a:p>
           <a:p>
             <a:pPr lvl="4"/>
             <a:r>
-              <a:rPr lang="en-US" smtClean="0"/>
+              <a:rPr lang="en-US"/>
               <a:t>Fifth level</a:t>
             </a:r>
-            <a:endParaRPr lang="en-US"/>
           </a:p>
         </p:txBody>
       </p:sp>
@@ -1297,38 +1910,37 @@
           <a:p>
             <a:pPr lvl="0"/>
             <a:r>
-              <a:rPr lang="en-US" smtClean="0"/>
+              <a:rPr lang="en-US"/>
               <a:t>Click to edit Master text styles</a:t>
             </a:r>
           </a:p>
           <a:p>
             <a:pPr lvl="1"/>
             <a:r>
-              <a:rPr lang="en-US" smtClean="0"/>
+              <a:rPr lang="en-US"/>
               <a:t>Second level</a:t>
             </a:r>
           </a:p>
           <a:p>
             <a:pPr lvl="2"/>
             <a:r>
-              <a:rPr lang="en-US" smtClean="0"/>
+              <a:rPr lang="en-US"/>
               <a:t>Third level</a:t>
             </a:r>
           </a:p>
           <a:p>
             <a:pPr lvl="3"/>
             <a:r>
-              <a:rPr lang="en-US" smtClean="0"/>
+              <a:rPr lang="en-US"/>
               <a:t>Fourth level</a:t>
             </a:r>
           </a:p>
           <a:p>
             <a:pPr lvl="4"/>
             <a:r>
-              <a:rPr lang="en-US" smtClean="0"/>
+              <a:rPr lang="en-US"/>
               <a:t>Fifth level</a:t>
             </a:r>
-            <a:endParaRPr lang="en-US"/>
           </a:p>
         </p:txBody>
       </p:sp>
@@ -1349,7 +1961,7 @@
           <a:p>
             <a:fld id="{5BCAD085-E8A6-8845-BD4E-CB4CCA059FC4}" type="datetimeFigureOut">
               <a:rPr lang="en-US" smtClean="0"/>
-              <a:t>1/27/13</a:t>
+              <a:t>6/6/26</a:t>
             </a:fld>
             <a:endParaRPr lang="en-US"/>
           </a:p>
@@ -1447,10 +2059,9 @@
           </a:lstStyle>
           <a:p>
             <a:r>
-              <a:rPr lang="en-US" smtClean="0"/>
+              <a:rPr lang="en-US"/>
               <a:t>Click to edit Master title style</a:t>
             </a:r>
-            <a:endParaRPr lang="en-US"/>
           </a:p>
         </p:txBody>
       </p:sp>
@@ -1513,7 +2124,7 @@
           <a:p>
             <a:pPr lvl="0"/>
             <a:r>
-              <a:rPr lang="en-US" smtClean="0"/>
+              <a:rPr lang="en-US"/>
               <a:t>Click to edit Master text styles</a:t>
             </a:r>
           </a:p>
@@ -1569,38 +2180,37 @@
           <a:p>
             <a:pPr lvl="0"/>
             <a:r>
-              <a:rPr lang="en-US" smtClean="0"/>
+              <a:rPr lang="en-US"/>
               <a:t>Click to edit Master text styles</a:t>
             </a:r>
           </a:p>
           <a:p>
             <a:pPr lvl="1"/>
             <a:r>
-              <a:rPr lang="en-US" smtClean="0"/>
+              <a:rPr lang="en-US"/>
               <a:t>Second level</a:t>
             </a:r>
           </a:p>
           <a:p>
             <a:pPr lvl="2"/>
             <a:r>
-              <a:rPr lang="en-US" smtClean="0"/>
+              <a:rPr lang="en-US"/>
               <a:t>Third level</a:t>
             </a:r>
           </a:p>
           <a:p>
             <a:pPr lvl="3"/>
             <a:r>
-              <a:rPr lang="en-US" smtClean="0"/>
+              <a:rPr lang="en-US"/>
               <a:t>Fourth level</a:t>
             </a:r>
           </a:p>
           <a:p>
             <a:pPr lvl="4"/>
             <a:r>
-              <a:rPr lang="en-US" smtClean="0"/>
+              <a:rPr lang="en-US"/>
               <a:t>Fifth level</a:t>
             </a:r>
-            <a:endParaRPr lang="en-US"/>
           </a:p>
         </p:txBody>
       </p:sp>
@@ -1663,7 +2273,7 @@
           <a:p>
             <a:pPr lvl="0"/>
             <a:r>
-              <a:rPr lang="en-US" smtClean="0"/>
+              <a:rPr lang="en-US"/>
               <a:t>Click to edit Master text styles</a:t>
             </a:r>
           </a:p>
@@ -1719,38 +2329,37 @@
           <a:p>
             <a:pPr lvl="0"/>
             <a:r>
-              <a:rPr lang="en-US" smtClean="0"/>
+              <a:rPr lang="en-US"/>
               <a:t>Click to edit Master text styles</a:t>
             </a:r>
           </a:p>
           <a:p>
             <a:pPr lvl="1"/>
             <a:r>
-              <a:rPr lang="en-US" smtClean="0"/>
+              <a:rPr lang="en-US"/>
               <a:t>Second level</a:t>
             </a:r>
           </a:p>
           <a:p>
             <a:pPr lvl="2"/>
             <a:r>
-              <a:rPr lang="en-US" smtClean="0"/>
+              <a:rPr lang="en-US"/>
               <a:t>Third level</a:t>
             </a:r>
           </a:p>
           <a:p>
             <a:pPr lvl="3"/>
             <a:r>
-              <a:rPr lang="en-US" smtClean="0"/>
+              <a:rPr lang="en-US"/>
               <a:t>Fourth level</a:t>
             </a:r>
           </a:p>
           <a:p>
             <a:pPr lvl="4"/>
             <a:r>
-              <a:rPr lang="en-US" smtClean="0"/>
+              <a:rPr lang="en-US"/>
               <a:t>Fifth level</a:t>
             </a:r>
-            <a:endParaRPr lang="en-US"/>
           </a:p>
         </p:txBody>
       </p:sp>
@@ -1771,7 +2380,7 @@
           <a:p>
             <a:fld id="{5BCAD085-E8A6-8845-BD4E-CB4CCA059FC4}" type="datetimeFigureOut">
               <a:rPr lang="en-US" smtClean="0"/>
-              <a:t>1/27/13</a:t>
+              <a:t>6/6/26</a:t>
             </a:fld>
             <a:endParaRPr lang="en-US"/>
           </a:p>
@@ -1865,10 +2474,9 @@
           <a:lstStyle/>
           <a:p>
             <a:r>
-              <a:rPr lang="en-US" smtClean="0"/>
+              <a:rPr lang="en-US"/>
               <a:t>Click to edit Master title style</a:t>
             </a:r>
-            <a:endParaRPr lang="en-US"/>
           </a:p>
         </p:txBody>
       </p:sp>
@@ -1889,7 +2497,7 @@
           <a:p>
             <a:fld id="{5BCAD085-E8A6-8845-BD4E-CB4CCA059FC4}" type="datetimeFigureOut">
               <a:rPr lang="en-US" smtClean="0"/>
-              <a:t>1/27/13</a:t>
+              <a:t>6/6/26</a:t>
             </a:fld>
             <a:endParaRPr lang="en-US"/>
           </a:p>
@@ -1984,7 +2592,7 @@
           <a:p>
             <a:fld id="{5BCAD085-E8A6-8845-BD4E-CB4CCA059FC4}" type="datetimeFigureOut">
               <a:rPr lang="en-US" smtClean="0"/>
-              <a:t>1/27/13</a:t>
+              <a:t>6/6/26</a:t>
             </a:fld>
             <a:endParaRPr lang="en-US"/>
           </a:p>
@@ -2087,10 +2695,9 @@
           </a:lstStyle>
           <a:p>
             <a:r>
-              <a:rPr lang="en-US" smtClean="0"/>
+              <a:rPr lang="en-US"/>
               <a:t>Click to edit Master title style</a:t>
             </a:r>
-            <a:endParaRPr lang="en-US"/>
           </a:p>
         </p:txBody>
       </p:sp>
@@ -2144,38 +2751,37 @@
           <a:p>
             <a:pPr lvl="0"/>
             <a:r>
-              <a:rPr lang="en-US" smtClean="0"/>
+              <a:rPr lang="en-US"/>
               <a:t>Click to edit Master text styles</a:t>
             </a:r>
           </a:p>
           <a:p>
             <a:pPr lvl="1"/>
             <a:r>
-              <a:rPr lang="en-US" smtClean="0"/>
+              <a:rPr lang="en-US"/>
               <a:t>Second level</a:t>
             </a:r>
           </a:p>
           <a:p>
             <a:pPr lvl="2"/>
             <a:r>
-              <a:rPr lang="en-US" smtClean="0"/>
+              <a:rPr lang="en-US"/>
               <a:t>Third level</a:t>
             </a:r>
           </a:p>
           <a:p>
             <a:pPr lvl="3"/>
             <a:r>
-              <a:rPr lang="en-US" smtClean="0"/>
+              <a:rPr lang="en-US"/>
               <a:t>Fourth level</a:t>
             </a:r>
           </a:p>
           <a:p>
             <a:pPr lvl="4"/>
             <a:r>
-              <a:rPr lang="en-US" smtClean="0"/>
+              <a:rPr lang="en-US"/>
               <a:t>Fifth level</a:t>
             </a:r>
-            <a:endParaRPr lang="en-US"/>
           </a:p>
         </p:txBody>
       </p:sp>
@@ -2238,7 +2844,7 @@
           <a:p>
             <a:pPr lvl="0"/>
             <a:r>
-              <a:rPr lang="en-US" smtClean="0"/>
+              <a:rPr lang="en-US"/>
               <a:t>Click to edit Master text styles</a:t>
             </a:r>
           </a:p>
@@ -2261,7 +2867,7 @@
           <a:p>
             <a:fld id="{5BCAD085-E8A6-8845-BD4E-CB4CCA059FC4}" type="datetimeFigureOut">
               <a:rPr lang="en-US" smtClean="0"/>
-              <a:t>1/27/13</a:t>
+              <a:t>6/6/26</a:t>
             </a:fld>
             <a:endParaRPr lang="en-US"/>
           </a:p>
@@ -2364,10 +2970,9 @@
           </a:lstStyle>
           <a:p>
             <a:r>
-              <a:rPr lang="en-US" smtClean="0"/>
+              <a:rPr lang="en-US"/>
               <a:t>Click to edit Master title style</a:t>
             </a:r>
-            <a:endParaRPr lang="en-US"/>
           </a:p>
         </p:txBody>
       </p:sp>
@@ -2491,7 +3096,7 @@
           <a:p>
             <a:pPr lvl="0"/>
             <a:r>
-              <a:rPr lang="en-US" smtClean="0"/>
+              <a:rPr lang="en-US"/>
               <a:t>Click to edit Master text styles</a:t>
             </a:r>
           </a:p>
@@ -2514,7 +3119,7 @@
           <a:p>
             <a:fld id="{5BCAD085-E8A6-8845-BD4E-CB4CCA059FC4}" type="datetimeFigureOut">
               <a:rPr lang="en-US" smtClean="0"/>
-              <a:t>1/27/13</a:t>
+              <a:t>6/6/26</a:t>
             </a:fld>
             <a:endParaRPr lang="en-US"/>
           </a:p>
@@ -2623,10 +3228,9 @@
           <a:lstStyle/>
           <a:p>
             <a:r>
-              <a:rPr lang="en-US" smtClean="0"/>
+              <a:rPr lang="en-US"/>
               <a:t>Click to edit Master title style</a:t>
             </a:r>
-            <a:endParaRPr lang="en-US"/>
           </a:p>
         </p:txBody>
       </p:sp>
@@ -2657,38 +3261,37 @@
           <a:p>
             <a:pPr lvl="0"/>
             <a:r>
-              <a:rPr lang="en-US" smtClean="0"/>
+              <a:rPr lang="en-US"/>
               <a:t>Click to edit Master text styles</a:t>
             </a:r>
           </a:p>
           <a:p>
             <a:pPr lvl="1"/>
             <a:r>
-              <a:rPr lang="en-US" smtClean="0"/>
+              <a:rPr lang="en-US"/>
               <a:t>Second level</a:t>
             </a:r>
           </a:p>
           <a:p>
             <a:pPr lvl="2"/>
             <a:r>
-              <a:rPr lang="en-US" smtClean="0"/>
+              <a:rPr lang="en-US"/>
               <a:t>Third level</a:t>
             </a:r>
           </a:p>
           <a:p>
             <a:pPr lvl="3"/>
             <a:r>
-              <a:rPr lang="en-US" smtClean="0"/>
+              <a:rPr lang="en-US"/>
               <a:t>Fourth level</a:t>
             </a:r>
           </a:p>
           <a:p>
             <a:pPr lvl="4"/>
             <a:r>
-              <a:rPr lang="en-US" smtClean="0"/>
+              <a:rPr lang="en-US"/>
               <a:t>Fifth level</a:t>
             </a:r>
-            <a:endParaRPr lang="en-US"/>
           </a:p>
         </p:txBody>
       </p:sp>
@@ -2727,7 +3330,7 @@
           <a:p>
             <a:fld id="{5BCAD085-E8A6-8845-BD4E-CB4CCA059FC4}" type="datetimeFigureOut">
               <a:rPr lang="en-US" smtClean="0"/>
-              <a:t>1/27/13</a:t>
+              <a:t>6/6/26</a:t>
             </a:fld>
             <a:endParaRPr lang="en-US"/>
           </a:p>
@@ -3086,7 +3689,7 @@
 </file>
 
 <file path=ppt/slides/slide1.xml><?xml version="1.0" encoding="utf-8"?>
-<p:sld xmlns:a="http://schemas.openxmlformats.org/drawingml/2006/main" xmlns:p="http://schemas.openxmlformats.org/presentationml/2006/main" xmlns:r="http://schemas.openxmlformats.org/officeDocument/2006/relationships">
+<p:sld xmlns:a="http://schemas.openxmlformats.org/drawingml/2006/main" xmlns:r="http://schemas.openxmlformats.org/officeDocument/2006/relationships" xmlns:p="http://schemas.openxmlformats.org/presentationml/2006/main">
   <p:cSld>
     <p:spTree>
       <p:nvGrpSpPr>
@@ -3094,7 +3697,14 @@
         <p:cNvGrpSpPr/>
         <p:nvPr/>
       </p:nvGrpSpPr>
-      <p:grpSpPr/>
+      <p:grpSpPr>
+        <a:xfrm>
+          <a:off x="0" y="0"/>
+          <a:ext cx="0" cy="0"/>
+          <a:chOff x="0" y="0"/>
+          <a:chExt cx="0" cy="0"/>
+        </a:xfrm>
+      </p:grpSpPr>
       <p:sp>
         <p:nvSpPr>
           <p:cNvPr id="2" name="Rectangle 1"/>
@@ -3135,6 +3745,7 @@
           <a:lstStyle/>
           <a:p>
             <a:pPr algn="ctr"/>
+            <a:endParaRPr/>
           </a:p>
         </p:txBody>
       </p:sp>
@@ -3178,6 +3789,7 @@
           <a:lstStyle/>
           <a:p>
             <a:pPr algn="ctr"/>
+            <a:endParaRPr/>
           </a:p>
         </p:txBody>
       </p:sp>
@@ -3221,92 +3833,7 @@
           <a:lstStyle/>
           <a:p>
             <a:pPr algn="ctr"/>
-          </a:p>
-        </p:txBody>
-      </p:sp>
-      <p:sp>
-        <p:nvSpPr>
-          <p:cNvPr id="5" name="Rectangle 4"/>
-          <p:cNvSpPr/>
-          <p:nvPr/>
-        </p:nvSpPr>
-        <p:spPr>
-          <a:xfrm>
-            <a:off x="8714232" y="0"/>
-            <a:ext cx="3474720" cy="6858000"/>
-          </a:xfrm>
-          <a:prstGeom prst="rect">
-            <a:avLst/>
-          </a:prstGeom>
-          <a:solidFill>
-            <a:srgbClr val="373652"/>
-          </a:solidFill>
-          <a:ln>
-            <a:noFill/>
-          </a:ln>
-        </p:spPr>
-        <p:style>
-          <a:lnRef idx="1">
-            <a:schemeClr val="accent1"/>
-          </a:lnRef>
-          <a:fillRef idx="3">
-            <a:schemeClr val="accent1"/>
-          </a:fillRef>
-          <a:effectRef idx="2">
-            <a:schemeClr val="accent1"/>
-          </a:effectRef>
-          <a:fontRef idx="minor">
-            <a:schemeClr val="lt1"/>
-          </a:fontRef>
-        </p:style>
-        <p:txBody>
-          <a:bodyPr rtlCol="0" anchor="ctr"/>
-          <a:lstStyle/>
-          <a:p>
-            <a:pPr algn="ctr"/>
-          </a:p>
-        </p:txBody>
-      </p:sp>
-      <p:sp>
-        <p:nvSpPr>
-          <p:cNvPr id="6" name="Rectangle 5"/>
-          <p:cNvSpPr/>
-          <p:nvPr/>
-        </p:nvSpPr>
-        <p:spPr>
-          <a:xfrm>
-            <a:off x="8668512" y="0"/>
-            <a:ext cx="54864" cy="6858000"/>
-          </a:xfrm>
-          <a:prstGeom prst="rect">
-            <a:avLst/>
-          </a:prstGeom>
-          <a:solidFill>
-            <a:srgbClr val="FCB514"/>
-          </a:solidFill>
-          <a:ln>
-            <a:noFill/>
-          </a:ln>
-        </p:spPr>
-        <p:style>
-          <a:lnRef idx="1">
-            <a:schemeClr val="accent1"/>
-          </a:lnRef>
-          <a:fillRef idx="3">
-            <a:schemeClr val="accent1"/>
-          </a:fillRef>
-          <a:effectRef idx="2">
-            <a:schemeClr val="accent1"/>
-          </a:effectRef>
-          <a:fontRef idx="minor">
-            <a:schemeClr val="lt1"/>
-          </a:fontRef>
-        </p:style>
-        <p:txBody>
-          <a:bodyPr rtlCol="0" anchor="ctr"/>
-          <a:lstStyle/>
-          <a:p>
-            <a:pPr algn="ctr"/>
+            <a:endParaRPr/>
           </a:p>
         </p:txBody>
       </p:sp>
@@ -3318,8 +3845,8 @@
         </p:nvSpPr>
         <p:spPr>
           <a:xfrm>
-            <a:off x="548640" y="2011680"/>
-            <a:ext cx="7772400" cy="2011680"/>
+            <a:off x="2208211" y="2259448"/>
+            <a:ext cx="7772400" cy="830997"/>
           </a:xfrm>
           <a:prstGeom prst="rect">
             <a:avLst/>
@@ -3332,24 +3859,47 @@
           </a:bodyPr>
           <a:lstStyle/>
           <a:p>
-            <a:pPr algn="l">
+            <a:pPr algn="ctr">
               <a:spcBef>
                 <a:spcPts val="0"/>
               </a:spcBef>
               <a:spcAft>
-                <a:spcPts val="600"/>
+                <a:spcPts val="0"/>
               </a:spcAft>
             </a:pPr>
             <a:r>
-              <a:rPr sz="4800" b="1" i="0">
+              <a:rPr lang="de-AT" sz="4800" b="1" dirty="0">
                 <a:solidFill>
-                  <a:srgbClr val="FFFFFF"/>
+                  <a:schemeClr val="bg1"/>
                 </a:solidFill>
                 <a:latin typeface="Barlow Condensed"/>
               </a:rPr>
-              <a:t>Presentation Title</a:t>
-            </a:r>
-          </a:p>
+              <a:t>AI Service Desk Autopilot</a:t>
+            </a:r>
+          </a:p>
+        </p:txBody>
+      </p:sp>
+      <p:sp>
+        <p:nvSpPr>
+          <p:cNvPr id="8" name="TextBox 7"/>
+          <p:cNvSpPr txBox="1"/>
+          <p:nvPr/>
+        </p:nvSpPr>
+        <p:spPr>
+          <a:xfrm>
+            <a:off x="7762613" y="6578548"/>
+            <a:ext cx="4426212" cy="215444"/>
+          </a:xfrm>
+          <a:prstGeom prst="rect">
+            <a:avLst/>
+          </a:prstGeom>
+          <a:noFill/>
+        </p:spPr>
+        <p:txBody>
+          <a:bodyPr wrap="none">
+            <a:spAutoFit/>
+          </a:bodyPr>
+          <a:lstStyle/>
           <a:p>
             <a:pPr algn="l">
               <a:spcBef>
@@ -3360,27 +3910,261 @@
               </a:spcAft>
             </a:pPr>
             <a:r>
-              <a:rPr sz="1800" b="0" i="0">
+              <a:rPr lang="de-AT" sz="800" b="1" i="0" dirty="0">
                 <a:solidFill>
-                  <a:srgbClr val="B0B8D4"/>
+                  <a:srgbClr val="70789A"/>
                 </a:solidFill>
                 <a:latin typeface="Inter"/>
               </a:rPr>
-              <a:t>Subtitle or project name goes here</a:t>
-            </a:r>
-          </a:p>
-        </p:txBody>
-      </p:sp>
-      <p:sp>
-        <p:nvSpPr>
-          <p:cNvPr id="8" name="TextBox 7"/>
+              <a:t>07.06.0226</a:t>
+            </a:r>
+            <a:r>
+              <a:rPr sz="800" b="1" i="0" dirty="0">
+                <a:solidFill>
+                  <a:srgbClr val="70789A"/>
+                </a:solidFill>
+                <a:latin typeface="Inter"/>
+              </a:rPr>
+              <a:t>  ·  </a:t>
+            </a:r>
+            <a:r>
+              <a:rPr lang="de-AT" sz="800" b="1" dirty="0">
+                <a:solidFill>
+                  <a:srgbClr val="70789A"/>
+                </a:solidFill>
+                <a:latin typeface="Inter"/>
+              </a:rPr>
+              <a:t>Muhammad </a:t>
+            </a:r>
+            <a:r>
+              <a:rPr lang="de-AT" sz="800" b="1" dirty="0" err="1">
+                <a:solidFill>
+                  <a:srgbClr val="70789A"/>
+                </a:solidFill>
+                <a:latin typeface="Inter"/>
+              </a:rPr>
+              <a:t>Banbhan</a:t>
+            </a:r>
+            <a:r>
+              <a:rPr sz="800" b="1" i="0" dirty="0">
+                <a:solidFill>
+                  <a:srgbClr val="70789A"/>
+                </a:solidFill>
+                <a:latin typeface="Inter"/>
+              </a:rPr>
+              <a:t> </a:t>
+            </a:r>
+            <a:r>
+              <a:rPr lang="de-AT" sz="800" b="1" i="0" dirty="0">
+                <a:solidFill>
+                  <a:srgbClr val="70789A"/>
+                </a:solidFill>
+                <a:latin typeface="Inter"/>
+              </a:rPr>
+              <a:t>, Mohammad Teimori, Julian Wollner</a:t>
+            </a:r>
+            <a:r>
+              <a:rPr sz="800" b="1" i="0" dirty="0">
+                <a:solidFill>
+                  <a:srgbClr val="70789A"/>
+                </a:solidFill>
+                <a:latin typeface="Inter"/>
+              </a:rPr>
+              <a:t>·  </a:t>
+            </a:r>
+            <a:r>
+              <a:rPr lang="de-AT" sz="800" b="1" i="0" dirty="0">
+                <a:solidFill>
+                  <a:srgbClr val="70789A"/>
+                </a:solidFill>
+                <a:latin typeface="Inter"/>
+              </a:rPr>
+              <a:t>Version: final-final-gut_2</a:t>
+            </a:r>
+            <a:endParaRPr sz="800" b="1" i="0" dirty="0">
+              <a:solidFill>
+                <a:srgbClr val="70789A"/>
+              </a:solidFill>
+              <a:latin typeface="Inter"/>
+            </a:endParaRPr>
+          </a:p>
+        </p:txBody>
+      </p:sp>
+      <p:sp>
+        <p:nvSpPr>
+          <p:cNvPr id="9" name="TextBox 8"/>
           <p:cNvSpPr txBox="1"/>
           <p:nvPr/>
         </p:nvSpPr>
         <p:spPr>
           <a:xfrm>
-            <a:off x="548640" y="5577840"/>
-            <a:ext cx="4572000" cy="822960"/>
+            <a:off x="5490720" y="3198167"/>
+            <a:ext cx="1207382" cy="461665"/>
+          </a:xfrm>
+          <a:prstGeom prst="rect">
+            <a:avLst/>
+          </a:prstGeom>
+          <a:noFill/>
+        </p:spPr>
+        <p:txBody>
+          <a:bodyPr wrap="none">
+            <a:spAutoFit/>
+          </a:bodyPr>
+          <a:lstStyle/>
+          <a:p>
+            <a:pPr algn="ctr">
+              <a:spcBef>
+                <a:spcPts val="0"/>
+              </a:spcBef>
+              <a:spcAft>
+                <a:spcPts val="0"/>
+              </a:spcAft>
+            </a:pPr>
+            <a:r>
+              <a:rPr lang="de-AT" sz="2400" b="1" dirty="0" err="1">
+                <a:solidFill>
+                  <a:schemeClr val="bg1">
+                    <a:lumMod val="50000"/>
+                  </a:schemeClr>
+                </a:solidFill>
+                <a:latin typeface="Barlow Condensed"/>
+              </a:rPr>
+              <a:t>Techbold</a:t>
+            </a:r>
+            <a:endParaRPr sz="2400" b="1" i="0" dirty="0">
+              <a:solidFill>
+                <a:schemeClr val="bg1">
+                  <a:lumMod val="50000"/>
+                </a:schemeClr>
+              </a:solidFill>
+              <a:latin typeface="Barlow Condensed"/>
+            </a:endParaRPr>
+          </a:p>
+        </p:txBody>
+      </p:sp>
+    </p:spTree>
+  </p:cSld>
+  <p:clrMapOvr>
+    <a:masterClrMapping/>
+  </p:clrMapOvr>
+</p:sld>
+</file>
+
+<file path=ppt/slides/slide10.xml><?xml version="1.0" encoding="utf-8"?>
+<p:sld xmlns:a="http://schemas.openxmlformats.org/drawingml/2006/main" xmlns:r="http://schemas.openxmlformats.org/officeDocument/2006/relationships" xmlns:p="http://schemas.openxmlformats.org/presentationml/2006/main" show="0">
+  <p:cSld>
+    <p:spTree>
+      <p:nvGrpSpPr>
+        <p:cNvPr id="1" name=""/>
+        <p:cNvGrpSpPr/>
+        <p:nvPr/>
+      </p:nvGrpSpPr>
+      <p:grpSpPr>
+        <a:xfrm>
+          <a:off x="0" y="0"/>
+          <a:ext cx="0" cy="0"/>
+          <a:chOff x="0" y="0"/>
+          <a:chExt cx="0" cy="0"/>
+        </a:xfrm>
+      </p:grpSpPr>
+      <p:sp>
+        <p:nvSpPr>
+          <p:cNvPr id="2" name="Rectangle 1"/>
+          <p:cNvSpPr/>
+          <p:nvPr/>
+        </p:nvSpPr>
+        <p:spPr>
+          <a:xfrm>
+            <a:off x="0" y="0"/>
+            <a:ext cx="12188952" cy="6858000"/>
+          </a:xfrm>
+          <a:prstGeom prst="rect">
+            <a:avLst/>
+          </a:prstGeom>
+          <a:solidFill>
+            <a:srgbClr val="262B4B"/>
+          </a:solidFill>
+          <a:ln>
+            <a:noFill/>
+          </a:ln>
+        </p:spPr>
+        <p:style>
+          <a:lnRef idx="1">
+            <a:schemeClr val="accent1"/>
+          </a:lnRef>
+          <a:fillRef idx="3">
+            <a:schemeClr val="accent1"/>
+          </a:fillRef>
+          <a:effectRef idx="2">
+            <a:schemeClr val="accent1"/>
+          </a:effectRef>
+          <a:fontRef idx="minor">
+            <a:schemeClr val="lt1"/>
+          </a:fontRef>
+        </p:style>
+        <p:txBody>
+          <a:bodyPr rtlCol="0" anchor="ctr"/>
+          <a:lstStyle/>
+          <a:p>
+            <a:pPr algn="ctr"/>
+            <a:endParaRPr/>
+          </a:p>
+        </p:txBody>
+      </p:sp>
+      <p:sp>
+        <p:nvSpPr>
+          <p:cNvPr id="3" name="Rectangle 2"/>
+          <p:cNvSpPr/>
+          <p:nvPr/>
+        </p:nvSpPr>
+        <p:spPr>
+          <a:xfrm>
+            <a:off x="0" y="0"/>
+            <a:ext cx="12188952" cy="64008"/>
+          </a:xfrm>
+          <a:prstGeom prst="rect">
+            <a:avLst/>
+          </a:prstGeom>
+          <a:solidFill>
+            <a:srgbClr val="FCB514"/>
+          </a:solidFill>
+          <a:ln>
+            <a:noFill/>
+          </a:ln>
+        </p:spPr>
+        <p:style>
+          <a:lnRef idx="1">
+            <a:schemeClr val="accent1"/>
+          </a:lnRef>
+          <a:fillRef idx="3">
+            <a:schemeClr val="accent1"/>
+          </a:fillRef>
+          <a:effectRef idx="2">
+            <a:schemeClr val="accent1"/>
+          </a:effectRef>
+          <a:fontRef idx="minor">
+            <a:schemeClr val="lt1"/>
+          </a:fontRef>
+        </p:style>
+        <p:txBody>
+          <a:bodyPr rtlCol="0" anchor="ctr"/>
+          <a:lstStyle/>
+          <a:p>
+            <a:pPr algn="ctr"/>
+            <a:endParaRPr/>
+          </a:p>
+        </p:txBody>
+      </p:sp>
+      <p:sp>
+        <p:nvSpPr>
+          <p:cNvPr id="4" name="TextBox 3"/>
+          <p:cNvSpPr txBox="1"/>
+          <p:nvPr/>
+        </p:nvSpPr>
+        <p:spPr>
+          <a:xfrm>
+            <a:off x="548640" y="1645920"/>
+            <a:ext cx="7315200" cy="1828800"/>
           </a:xfrm>
           <a:prstGeom prst="rect">
             <a:avLst/>
@@ -3402,27 +4186,71 @@
               </a:spcAft>
             </a:pPr>
             <a:r>
-              <a:rPr sz="800" b="1" i="0">
+              <a:rPr sz="8000" b="1" i="0">
                 <a:solidFill>
-                  <a:srgbClr val="70789A"/>
+                  <a:srgbClr val="FFFFFF"/>
                 </a:solidFill>
-                <a:latin typeface="Inter"/>
+                <a:latin typeface="Barlow Condensed"/>
               </a:rPr>
-              <a:t>DATE  ·  AUTHOR  ·  VERSION</a:t>
-            </a:r>
-          </a:p>
-        </p:txBody>
-      </p:sp>
-      <p:sp>
-        <p:nvSpPr>
-          <p:cNvPr id="9" name="TextBox 8"/>
+              <a:t>techbold</a:t>
+            </a:r>
+          </a:p>
+        </p:txBody>
+      </p:sp>
+      <p:sp>
+        <p:nvSpPr>
+          <p:cNvPr id="5" name="Rectangle 4"/>
+          <p:cNvSpPr/>
+          <p:nvPr/>
+        </p:nvSpPr>
+        <p:spPr>
+          <a:xfrm>
+            <a:off x="548640" y="3749039"/>
+            <a:ext cx="5029200" cy="64008"/>
+          </a:xfrm>
+          <a:prstGeom prst="rect">
+            <a:avLst/>
+          </a:prstGeom>
+          <a:solidFill>
+            <a:srgbClr val="FCB514"/>
+          </a:solidFill>
+          <a:ln>
+            <a:noFill/>
+          </a:ln>
+        </p:spPr>
+        <p:style>
+          <a:lnRef idx="1">
+            <a:schemeClr val="accent1"/>
+          </a:lnRef>
+          <a:fillRef idx="3">
+            <a:schemeClr val="accent1"/>
+          </a:fillRef>
+          <a:effectRef idx="2">
+            <a:schemeClr val="accent1"/>
+          </a:effectRef>
+          <a:fontRef idx="minor">
+            <a:schemeClr val="lt1"/>
+          </a:fontRef>
+        </p:style>
+        <p:txBody>
+          <a:bodyPr rtlCol="0" anchor="ctr"/>
+          <a:lstStyle/>
+          <a:p>
+            <a:pPr algn="ctr"/>
+            <a:endParaRPr/>
+          </a:p>
+        </p:txBody>
+      </p:sp>
+      <p:sp>
+        <p:nvSpPr>
+          <p:cNvPr id="6" name="TextBox 5"/>
           <p:cNvSpPr txBox="1"/>
           <p:nvPr/>
         </p:nvSpPr>
         <p:spPr>
           <a:xfrm>
-            <a:off x="9079992" y="2834640"/>
-            <a:ext cx="2560320" cy="640080"/>
+            <a:off x="548640" y="3977639"/>
+            <a:ext cx="7315200" cy="457200"/>
           </a:xfrm>
           <a:prstGeom prst="rect">
             <a:avLst/>
@@ -3435,7 +4263,7 @@
           </a:bodyPr>
           <a:lstStyle/>
           <a:p>
-            <a:pPr algn="ctr">
+            <a:pPr algn="l">
               <a:spcBef>
                 <a:spcPts val="0"/>
               </a:spcBef>
@@ -3444,27 +4272,27 @@
               </a:spcAft>
             </a:pPr>
             <a:r>
-              <a:rPr sz="3200" b="1" i="0">
+              <a:rPr sz="1600" b="0" i="1">
                 <a:solidFill>
-                  <a:srgbClr val="FFFFFF"/>
+                  <a:srgbClr val="9098B8"/>
                 </a:solidFill>
-                <a:latin typeface="Barlow Condensed"/>
+                <a:latin typeface="Inter"/>
               </a:rPr>
-              <a:t>techbold</a:t>
-            </a:r>
-          </a:p>
-        </p:txBody>
-      </p:sp>
-      <p:sp>
-        <p:nvSpPr>
-          <p:cNvPr id="10" name="TextBox 9"/>
+              <a:t>die Extrameile ist unser Standard</a:t>
+            </a:r>
+          </a:p>
+        </p:txBody>
+      </p:sp>
+      <p:sp>
+        <p:nvSpPr>
+          <p:cNvPr id="7" name="TextBox 6"/>
           <p:cNvSpPr txBox="1"/>
           <p:nvPr/>
         </p:nvSpPr>
         <p:spPr>
           <a:xfrm>
-            <a:off x="9079992" y="3566160"/>
-            <a:ext cx="2560320" cy="365760"/>
+            <a:off x="548640" y="4846320"/>
+            <a:ext cx="5486400" cy="1097280"/>
           </a:xfrm>
           <a:prstGeom prst="rect">
             <a:avLst/>
@@ -3477,7 +4305,269 @@
           </a:bodyPr>
           <a:lstStyle/>
           <a:p>
-            <a:pPr algn="ctr">
+            <a:pPr algn="l">
+              <a:spcBef>
+                <a:spcPts val="0"/>
+              </a:spcBef>
+              <a:spcAft>
+                <a:spcPts val="400"/>
+              </a:spcAft>
+            </a:pPr>
+            <a:r>
+              <a:rPr sz="1400" b="0" i="0">
+                <a:solidFill>
+                  <a:srgbClr val="B0B8D4"/>
+                </a:solidFill>
+                <a:latin typeface="Inter"/>
+              </a:rPr>
+              <a:t>www.techbold.at</a:t>
+            </a:r>
+          </a:p>
+          <a:p>
+            <a:pPr algn="l">
+              <a:spcBef>
+                <a:spcPts val="0"/>
+              </a:spcBef>
+              <a:spcAft>
+                <a:spcPts val="400"/>
+              </a:spcAft>
+            </a:pPr>
+            <a:r>
+              <a:rPr sz="1300" b="0" i="0">
+                <a:solidFill>
+                  <a:srgbClr val="B0B8D4"/>
+                </a:solidFill>
+                <a:latin typeface="Inter"/>
+              </a:rPr>
+              <a:t>+43 59 555</a:t>
+            </a:r>
+          </a:p>
+        </p:txBody>
+      </p:sp>
+      <p:sp>
+        <p:nvSpPr>
+          <p:cNvPr id="8" name="Rectangle 7"/>
+          <p:cNvSpPr/>
+          <p:nvPr/>
+        </p:nvSpPr>
+        <p:spPr>
+          <a:xfrm>
+            <a:off x="0" y="6793992"/>
+            <a:ext cx="12188952" cy="64008"/>
+          </a:xfrm>
+          <a:prstGeom prst="rect">
+            <a:avLst/>
+          </a:prstGeom>
+          <a:solidFill>
+            <a:srgbClr val="FCB514"/>
+          </a:solidFill>
+          <a:ln>
+            <a:noFill/>
+          </a:ln>
+        </p:spPr>
+        <p:style>
+          <a:lnRef idx="1">
+            <a:schemeClr val="accent1"/>
+          </a:lnRef>
+          <a:fillRef idx="3">
+            <a:schemeClr val="accent1"/>
+          </a:fillRef>
+          <a:effectRef idx="2">
+            <a:schemeClr val="accent1"/>
+          </a:effectRef>
+          <a:fontRef idx="minor">
+            <a:schemeClr val="lt1"/>
+          </a:fontRef>
+        </p:style>
+        <p:txBody>
+          <a:bodyPr rtlCol="0" anchor="ctr"/>
+          <a:lstStyle/>
+          <a:p>
+            <a:pPr algn="ctr"/>
+            <a:endParaRPr/>
+          </a:p>
+        </p:txBody>
+      </p:sp>
+    </p:spTree>
+  </p:cSld>
+  <p:clrMapOvr>
+    <a:masterClrMapping/>
+  </p:clrMapOvr>
+</p:sld>
+</file>
+
+<file path=ppt/slides/slide11.xml><?xml version="1.0" encoding="utf-8"?>
+<p:sld xmlns:a="http://schemas.openxmlformats.org/drawingml/2006/main" xmlns:r="http://schemas.openxmlformats.org/officeDocument/2006/relationships" xmlns:p="http://schemas.openxmlformats.org/presentationml/2006/main" show="0">
+  <p:cSld>
+    <p:spTree>
+      <p:nvGrpSpPr>
+        <p:cNvPr id="1" name=""/>
+        <p:cNvGrpSpPr/>
+        <p:nvPr/>
+      </p:nvGrpSpPr>
+      <p:grpSpPr>
+        <a:xfrm>
+          <a:off x="0" y="0"/>
+          <a:ext cx="0" cy="0"/>
+          <a:chOff x="0" y="0"/>
+          <a:chExt cx="0" cy="0"/>
+        </a:xfrm>
+      </p:grpSpPr>
+      <p:sp>
+        <p:nvSpPr>
+          <p:cNvPr id="2" name="Rectangle 1"/>
+          <p:cNvSpPr/>
+          <p:nvPr/>
+        </p:nvSpPr>
+        <p:spPr>
+          <a:xfrm>
+            <a:off x="0" y="0"/>
+            <a:ext cx="12188952" cy="6858000"/>
+          </a:xfrm>
+          <a:prstGeom prst="rect">
+            <a:avLst/>
+          </a:prstGeom>
+          <a:solidFill>
+            <a:srgbClr val="F3F2EA"/>
+          </a:solidFill>
+          <a:ln>
+            <a:noFill/>
+          </a:ln>
+        </p:spPr>
+        <p:style>
+          <a:lnRef idx="1">
+            <a:schemeClr val="accent1"/>
+          </a:lnRef>
+          <a:fillRef idx="3">
+            <a:schemeClr val="accent1"/>
+          </a:fillRef>
+          <a:effectRef idx="2">
+            <a:schemeClr val="accent1"/>
+          </a:effectRef>
+          <a:fontRef idx="minor">
+            <a:schemeClr val="lt1"/>
+          </a:fontRef>
+        </p:style>
+        <p:txBody>
+          <a:bodyPr rtlCol="0" anchor="ctr"/>
+          <a:lstStyle/>
+          <a:p>
+            <a:pPr algn="ctr"/>
+            <a:endParaRPr/>
+          </a:p>
+        </p:txBody>
+      </p:sp>
+      <p:sp>
+        <p:nvSpPr>
+          <p:cNvPr id="3" name="Rectangle 2"/>
+          <p:cNvSpPr/>
+          <p:nvPr/>
+        </p:nvSpPr>
+        <p:spPr>
+          <a:xfrm>
+            <a:off x="0" y="0"/>
+            <a:ext cx="3291840" cy="6858000"/>
+          </a:xfrm>
+          <a:prstGeom prst="rect">
+            <a:avLst/>
+          </a:prstGeom>
+          <a:solidFill>
+            <a:srgbClr val="262B4B"/>
+          </a:solidFill>
+          <a:ln>
+            <a:noFill/>
+          </a:ln>
+        </p:spPr>
+        <p:style>
+          <a:lnRef idx="1">
+            <a:schemeClr val="accent1"/>
+          </a:lnRef>
+          <a:fillRef idx="3">
+            <a:schemeClr val="accent1"/>
+          </a:fillRef>
+          <a:effectRef idx="2">
+            <a:schemeClr val="accent1"/>
+          </a:effectRef>
+          <a:fontRef idx="minor">
+            <a:schemeClr val="lt1"/>
+          </a:fontRef>
+        </p:style>
+        <p:txBody>
+          <a:bodyPr rtlCol="0" anchor="ctr"/>
+          <a:lstStyle/>
+          <a:p>
+            <a:pPr algn="ctr"/>
+            <a:endParaRPr/>
+          </a:p>
+        </p:txBody>
+      </p:sp>
+      <p:sp>
+        <p:nvSpPr>
+          <p:cNvPr id="4" name="Rectangle 3"/>
+          <p:cNvSpPr/>
+          <p:nvPr/>
+        </p:nvSpPr>
+        <p:spPr>
+          <a:xfrm>
+            <a:off x="3291840" y="0"/>
+            <a:ext cx="54864" cy="6858000"/>
+          </a:xfrm>
+          <a:prstGeom prst="rect">
+            <a:avLst/>
+          </a:prstGeom>
+          <a:solidFill>
+            <a:srgbClr val="FCB514"/>
+          </a:solidFill>
+          <a:ln>
+            <a:noFill/>
+          </a:ln>
+        </p:spPr>
+        <p:style>
+          <a:lnRef idx="1">
+            <a:schemeClr val="accent1"/>
+          </a:lnRef>
+          <a:fillRef idx="3">
+            <a:schemeClr val="accent1"/>
+          </a:fillRef>
+          <a:effectRef idx="2">
+            <a:schemeClr val="accent1"/>
+          </a:effectRef>
+          <a:fontRef idx="minor">
+            <a:schemeClr val="lt1"/>
+          </a:fontRef>
+        </p:style>
+        <p:txBody>
+          <a:bodyPr rtlCol="0" anchor="ctr"/>
+          <a:lstStyle/>
+          <a:p>
+            <a:pPr algn="ctr"/>
+            <a:endParaRPr/>
+          </a:p>
+        </p:txBody>
+      </p:sp>
+      <p:sp>
+        <p:nvSpPr>
+          <p:cNvPr id="5" name="TextBox 4"/>
+          <p:cNvSpPr txBox="1"/>
+          <p:nvPr/>
+        </p:nvSpPr>
+        <p:spPr>
+          <a:xfrm>
+            <a:off x="365760" y="2286000"/>
+            <a:ext cx="2560320" cy="1828800"/>
+          </a:xfrm>
+          <a:prstGeom prst="rect">
+            <a:avLst/>
+          </a:prstGeom>
+          <a:noFill/>
+        </p:spPr>
+        <p:txBody>
+          <a:bodyPr wrap="square">
+            <a:spAutoFit/>
+          </a:bodyPr>
+          <a:lstStyle/>
+          <a:p>
+            <a:pPr algn="l">
               <a:spcBef>
                 <a:spcPts val="0"/>
               </a:spcBef>
@@ -3486,13 +4576,628 @@
               </a:spcAft>
             </a:pPr>
             <a:r>
-              <a:rPr sz="900" b="0" i="1">
+              <a:rPr sz="3800" b="1" i="0">
+                <a:solidFill>
+                  <a:srgbClr val="FFFFFF"/>
+                </a:solidFill>
+                <a:latin typeface="Barlow Condensed"/>
+              </a:rPr>
+              <a:t>AGENDA</a:t>
+            </a:r>
+          </a:p>
+          <a:p>
+            <a:pPr algn="l">
+              <a:spcBef>
+                <a:spcPts val="800"/>
+              </a:spcBef>
+              <a:spcAft>
+                <a:spcPts val="0"/>
+              </a:spcAft>
+            </a:pPr>
+            <a:r>
+              <a:rPr sz="1300" b="0" i="0">
                 <a:solidFill>
                   <a:srgbClr val="9098B8"/>
                 </a:solidFill>
                 <a:latin typeface="Inter"/>
               </a:rPr>
-              <a:t>die Extrameile ist unser Standard</a:t>
+              <a:t>Today's session</a:t>
+            </a:r>
+          </a:p>
+        </p:txBody>
+      </p:sp>
+      <p:sp>
+        <p:nvSpPr>
+          <p:cNvPr id="6" name="TextBox 5"/>
+          <p:cNvSpPr txBox="1"/>
+          <p:nvPr/>
+        </p:nvSpPr>
+        <p:spPr>
+          <a:xfrm>
+            <a:off x="3749039" y="1005840"/>
+            <a:ext cx="731520" cy="685800"/>
+          </a:xfrm>
+          <a:prstGeom prst="rect">
+            <a:avLst/>
+          </a:prstGeom>
+          <a:noFill/>
+        </p:spPr>
+        <p:txBody>
+          <a:bodyPr wrap="none">
+            <a:spAutoFit/>
+          </a:bodyPr>
+          <a:lstStyle/>
+          <a:p>
+            <a:pPr algn="l">
+              <a:spcBef>
+                <a:spcPts val="0"/>
+              </a:spcBef>
+              <a:spcAft>
+                <a:spcPts val="0"/>
+              </a:spcAft>
+            </a:pPr>
+            <a:r>
+              <a:rPr sz="2800" b="1" i="0">
+                <a:solidFill>
+                  <a:srgbClr val="FCB514"/>
+                </a:solidFill>
+                <a:latin typeface="Barlow Condensed"/>
+              </a:rPr>
+              <a:t>01</a:t>
+            </a:r>
+          </a:p>
+        </p:txBody>
+      </p:sp>
+      <p:sp>
+        <p:nvSpPr>
+          <p:cNvPr id="7" name="TextBox 6"/>
+          <p:cNvSpPr txBox="1"/>
+          <p:nvPr/>
+        </p:nvSpPr>
+        <p:spPr>
+          <a:xfrm>
+            <a:off x="4571999" y="1078992"/>
+            <a:ext cx="7132320" cy="548640"/>
+          </a:xfrm>
+          <a:prstGeom prst="rect">
+            <a:avLst/>
+          </a:prstGeom>
+          <a:noFill/>
+        </p:spPr>
+        <p:txBody>
+          <a:bodyPr wrap="none">
+            <a:spAutoFit/>
+          </a:bodyPr>
+          <a:lstStyle/>
+          <a:p>
+            <a:pPr algn="l">
+              <a:spcBef>
+                <a:spcPts val="0"/>
+              </a:spcBef>
+              <a:spcAft>
+                <a:spcPts val="0"/>
+              </a:spcAft>
+            </a:pPr>
+            <a:r>
+              <a:rPr sz="1800" b="1" i="0" dirty="0">
+                <a:solidFill>
+                  <a:srgbClr val="373652"/>
+                </a:solidFill>
+                <a:latin typeface="Inter"/>
+              </a:rPr>
+              <a:t>Introduction &amp; Context</a:t>
+            </a:r>
+          </a:p>
+        </p:txBody>
+      </p:sp>
+      <p:sp>
+        <p:nvSpPr>
+          <p:cNvPr id="8" name="Rectangle 7"/>
+          <p:cNvSpPr/>
+          <p:nvPr/>
+        </p:nvSpPr>
+        <p:spPr>
+          <a:xfrm>
+            <a:off x="3749039" y="1755648"/>
+            <a:ext cx="7863840" cy="9525"/>
+          </a:xfrm>
+          <a:prstGeom prst="rect">
+            <a:avLst/>
+          </a:prstGeom>
+          <a:solidFill>
+            <a:srgbClr val="E5E7EA"/>
+          </a:solidFill>
+          <a:ln>
+            <a:noFill/>
+          </a:ln>
+        </p:spPr>
+        <p:style>
+          <a:lnRef idx="1">
+            <a:schemeClr val="accent1"/>
+          </a:lnRef>
+          <a:fillRef idx="3">
+            <a:schemeClr val="accent1"/>
+          </a:fillRef>
+          <a:effectRef idx="2">
+            <a:schemeClr val="accent1"/>
+          </a:effectRef>
+          <a:fontRef idx="minor">
+            <a:schemeClr val="lt1"/>
+          </a:fontRef>
+        </p:style>
+        <p:txBody>
+          <a:bodyPr rtlCol="0" anchor="ctr"/>
+          <a:lstStyle/>
+          <a:p>
+            <a:pPr algn="ctr"/>
+            <a:endParaRPr/>
+          </a:p>
+        </p:txBody>
+      </p:sp>
+      <p:sp>
+        <p:nvSpPr>
+          <p:cNvPr id="9" name="TextBox 8"/>
+          <p:cNvSpPr txBox="1"/>
+          <p:nvPr/>
+        </p:nvSpPr>
+        <p:spPr>
+          <a:xfrm>
+            <a:off x="3749039" y="1920240"/>
+            <a:ext cx="731520" cy="685800"/>
+          </a:xfrm>
+          <a:prstGeom prst="rect">
+            <a:avLst/>
+          </a:prstGeom>
+          <a:noFill/>
+        </p:spPr>
+        <p:txBody>
+          <a:bodyPr wrap="none">
+            <a:spAutoFit/>
+          </a:bodyPr>
+          <a:lstStyle/>
+          <a:p>
+            <a:pPr algn="l">
+              <a:spcBef>
+                <a:spcPts val="0"/>
+              </a:spcBef>
+              <a:spcAft>
+                <a:spcPts val="0"/>
+              </a:spcAft>
+            </a:pPr>
+            <a:r>
+              <a:rPr sz="2800" b="1" i="0">
+                <a:solidFill>
+                  <a:srgbClr val="FCB514"/>
+                </a:solidFill>
+                <a:latin typeface="Barlow Condensed"/>
+              </a:rPr>
+              <a:t>02</a:t>
+            </a:r>
+          </a:p>
+        </p:txBody>
+      </p:sp>
+      <p:sp>
+        <p:nvSpPr>
+          <p:cNvPr id="10" name="TextBox 9"/>
+          <p:cNvSpPr txBox="1"/>
+          <p:nvPr/>
+        </p:nvSpPr>
+        <p:spPr>
+          <a:xfrm>
+            <a:off x="4571999" y="1993392"/>
+            <a:ext cx="7132320" cy="548640"/>
+          </a:xfrm>
+          <a:prstGeom prst="rect">
+            <a:avLst/>
+          </a:prstGeom>
+          <a:noFill/>
+        </p:spPr>
+        <p:txBody>
+          <a:bodyPr wrap="none">
+            <a:spAutoFit/>
+          </a:bodyPr>
+          <a:lstStyle/>
+          <a:p>
+            <a:pPr algn="l">
+              <a:spcBef>
+                <a:spcPts val="0"/>
+              </a:spcBef>
+              <a:spcAft>
+                <a:spcPts val="0"/>
+              </a:spcAft>
+            </a:pPr>
+            <a:r>
+              <a:rPr sz="1800" b="0" i="0">
+                <a:solidFill>
+                  <a:srgbClr val="262B4B"/>
+                </a:solidFill>
+                <a:latin typeface="Inter"/>
+              </a:rPr>
+              <a:t>Current State Analysis</a:t>
+            </a:r>
+          </a:p>
+        </p:txBody>
+      </p:sp>
+      <p:sp>
+        <p:nvSpPr>
+          <p:cNvPr id="11" name="Rectangle 10"/>
+          <p:cNvSpPr/>
+          <p:nvPr/>
+        </p:nvSpPr>
+        <p:spPr>
+          <a:xfrm>
+            <a:off x="3749039" y="2670048"/>
+            <a:ext cx="7863840" cy="9525"/>
+          </a:xfrm>
+          <a:prstGeom prst="rect">
+            <a:avLst/>
+          </a:prstGeom>
+          <a:solidFill>
+            <a:srgbClr val="E5E7EA"/>
+          </a:solidFill>
+          <a:ln>
+            <a:noFill/>
+          </a:ln>
+        </p:spPr>
+        <p:style>
+          <a:lnRef idx="1">
+            <a:schemeClr val="accent1"/>
+          </a:lnRef>
+          <a:fillRef idx="3">
+            <a:schemeClr val="accent1"/>
+          </a:fillRef>
+          <a:effectRef idx="2">
+            <a:schemeClr val="accent1"/>
+          </a:effectRef>
+          <a:fontRef idx="minor">
+            <a:schemeClr val="lt1"/>
+          </a:fontRef>
+        </p:style>
+        <p:txBody>
+          <a:bodyPr rtlCol="0" anchor="ctr"/>
+          <a:lstStyle/>
+          <a:p>
+            <a:pPr algn="ctr"/>
+            <a:endParaRPr/>
+          </a:p>
+        </p:txBody>
+      </p:sp>
+      <p:sp>
+        <p:nvSpPr>
+          <p:cNvPr id="12" name="TextBox 11"/>
+          <p:cNvSpPr txBox="1"/>
+          <p:nvPr/>
+        </p:nvSpPr>
+        <p:spPr>
+          <a:xfrm>
+            <a:off x="3749039" y="2834640"/>
+            <a:ext cx="731520" cy="685800"/>
+          </a:xfrm>
+          <a:prstGeom prst="rect">
+            <a:avLst/>
+          </a:prstGeom>
+          <a:noFill/>
+        </p:spPr>
+        <p:txBody>
+          <a:bodyPr wrap="none">
+            <a:spAutoFit/>
+          </a:bodyPr>
+          <a:lstStyle/>
+          <a:p>
+            <a:pPr algn="l">
+              <a:spcBef>
+                <a:spcPts val="0"/>
+              </a:spcBef>
+              <a:spcAft>
+                <a:spcPts val="0"/>
+              </a:spcAft>
+            </a:pPr>
+            <a:r>
+              <a:rPr sz="2800" b="1" i="0">
+                <a:solidFill>
+                  <a:srgbClr val="FCB514"/>
+                </a:solidFill>
+                <a:latin typeface="Barlow Condensed"/>
+              </a:rPr>
+              <a:t>03</a:t>
+            </a:r>
+          </a:p>
+        </p:txBody>
+      </p:sp>
+      <p:sp>
+        <p:nvSpPr>
+          <p:cNvPr id="13" name="TextBox 12"/>
+          <p:cNvSpPr txBox="1"/>
+          <p:nvPr/>
+        </p:nvSpPr>
+        <p:spPr>
+          <a:xfrm>
+            <a:off x="4571999" y="2907792"/>
+            <a:ext cx="7132320" cy="548640"/>
+          </a:xfrm>
+          <a:prstGeom prst="rect">
+            <a:avLst/>
+          </a:prstGeom>
+          <a:noFill/>
+        </p:spPr>
+        <p:txBody>
+          <a:bodyPr wrap="none">
+            <a:spAutoFit/>
+          </a:bodyPr>
+          <a:lstStyle/>
+          <a:p>
+            <a:pPr algn="l">
+              <a:spcBef>
+                <a:spcPts val="0"/>
+              </a:spcBef>
+              <a:spcAft>
+                <a:spcPts val="0"/>
+              </a:spcAft>
+            </a:pPr>
+            <a:r>
+              <a:rPr sz="1800" b="0" i="0">
+                <a:solidFill>
+                  <a:srgbClr val="262B4B"/>
+                </a:solidFill>
+                <a:latin typeface="Inter"/>
+              </a:rPr>
+              <a:t>Proposed Solution</a:t>
+            </a:r>
+          </a:p>
+        </p:txBody>
+      </p:sp>
+      <p:sp>
+        <p:nvSpPr>
+          <p:cNvPr id="14" name="Rectangle 13"/>
+          <p:cNvSpPr/>
+          <p:nvPr/>
+        </p:nvSpPr>
+        <p:spPr>
+          <a:xfrm>
+            <a:off x="3749039" y="3584448"/>
+            <a:ext cx="7863840" cy="9525"/>
+          </a:xfrm>
+          <a:prstGeom prst="rect">
+            <a:avLst/>
+          </a:prstGeom>
+          <a:solidFill>
+            <a:srgbClr val="E5E7EA"/>
+          </a:solidFill>
+          <a:ln>
+            <a:noFill/>
+          </a:ln>
+        </p:spPr>
+        <p:style>
+          <a:lnRef idx="1">
+            <a:schemeClr val="accent1"/>
+          </a:lnRef>
+          <a:fillRef idx="3">
+            <a:schemeClr val="accent1"/>
+          </a:fillRef>
+          <a:effectRef idx="2">
+            <a:schemeClr val="accent1"/>
+          </a:effectRef>
+          <a:fontRef idx="minor">
+            <a:schemeClr val="lt1"/>
+          </a:fontRef>
+        </p:style>
+        <p:txBody>
+          <a:bodyPr rtlCol="0" anchor="ctr"/>
+          <a:lstStyle/>
+          <a:p>
+            <a:pPr algn="ctr"/>
+            <a:endParaRPr/>
+          </a:p>
+        </p:txBody>
+      </p:sp>
+      <p:sp>
+        <p:nvSpPr>
+          <p:cNvPr id="15" name="TextBox 14"/>
+          <p:cNvSpPr txBox="1"/>
+          <p:nvPr/>
+        </p:nvSpPr>
+        <p:spPr>
+          <a:xfrm>
+            <a:off x="3749039" y="3749040"/>
+            <a:ext cx="731520" cy="685800"/>
+          </a:xfrm>
+          <a:prstGeom prst="rect">
+            <a:avLst/>
+          </a:prstGeom>
+          <a:noFill/>
+        </p:spPr>
+        <p:txBody>
+          <a:bodyPr wrap="none">
+            <a:spAutoFit/>
+          </a:bodyPr>
+          <a:lstStyle/>
+          <a:p>
+            <a:pPr algn="l">
+              <a:spcBef>
+                <a:spcPts val="0"/>
+              </a:spcBef>
+              <a:spcAft>
+                <a:spcPts val="0"/>
+              </a:spcAft>
+            </a:pPr>
+            <a:r>
+              <a:rPr sz="2800" b="1" i="0">
+                <a:solidFill>
+                  <a:srgbClr val="FCB514"/>
+                </a:solidFill>
+                <a:latin typeface="Barlow Condensed"/>
+              </a:rPr>
+              <a:t>04</a:t>
+            </a:r>
+          </a:p>
+        </p:txBody>
+      </p:sp>
+      <p:sp>
+        <p:nvSpPr>
+          <p:cNvPr id="16" name="TextBox 15"/>
+          <p:cNvSpPr txBox="1"/>
+          <p:nvPr/>
+        </p:nvSpPr>
+        <p:spPr>
+          <a:xfrm>
+            <a:off x="4571999" y="3822192"/>
+            <a:ext cx="7132320" cy="548640"/>
+          </a:xfrm>
+          <a:prstGeom prst="rect">
+            <a:avLst/>
+          </a:prstGeom>
+          <a:noFill/>
+        </p:spPr>
+        <p:txBody>
+          <a:bodyPr wrap="none">
+            <a:spAutoFit/>
+          </a:bodyPr>
+          <a:lstStyle/>
+          <a:p>
+            <a:pPr algn="l">
+              <a:spcBef>
+                <a:spcPts val="0"/>
+              </a:spcBef>
+              <a:spcAft>
+                <a:spcPts val="0"/>
+              </a:spcAft>
+            </a:pPr>
+            <a:r>
+              <a:rPr sz="1800" b="0" i="0">
+                <a:solidFill>
+                  <a:srgbClr val="262B4B"/>
+                </a:solidFill>
+                <a:latin typeface="Inter"/>
+              </a:rPr>
+              <a:t>Implementation Roadmap</a:t>
+            </a:r>
+          </a:p>
+        </p:txBody>
+      </p:sp>
+      <p:sp>
+        <p:nvSpPr>
+          <p:cNvPr id="17" name="Rectangle 16"/>
+          <p:cNvSpPr/>
+          <p:nvPr/>
+        </p:nvSpPr>
+        <p:spPr>
+          <a:xfrm>
+            <a:off x="3749039" y="4498848"/>
+            <a:ext cx="7863840" cy="9525"/>
+          </a:xfrm>
+          <a:prstGeom prst="rect">
+            <a:avLst/>
+          </a:prstGeom>
+          <a:solidFill>
+            <a:srgbClr val="E5E7EA"/>
+          </a:solidFill>
+          <a:ln>
+            <a:noFill/>
+          </a:ln>
+        </p:spPr>
+        <p:style>
+          <a:lnRef idx="1">
+            <a:schemeClr val="accent1"/>
+          </a:lnRef>
+          <a:fillRef idx="3">
+            <a:schemeClr val="accent1"/>
+          </a:fillRef>
+          <a:effectRef idx="2">
+            <a:schemeClr val="accent1"/>
+          </a:effectRef>
+          <a:fontRef idx="minor">
+            <a:schemeClr val="lt1"/>
+          </a:fontRef>
+        </p:style>
+        <p:txBody>
+          <a:bodyPr rtlCol="0" anchor="ctr"/>
+          <a:lstStyle/>
+          <a:p>
+            <a:pPr algn="ctr"/>
+            <a:endParaRPr/>
+          </a:p>
+        </p:txBody>
+      </p:sp>
+      <p:sp>
+        <p:nvSpPr>
+          <p:cNvPr id="18" name="TextBox 17"/>
+          <p:cNvSpPr txBox="1"/>
+          <p:nvPr/>
+        </p:nvSpPr>
+        <p:spPr>
+          <a:xfrm>
+            <a:off x="3749039" y="4663440"/>
+            <a:ext cx="731520" cy="685800"/>
+          </a:xfrm>
+          <a:prstGeom prst="rect">
+            <a:avLst/>
+          </a:prstGeom>
+          <a:noFill/>
+        </p:spPr>
+        <p:txBody>
+          <a:bodyPr wrap="none">
+            <a:spAutoFit/>
+          </a:bodyPr>
+          <a:lstStyle/>
+          <a:p>
+            <a:pPr algn="l">
+              <a:spcBef>
+                <a:spcPts val="0"/>
+              </a:spcBef>
+              <a:spcAft>
+                <a:spcPts val="0"/>
+              </a:spcAft>
+            </a:pPr>
+            <a:r>
+              <a:rPr sz="2800" b="1" i="0">
+                <a:solidFill>
+                  <a:srgbClr val="FCB514"/>
+                </a:solidFill>
+                <a:latin typeface="Barlow Condensed"/>
+              </a:rPr>
+              <a:t>05</a:t>
+            </a:r>
+          </a:p>
+        </p:txBody>
+      </p:sp>
+      <p:sp>
+        <p:nvSpPr>
+          <p:cNvPr id="19" name="TextBox 18"/>
+          <p:cNvSpPr txBox="1"/>
+          <p:nvPr/>
+        </p:nvSpPr>
+        <p:spPr>
+          <a:xfrm>
+            <a:off x="4571999" y="4736592"/>
+            <a:ext cx="7132320" cy="548640"/>
+          </a:xfrm>
+          <a:prstGeom prst="rect">
+            <a:avLst/>
+          </a:prstGeom>
+          <a:noFill/>
+        </p:spPr>
+        <p:txBody>
+          <a:bodyPr wrap="none">
+            <a:spAutoFit/>
+          </a:bodyPr>
+          <a:lstStyle/>
+          <a:p>
+            <a:pPr algn="l">
+              <a:spcBef>
+                <a:spcPts val="0"/>
+              </a:spcBef>
+              <a:spcAft>
+                <a:spcPts val="0"/>
+              </a:spcAft>
+            </a:pPr>
+            <a:r>
+              <a:rPr sz="1800" b="0" i="0">
+                <a:solidFill>
+                  <a:srgbClr val="262B4B"/>
+                </a:solidFill>
+                <a:latin typeface="Inter"/>
+              </a:rPr>
+              <a:t>Q &amp; A</a:t>
             </a:r>
           </a:p>
         </p:txBody>
@@ -3506,7 +5211,295 @@
 </file>
 
 <file path=ppt/slides/slide2.xml><?xml version="1.0" encoding="utf-8"?>
-<p:sld xmlns:a="http://schemas.openxmlformats.org/drawingml/2006/main" xmlns:p="http://schemas.openxmlformats.org/presentationml/2006/main" xmlns:r="http://schemas.openxmlformats.org/officeDocument/2006/relationships">
+<p:sld xmlns:a="http://schemas.openxmlformats.org/drawingml/2006/main" xmlns:r="http://schemas.openxmlformats.org/officeDocument/2006/relationships" xmlns:p="http://schemas.openxmlformats.org/presentationml/2006/main">
+  <p:cSld>
+    <p:spTree>
+      <p:nvGrpSpPr>
+        <p:cNvPr id="1" name="">
+          <a:extLst>
+            <a:ext uri="{FF2B5EF4-FFF2-40B4-BE49-F238E27FC236}">
+              <a16:creationId xmlns:a16="http://schemas.microsoft.com/office/drawing/2014/main" id="{80C003A1-6C49-42EA-4395-12C8C105C6F4}"/>
+            </a:ext>
+          </a:extLst>
+        </p:cNvPr>
+        <p:cNvGrpSpPr/>
+        <p:nvPr/>
+      </p:nvGrpSpPr>
+      <p:grpSpPr>
+        <a:xfrm>
+          <a:off x="0" y="0"/>
+          <a:ext cx="0" cy="0"/>
+          <a:chOff x="0" y="0"/>
+          <a:chExt cx="0" cy="0"/>
+        </a:xfrm>
+      </p:grpSpPr>
+      <p:sp>
+        <p:nvSpPr>
+          <p:cNvPr id="2" name="Rectangle 1">
+            <a:extLst>
+              <a:ext uri="{FF2B5EF4-FFF2-40B4-BE49-F238E27FC236}">
+                <a16:creationId xmlns:a16="http://schemas.microsoft.com/office/drawing/2014/main" id="{F7A83A2D-E694-CE3F-05F2-6620877E6F3B}"/>
+              </a:ext>
+            </a:extLst>
+          </p:cNvPr>
+          <p:cNvSpPr/>
+          <p:nvPr/>
+        </p:nvSpPr>
+        <p:spPr>
+          <a:xfrm>
+            <a:off x="0" y="0"/>
+            <a:ext cx="12188952" cy="6858000"/>
+          </a:xfrm>
+          <a:prstGeom prst="rect">
+            <a:avLst/>
+          </a:prstGeom>
+          <a:solidFill>
+            <a:srgbClr val="FCB514"/>
+          </a:solidFill>
+          <a:ln>
+            <a:noFill/>
+          </a:ln>
+        </p:spPr>
+        <p:style>
+          <a:lnRef idx="1">
+            <a:schemeClr val="accent1"/>
+          </a:lnRef>
+          <a:fillRef idx="3">
+            <a:schemeClr val="accent1"/>
+          </a:fillRef>
+          <a:effectRef idx="2">
+            <a:schemeClr val="accent1"/>
+          </a:effectRef>
+          <a:fontRef idx="minor">
+            <a:schemeClr val="lt1"/>
+          </a:fontRef>
+        </p:style>
+        <p:txBody>
+          <a:bodyPr rtlCol="0" anchor="ctr"/>
+          <a:lstStyle/>
+          <a:p>
+            <a:pPr algn="ctr"/>
+            <a:endParaRPr/>
+          </a:p>
+        </p:txBody>
+      </p:sp>
+      <p:sp>
+        <p:nvSpPr>
+          <p:cNvPr id="3" name="Rectangle 2">
+            <a:extLst>
+              <a:ext uri="{FF2B5EF4-FFF2-40B4-BE49-F238E27FC236}">
+                <a16:creationId xmlns:a16="http://schemas.microsoft.com/office/drawing/2014/main" id="{DEF849B1-7CBD-0C3F-3E32-8194E9433907}"/>
+              </a:ext>
+            </a:extLst>
+          </p:cNvPr>
+          <p:cNvSpPr/>
+          <p:nvPr/>
+        </p:nvSpPr>
+        <p:spPr>
+          <a:xfrm>
+            <a:off x="0" y="0"/>
+            <a:ext cx="1097280" cy="6858000"/>
+          </a:xfrm>
+          <a:prstGeom prst="rect">
+            <a:avLst/>
+          </a:prstGeom>
+          <a:solidFill>
+            <a:srgbClr val="262B4B"/>
+          </a:solidFill>
+          <a:ln>
+            <a:noFill/>
+          </a:ln>
+        </p:spPr>
+        <p:style>
+          <a:lnRef idx="1">
+            <a:schemeClr val="accent1"/>
+          </a:lnRef>
+          <a:fillRef idx="3">
+            <a:schemeClr val="accent1"/>
+          </a:fillRef>
+          <a:effectRef idx="2">
+            <a:schemeClr val="accent1"/>
+          </a:effectRef>
+          <a:fontRef idx="minor">
+            <a:schemeClr val="lt1"/>
+          </a:fontRef>
+        </p:style>
+        <p:txBody>
+          <a:bodyPr rtlCol="0" anchor="ctr"/>
+          <a:lstStyle/>
+          <a:p>
+            <a:pPr algn="ctr"/>
+            <a:endParaRPr/>
+          </a:p>
+        </p:txBody>
+      </p:sp>
+      <p:sp>
+        <p:nvSpPr>
+          <p:cNvPr id="4" name="TextBox 3">
+            <a:extLst>
+              <a:ext uri="{FF2B5EF4-FFF2-40B4-BE49-F238E27FC236}">
+                <a16:creationId xmlns:a16="http://schemas.microsoft.com/office/drawing/2014/main" id="{8A15D1DA-CCF9-DECF-9DD5-6B1D1FE60CB3}"/>
+              </a:ext>
+            </a:extLst>
+          </p:cNvPr>
+          <p:cNvSpPr txBox="1"/>
+          <p:nvPr/>
+        </p:nvSpPr>
+        <p:spPr>
+          <a:xfrm>
+            <a:off x="137160" y="2560320"/>
+            <a:ext cx="822960" cy="1097280"/>
+          </a:xfrm>
+          <a:prstGeom prst="rect">
+            <a:avLst/>
+          </a:prstGeom>
+          <a:noFill/>
+        </p:spPr>
+        <p:txBody>
+          <a:bodyPr wrap="none">
+            <a:spAutoFit/>
+          </a:bodyPr>
+          <a:lstStyle/>
+          <a:p>
+            <a:pPr algn="ctr">
+              <a:spcBef>
+                <a:spcPts val="0"/>
+              </a:spcBef>
+              <a:spcAft>
+                <a:spcPts val="0"/>
+              </a:spcAft>
+            </a:pPr>
+            <a:r>
+              <a:rPr sz="3600" b="1" i="0">
+                <a:solidFill>
+                  <a:srgbClr val="FCB514"/>
+                </a:solidFill>
+                <a:latin typeface="Barlow Condensed"/>
+              </a:rPr>
+              <a:t>01</a:t>
+            </a:r>
+          </a:p>
+        </p:txBody>
+      </p:sp>
+      <p:sp>
+        <p:nvSpPr>
+          <p:cNvPr id="6" name="TextBox 5">
+            <a:extLst>
+              <a:ext uri="{FF2B5EF4-FFF2-40B4-BE49-F238E27FC236}">
+                <a16:creationId xmlns:a16="http://schemas.microsoft.com/office/drawing/2014/main" id="{69970151-638F-B02C-9D20-B9188728646C}"/>
+              </a:ext>
+            </a:extLst>
+          </p:cNvPr>
+          <p:cNvSpPr txBox="1"/>
+          <p:nvPr/>
+        </p:nvSpPr>
+        <p:spPr>
+          <a:xfrm>
+            <a:off x="1463040" y="2194560"/>
+            <a:ext cx="8229600" cy="892552"/>
+          </a:xfrm>
+          <a:prstGeom prst="rect">
+            <a:avLst/>
+          </a:prstGeom>
+          <a:noFill/>
+        </p:spPr>
+        <p:txBody>
+          <a:bodyPr wrap="square">
+            <a:spAutoFit/>
+          </a:bodyPr>
+          <a:lstStyle/>
+          <a:p>
+            <a:pPr algn="l">
+              <a:spcBef>
+                <a:spcPts val="0"/>
+              </a:spcBef>
+              <a:spcAft>
+                <a:spcPts val="800"/>
+              </a:spcAft>
+            </a:pPr>
+            <a:r>
+              <a:rPr lang="de-AT" sz="5200" b="1" i="0" dirty="0">
+                <a:solidFill>
+                  <a:srgbClr val="262B4B"/>
+                </a:solidFill>
+                <a:latin typeface="Barlow Condensed"/>
+              </a:rPr>
+              <a:t>Motivation</a:t>
+            </a:r>
+            <a:endParaRPr sz="5200" b="1" i="0" dirty="0">
+              <a:solidFill>
+                <a:srgbClr val="262B4B"/>
+              </a:solidFill>
+              <a:latin typeface="Barlow Condensed"/>
+            </a:endParaRPr>
+          </a:p>
+        </p:txBody>
+      </p:sp>
+      <p:sp>
+        <p:nvSpPr>
+          <p:cNvPr id="7" name="Rectangle 6">
+            <a:extLst>
+              <a:ext uri="{FF2B5EF4-FFF2-40B4-BE49-F238E27FC236}">
+                <a16:creationId xmlns:a16="http://schemas.microsoft.com/office/drawing/2014/main" id="{0C2B1D40-2F7D-2039-9532-C155F74981BD}"/>
+              </a:ext>
+            </a:extLst>
+          </p:cNvPr>
+          <p:cNvSpPr/>
+          <p:nvPr/>
+        </p:nvSpPr>
+        <p:spPr>
+          <a:xfrm>
+            <a:off x="0" y="6793992"/>
+            <a:ext cx="12188952" cy="64008"/>
+          </a:xfrm>
+          <a:prstGeom prst="rect">
+            <a:avLst/>
+          </a:prstGeom>
+          <a:solidFill>
+            <a:srgbClr val="262B4B"/>
+          </a:solidFill>
+          <a:ln>
+            <a:noFill/>
+          </a:ln>
+        </p:spPr>
+        <p:style>
+          <a:lnRef idx="1">
+            <a:schemeClr val="accent1"/>
+          </a:lnRef>
+          <a:fillRef idx="3">
+            <a:schemeClr val="accent1"/>
+          </a:fillRef>
+          <a:effectRef idx="2">
+            <a:schemeClr val="accent1"/>
+          </a:effectRef>
+          <a:fontRef idx="minor">
+            <a:schemeClr val="lt1"/>
+          </a:fontRef>
+        </p:style>
+        <p:txBody>
+          <a:bodyPr rtlCol="0" anchor="ctr"/>
+          <a:lstStyle/>
+          <a:p>
+            <a:pPr algn="ctr"/>
+            <a:endParaRPr/>
+          </a:p>
+        </p:txBody>
+      </p:sp>
+    </p:spTree>
+    <p:extLst>
+      <p:ext uri="{BB962C8B-B14F-4D97-AF65-F5344CB8AC3E}">
+        <p14:creationId xmlns:p14="http://schemas.microsoft.com/office/powerpoint/2010/main" val="1606949400"/>
+      </p:ext>
+    </p:extLst>
+  </p:cSld>
+  <p:clrMapOvr>
+    <a:masterClrMapping/>
+  </p:clrMapOvr>
+</p:sld>
+</file>
+
+<file path=ppt/slides/slide3.xml><?xml version="1.0" encoding="utf-8"?>
+<p:sld xmlns:a="http://schemas.openxmlformats.org/drawingml/2006/main" xmlns:r="http://schemas.openxmlformats.org/officeDocument/2006/relationships" xmlns:p="http://schemas.openxmlformats.org/presentationml/2006/main">
   <p:cSld>
     <p:spTree>
       <p:nvGrpSpPr>
@@ -3514,7 +5507,14 @@
         <p:cNvGrpSpPr/>
         <p:nvPr/>
       </p:nvGrpSpPr>
-      <p:grpSpPr/>
+      <p:grpSpPr>
+        <a:xfrm>
+          <a:off x="0" y="0"/>
+          <a:ext cx="0" cy="0"/>
+          <a:chOff x="0" y="0"/>
+          <a:chExt cx="0" cy="0"/>
+        </a:xfrm>
+      </p:grpSpPr>
       <p:sp>
         <p:nvSpPr>
           <p:cNvPr id="2" name="Rectangle 1"/>
@@ -3525,49 +5525,6 @@
           <a:xfrm>
             <a:off x="0" y="0"/>
             <a:ext cx="12188952" cy="6858000"/>
-          </a:xfrm>
-          <a:prstGeom prst="rect">
-            <a:avLst/>
-          </a:prstGeom>
-          <a:solidFill>
-            <a:srgbClr val="F3F2EA"/>
-          </a:solidFill>
-          <a:ln>
-            <a:noFill/>
-          </a:ln>
-        </p:spPr>
-        <p:style>
-          <a:lnRef idx="1">
-            <a:schemeClr val="accent1"/>
-          </a:lnRef>
-          <a:fillRef idx="3">
-            <a:schemeClr val="accent1"/>
-          </a:fillRef>
-          <a:effectRef idx="2">
-            <a:schemeClr val="accent1"/>
-          </a:effectRef>
-          <a:fontRef idx="minor">
-            <a:schemeClr val="lt1"/>
-          </a:fontRef>
-        </p:style>
-        <p:txBody>
-          <a:bodyPr rtlCol="0" anchor="ctr"/>
-          <a:lstStyle/>
-          <a:p>
-            <a:pPr algn="ctr"/>
-          </a:p>
-        </p:txBody>
-      </p:sp>
-      <p:sp>
-        <p:nvSpPr>
-          <p:cNvPr id="3" name="Rectangle 2"/>
-          <p:cNvSpPr/>
-          <p:nvPr/>
-        </p:nvSpPr>
-        <p:spPr>
-          <a:xfrm>
-            <a:off x="0" y="0"/>
-            <a:ext cx="3291840" cy="6858000"/>
           </a:xfrm>
           <a:prstGeom prst="rect">
             <a:avLst/>
@@ -3598,19 +5555,20 @@
           <a:lstStyle/>
           <a:p>
             <a:pPr algn="ctr"/>
-          </a:p>
-        </p:txBody>
-      </p:sp>
-      <p:sp>
-        <p:nvSpPr>
-          <p:cNvPr id="4" name="Rectangle 3"/>
+            <a:endParaRPr/>
+          </a:p>
+        </p:txBody>
+      </p:sp>
+      <p:sp>
+        <p:nvSpPr>
+          <p:cNvPr id="3" name="Rectangle 2"/>
           <p:cNvSpPr/>
           <p:nvPr/>
         </p:nvSpPr>
         <p:spPr>
           <a:xfrm>
-            <a:off x="3291840" y="0"/>
-            <a:ext cx="54864" cy="6858000"/>
+            <a:off x="0" y="0"/>
+            <a:ext cx="12188952" cy="64008"/>
           </a:xfrm>
           <a:prstGeom prst="rect">
             <a:avLst/>
@@ -3641,19 +5599,20 @@
           <a:lstStyle/>
           <a:p>
             <a:pPr algn="ctr"/>
-          </a:p>
-        </p:txBody>
-      </p:sp>
-      <p:sp>
-        <p:nvSpPr>
-          <p:cNvPr id="5" name="TextBox 4"/>
+            <a:endParaRPr/>
+          </a:p>
+        </p:txBody>
+      </p:sp>
+      <p:sp>
+        <p:nvSpPr>
+          <p:cNvPr id="4" name="TextBox 3"/>
           <p:cNvSpPr txBox="1"/>
           <p:nvPr/>
         </p:nvSpPr>
         <p:spPr>
           <a:xfrm>
-            <a:off x="365760" y="2286000"/>
-            <a:ext cx="2560320" cy="1828800"/>
+            <a:off x="548640" y="274320"/>
+            <a:ext cx="10058400" cy="685800"/>
           </a:xfrm>
           <a:prstGeom prst="rect">
             <a:avLst/>
@@ -3661,7 +5620,7 @@
           <a:noFill/>
         </p:spPr>
         <p:txBody>
-          <a:bodyPr wrap="square">
+          <a:bodyPr wrap="none">
             <a:spAutoFit/>
           </a:bodyPr>
           <a:lstStyle/>
@@ -3675,46 +5634,115 @@
               </a:spcAft>
             </a:pPr>
             <a:r>
-              <a:rPr sz="3800" b="1" i="0">
+              <a:rPr sz="3400" b="1" i="0">
                 <a:solidFill>
                   <a:srgbClr val="FFFFFF"/>
                 </a:solidFill>
                 <a:latin typeface="Barlow Condensed"/>
               </a:rPr>
-              <a:t>AGENDA</a:t>
-            </a:r>
-          </a:p>
-          <a:p>
-            <a:pPr algn="l">
-              <a:spcBef>
-                <a:spcPts val="800"/>
-              </a:spcBef>
-              <a:spcAft>
-                <a:spcPts val="0"/>
-              </a:spcAft>
-            </a:pPr>
-            <a:r>
-              <a:rPr sz="1300" b="0" i="0">
-                <a:solidFill>
-                  <a:srgbClr val="9098B8"/>
-                </a:solidFill>
-                <a:latin typeface="Inter"/>
-              </a:rPr>
-              <a:t>Today's session</a:t>
-            </a:r>
-          </a:p>
-        </p:txBody>
-      </p:sp>
-      <p:sp>
-        <p:nvSpPr>
-          <p:cNvPr id="6" name="TextBox 5"/>
+              <a:t>Key Metrics</a:t>
+            </a:r>
+          </a:p>
+        </p:txBody>
+      </p:sp>
+      <p:sp>
+        <p:nvSpPr>
+          <p:cNvPr id="5" name="Rectangle 4"/>
+          <p:cNvSpPr/>
+          <p:nvPr/>
+        </p:nvSpPr>
+        <p:spPr>
+          <a:xfrm>
+            <a:off x="548640" y="1280160"/>
+            <a:ext cx="3514344" cy="4114800"/>
+          </a:xfrm>
+          <a:prstGeom prst="rect">
+            <a:avLst/>
+          </a:prstGeom>
+          <a:solidFill>
+            <a:srgbClr val="373652"/>
+          </a:solidFill>
+          <a:ln>
+            <a:noFill/>
+          </a:ln>
+        </p:spPr>
+        <p:style>
+          <a:lnRef idx="1">
+            <a:schemeClr val="accent1"/>
+          </a:lnRef>
+          <a:fillRef idx="3">
+            <a:schemeClr val="accent1"/>
+          </a:fillRef>
+          <a:effectRef idx="2">
+            <a:schemeClr val="accent1"/>
+          </a:effectRef>
+          <a:fontRef idx="minor">
+            <a:schemeClr val="lt1"/>
+          </a:fontRef>
+        </p:style>
+        <p:txBody>
+          <a:bodyPr rtlCol="0" anchor="ctr"/>
+          <a:lstStyle/>
+          <a:p>
+            <a:pPr algn="ctr"/>
+            <a:endParaRPr/>
+          </a:p>
+        </p:txBody>
+      </p:sp>
+      <p:sp>
+        <p:nvSpPr>
+          <p:cNvPr id="6" name="Rectangle 5"/>
+          <p:cNvSpPr/>
+          <p:nvPr/>
+        </p:nvSpPr>
+        <p:spPr>
+          <a:xfrm>
+            <a:off x="548640" y="1280160"/>
+            <a:ext cx="3514344" cy="50292"/>
+          </a:xfrm>
+          <a:prstGeom prst="rect">
+            <a:avLst/>
+          </a:prstGeom>
+          <a:solidFill>
+            <a:srgbClr val="FCB514"/>
+          </a:solidFill>
+          <a:ln>
+            <a:noFill/>
+          </a:ln>
+        </p:spPr>
+        <p:style>
+          <a:lnRef idx="1">
+            <a:schemeClr val="accent1"/>
+          </a:lnRef>
+          <a:fillRef idx="3">
+            <a:schemeClr val="accent1"/>
+          </a:fillRef>
+          <a:effectRef idx="2">
+            <a:schemeClr val="accent1"/>
+          </a:effectRef>
+          <a:fontRef idx="minor">
+            <a:schemeClr val="lt1"/>
+          </a:fontRef>
+        </p:style>
+        <p:txBody>
+          <a:bodyPr rtlCol="0" anchor="ctr"/>
+          <a:lstStyle/>
+          <a:p>
+            <a:pPr algn="ctr"/>
+            <a:endParaRPr/>
+          </a:p>
+        </p:txBody>
+      </p:sp>
+      <p:sp>
+        <p:nvSpPr>
+          <p:cNvPr id="7" name="TextBox 6"/>
           <p:cNvSpPr txBox="1"/>
           <p:nvPr/>
         </p:nvSpPr>
         <p:spPr>
           <a:xfrm>
-            <a:off x="3749039" y="1005840"/>
-            <a:ext cx="731520" cy="685800"/>
+            <a:off x="822960" y="1645920"/>
+            <a:ext cx="2965704" cy="1280160"/>
           </a:xfrm>
           <a:prstGeom prst="rect">
             <a:avLst/>
@@ -3736,27 +5764,27 @@
               </a:spcAft>
             </a:pPr>
             <a:r>
-              <a:rPr sz="2800" b="1" i="0">
+              <a:rPr sz="5200" b="1" i="0">
                 <a:solidFill>
                   <a:srgbClr val="FCB514"/>
                 </a:solidFill>
                 <a:latin typeface="Barlow Condensed"/>
               </a:rPr>
-              <a:t>01</a:t>
-            </a:r>
-          </a:p>
-        </p:txBody>
-      </p:sp>
-      <p:sp>
-        <p:nvSpPr>
-          <p:cNvPr id="7" name="TextBox 6"/>
+              <a:t>170+</a:t>
+            </a:r>
+          </a:p>
+        </p:txBody>
+      </p:sp>
+      <p:sp>
+        <p:nvSpPr>
+          <p:cNvPr id="8" name="TextBox 7"/>
           <p:cNvSpPr txBox="1"/>
           <p:nvPr/>
         </p:nvSpPr>
         <p:spPr>
           <a:xfrm>
-            <a:off x="4571999" y="1078992"/>
-            <a:ext cx="7132320" cy="548640"/>
+            <a:off x="822960" y="2971800"/>
+            <a:ext cx="2965704" cy="411480"/>
           </a:xfrm>
           <a:prstGeom prst="rect">
             <a:avLst/>
@@ -3778,57 +5806,14 @@
               </a:spcAft>
             </a:pPr>
             <a:r>
-              <a:rPr sz="1800" b="1" i="0">
+              <a:rPr sz="900" b="1" i="0">
                 <a:solidFill>
-                  <a:srgbClr val="373652"/>
+                  <a:srgbClr val="F7CF42"/>
                 </a:solidFill>
                 <a:latin typeface="Inter"/>
               </a:rPr>
-              <a:t>Introduction &amp; Context</a:t>
-            </a:r>
-          </a:p>
-        </p:txBody>
-      </p:sp>
-      <p:sp>
-        <p:nvSpPr>
-          <p:cNvPr id="8" name="Rectangle 7"/>
-          <p:cNvSpPr/>
-          <p:nvPr/>
-        </p:nvSpPr>
-        <p:spPr>
-          <a:xfrm>
-            <a:off x="3749039" y="1755648"/>
-            <a:ext cx="7863840" cy="9525"/>
-          </a:xfrm>
-          <a:prstGeom prst="rect">
-            <a:avLst/>
-          </a:prstGeom>
-          <a:solidFill>
-            <a:srgbClr val="E5E7EA"/>
-          </a:solidFill>
-          <a:ln>
-            <a:noFill/>
-          </a:ln>
-        </p:spPr>
-        <p:style>
-          <a:lnRef idx="1">
-            <a:schemeClr val="accent1"/>
-          </a:lnRef>
-          <a:fillRef idx="3">
-            <a:schemeClr val="accent1"/>
-          </a:fillRef>
-          <a:effectRef idx="2">
-            <a:schemeClr val="accent1"/>
-          </a:effectRef>
-          <a:fontRef idx="minor">
-            <a:schemeClr val="lt1"/>
-          </a:fontRef>
-        </p:style>
-        <p:txBody>
-          <a:bodyPr rtlCol="0" anchor="ctr"/>
-          <a:lstStyle/>
-          <a:p>
-            <a:pPr algn="ctr"/>
+              <a:t>IT SPECIALISTS</a:t>
+            </a:r>
           </a:p>
         </p:txBody>
       </p:sp>
@@ -3840,8 +5825,8 @@
         </p:nvSpPr>
         <p:spPr>
           <a:xfrm>
-            <a:off x="3749039" y="1920240"/>
-            <a:ext cx="731520" cy="685800"/>
+            <a:off x="822960" y="3520440"/>
+            <a:ext cx="2965704" cy="1463040"/>
           </a:xfrm>
           <a:prstGeom prst="rect">
             <a:avLst/>
@@ -3849,7 +5834,7 @@
           <a:noFill/>
         </p:spPr>
         <p:txBody>
-          <a:bodyPr wrap="none">
+          <a:bodyPr wrap="square">
             <a:spAutoFit/>
           </a:bodyPr>
           <a:lstStyle/>
@@ -3863,27 +5848,116 @@
               </a:spcAft>
             </a:pPr>
             <a:r>
-              <a:rPr sz="2800" b="1" i="0">
+              <a:rPr sz="1200" b="0" i="0">
                 <a:solidFill>
-                  <a:srgbClr val="FCB514"/>
+                  <a:srgbClr val="B0B8D4"/>
                 </a:solidFill>
-                <a:latin typeface="Barlow Condensed"/>
+                <a:latin typeface="Inter"/>
               </a:rPr>
-              <a:t>02</a:t>
-            </a:r>
-          </a:p>
-        </p:txBody>
-      </p:sp>
-      <p:sp>
-        <p:nvSpPr>
-          <p:cNvPr id="10" name="TextBox 9"/>
+              <a:t>Dedicated technicians
+across all service areas</a:t>
+            </a:r>
+          </a:p>
+        </p:txBody>
+      </p:sp>
+      <p:sp>
+        <p:nvSpPr>
+          <p:cNvPr id="10" name="Rectangle 9"/>
+          <p:cNvSpPr/>
+          <p:nvPr/>
+        </p:nvSpPr>
+        <p:spPr>
+          <a:xfrm>
+            <a:off x="4337304" y="1280160"/>
+            <a:ext cx="3514344" cy="4114800"/>
+          </a:xfrm>
+          <a:prstGeom prst="rect">
+            <a:avLst/>
+          </a:prstGeom>
+          <a:solidFill>
+            <a:srgbClr val="373652"/>
+          </a:solidFill>
+          <a:ln>
+            <a:noFill/>
+          </a:ln>
+        </p:spPr>
+        <p:style>
+          <a:lnRef idx="1">
+            <a:schemeClr val="accent1"/>
+          </a:lnRef>
+          <a:fillRef idx="3">
+            <a:schemeClr val="accent1"/>
+          </a:fillRef>
+          <a:effectRef idx="2">
+            <a:schemeClr val="accent1"/>
+          </a:effectRef>
+          <a:fontRef idx="minor">
+            <a:schemeClr val="lt1"/>
+          </a:fontRef>
+        </p:style>
+        <p:txBody>
+          <a:bodyPr rtlCol="0" anchor="ctr"/>
+          <a:lstStyle/>
+          <a:p>
+            <a:pPr algn="ctr"/>
+            <a:endParaRPr/>
+          </a:p>
+        </p:txBody>
+      </p:sp>
+      <p:sp>
+        <p:nvSpPr>
+          <p:cNvPr id="11" name="Rectangle 10"/>
+          <p:cNvSpPr/>
+          <p:nvPr/>
+        </p:nvSpPr>
+        <p:spPr>
+          <a:xfrm>
+            <a:off x="4337304" y="1280160"/>
+            <a:ext cx="3514344" cy="50292"/>
+          </a:xfrm>
+          <a:prstGeom prst="rect">
+            <a:avLst/>
+          </a:prstGeom>
+          <a:solidFill>
+            <a:srgbClr val="FCB514"/>
+          </a:solidFill>
+          <a:ln>
+            <a:noFill/>
+          </a:ln>
+        </p:spPr>
+        <p:style>
+          <a:lnRef idx="1">
+            <a:schemeClr val="accent1"/>
+          </a:lnRef>
+          <a:fillRef idx="3">
+            <a:schemeClr val="accent1"/>
+          </a:fillRef>
+          <a:effectRef idx="2">
+            <a:schemeClr val="accent1"/>
+          </a:effectRef>
+          <a:fontRef idx="minor">
+            <a:schemeClr val="lt1"/>
+          </a:fontRef>
+        </p:style>
+        <p:txBody>
+          <a:bodyPr rtlCol="0" anchor="ctr"/>
+          <a:lstStyle/>
+          <a:p>
+            <a:pPr algn="ctr"/>
+            <a:endParaRPr/>
+          </a:p>
+        </p:txBody>
+      </p:sp>
+      <p:sp>
+        <p:nvSpPr>
+          <p:cNvPr id="12" name="TextBox 11"/>
           <p:cNvSpPr txBox="1"/>
           <p:nvPr/>
         </p:nvSpPr>
         <p:spPr>
           <a:xfrm>
-            <a:off x="4571999" y="1993392"/>
-            <a:ext cx="7132320" cy="548640"/>
+            <a:off x="4611624" y="1645920"/>
+            <a:ext cx="2965704" cy="1280160"/>
           </a:xfrm>
           <a:prstGeom prst="rect">
             <a:avLst/>
@@ -3905,70 +5979,27 @@
               </a:spcAft>
             </a:pPr>
             <a:r>
-              <a:rPr sz="1800" b="0" i="0">
+              <a:rPr sz="5200" b="1" i="0">
                 <a:solidFill>
-                  <a:srgbClr val="262B4B"/>
+                  <a:srgbClr val="FCB514"/>
                 </a:solidFill>
-                <a:latin typeface="Inter"/>
+                <a:latin typeface="Barlow Condensed"/>
               </a:rPr>
-              <a:t>Current State Analysis</a:t>
-            </a:r>
-          </a:p>
-        </p:txBody>
-      </p:sp>
-      <p:sp>
-        <p:nvSpPr>
-          <p:cNvPr id="11" name="Rectangle 10"/>
-          <p:cNvSpPr/>
-          <p:nvPr/>
-        </p:nvSpPr>
-        <p:spPr>
-          <a:xfrm>
-            <a:off x="3749039" y="2670048"/>
-            <a:ext cx="7863840" cy="9525"/>
-          </a:xfrm>
-          <a:prstGeom prst="rect">
-            <a:avLst/>
-          </a:prstGeom>
-          <a:solidFill>
-            <a:srgbClr val="E5E7EA"/>
-          </a:solidFill>
-          <a:ln>
-            <a:noFill/>
-          </a:ln>
-        </p:spPr>
-        <p:style>
-          <a:lnRef idx="1">
-            <a:schemeClr val="accent1"/>
-          </a:lnRef>
-          <a:fillRef idx="3">
-            <a:schemeClr val="accent1"/>
-          </a:fillRef>
-          <a:effectRef idx="2">
-            <a:schemeClr val="accent1"/>
-          </a:effectRef>
-          <a:fontRef idx="minor">
-            <a:schemeClr val="lt1"/>
-          </a:fontRef>
-        </p:style>
-        <p:txBody>
-          <a:bodyPr rtlCol="0" anchor="ctr"/>
-          <a:lstStyle/>
-          <a:p>
-            <a:pPr algn="ctr"/>
-          </a:p>
-        </p:txBody>
-      </p:sp>
-      <p:sp>
-        <p:nvSpPr>
-          <p:cNvPr id="12" name="TextBox 11"/>
+              <a:t>1,200</a:t>
+            </a:r>
+          </a:p>
+        </p:txBody>
+      </p:sp>
+      <p:sp>
+        <p:nvSpPr>
+          <p:cNvPr id="13" name="TextBox 12"/>
           <p:cNvSpPr txBox="1"/>
           <p:nvPr/>
         </p:nvSpPr>
         <p:spPr>
           <a:xfrm>
-            <a:off x="3749039" y="2834640"/>
-            <a:ext cx="731520" cy="685800"/>
+            <a:off x="4611624" y="2971800"/>
+            <a:ext cx="2965704" cy="411480"/>
           </a:xfrm>
           <a:prstGeom prst="rect">
             <a:avLst/>
@@ -3990,27 +6021,27 @@
               </a:spcAft>
             </a:pPr>
             <a:r>
-              <a:rPr sz="2800" b="1" i="0">
+              <a:rPr sz="900" b="1" i="0">
                 <a:solidFill>
-                  <a:srgbClr val="FCB514"/>
+                  <a:srgbClr val="F7CF42"/>
                 </a:solidFill>
-                <a:latin typeface="Barlow Condensed"/>
+                <a:latin typeface="Inter"/>
               </a:rPr>
-              <a:t>03</a:t>
-            </a:r>
-          </a:p>
-        </p:txBody>
-      </p:sp>
-      <p:sp>
-        <p:nvSpPr>
-          <p:cNvPr id="13" name="TextBox 12"/>
+              <a:t>CUSTOMERS SERVED</a:t>
+            </a:r>
+          </a:p>
+        </p:txBody>
+      </p:sp>
+      <p:sp>
+        <p:nvSpPr>
+          <p:cNvPr id="14" name="TextBox 13"/>
           <p:cNvSpPr txBox="1"/>
           <p:nvPr/>
         </p:nvSpPr>
         <p:spPr>
           <a:xfrm>
-            <a:off x="4571999" y="2907792"/>
-            <a:ext cx="7132320" cy="548640"/>
+            <a:off x="4611624" y="3520440"/>
+            <a:ext cx="2965704" cy="1463040"/>
           </a:xfrm>
           <a:prstGeom prst="rect">
             <a:avLst/>
@@ -4018,7 +6049,7 @@
           <a:noFill/>
         </p:spPr>
         <p:txBody>
-          <a:bodyPr wrap="none">
+          <a:bodyPr wrap="square">
             <a:spAutoFit/>
           </a:bodyPr>
           <a:lstStyle/>
@@ -4032,33 +6063,34 @@
               </a:spcAft>
             </a:pPr>
             <a:r>
-              <a:rPr sz="1800" b="0" i="0">
+              <a:rPr sz="1200" b="0" i="0">
                 <a:solidFill>
-                  <a:srgbClr val="262B4B"/>
+                  <a:srgbClr val="B0B8D4"/>
                 </a:solidFill>
                 <a:latin typeface="Inter"/>
               </a:rPr>
-              <a:t>Proposed Solution</a:t>
-            </a:r>
-          </a:p>
-        </p:txBody>
-      </p:sp>
-      <p:sp>
-        <p:nvSpPr>
-          <p:cNvPr id="14" name="Rectangle 13"/>
+              <a:t>Spanning 27 industries
+and counting</a:t>
+            </a:r>
+          </a:p>
+        </p:txBody>
+      </p:sp>
+      <p:sp>
+        <p:nvSpPr>
+          <p:cNvPr id="15" name="Rectangle 14"/>
           <p:cNvSpPr/>
           <p:nvPr/>
         </p:nvSpPr>
         <p:spPr>
           <a:xfrm>
-            <a:off x="3749039" y="3584448"/>
-            <a:ext cx="7863840" cy="9525"/>
+            <a:off x="8125968" y="1280160"/>
+            <a:ext cx="3514344" cy="4114800"/>
           </a:xfrm>
           <a:prstGeom prst="rect">
             <a:avLst/>
           </a:prstGeom>
           <a:solidFill>
-            <a:srgbClr val="E5E7EA"/>
+            <a:srgbClr val="373652"/>
           </a:solidFill>
           <a:ln>
             <a:noFill/>
@@ -4083,19 +6115,64 @@
           <a:lstStyle/>
           <a:p>
             <a:pPr algn="ctr"/>
-          </a:p>
-        </p:txBody>
-      </p:sp>
-      <p:sp>
-        <p:nvSpPr>
-          <p:cNvPr id="15" name="TextBox 14"/>
+            <a:endParaRPr/>
+          </a:p>
+        </p:txBody>
+      </p:sp>
+      <p:sp>
+        <p:nvSpPr>
+          <p:cNvPr id="16" name="Rectangle 15"/>
+          <p:cNvSpPr/>
+          <p:nvPr/>
+        </p:nvSpPr>
+        <p:spPr>
+          <a:xfrm>
+            <a:off x="8125968" y="1280160"/>
+            <a:ext cx="3514344" cy="50292"/>
+          </a:xfrm>
+          <a:prstGeom prst="rect">
+            <a:avLst/>
+          </a:prstGeom>
+          <a:solidFill>
+            <a:srgbClr val="FCB514"/>
+          </a:solidFill>
+          <a:ln>
+            <a:noFill/>
+          </a:ln>
+        </p:spPr>
+        <p:style>
+          <a:lnRef idx="1">
+            <a:schemeClr val="accent1"/>
+          </a:lnRef>
+          <a:fillRef idx="3">
+            <a:schemeClr val="accent1"/>
+          </a:fillRef>
+          <a:effectRef idx="2">
+            <a:schemeClr val="accent1"/>
+          </a:effectRef>
+          <a:fontRef idx="minor">
+            <a:schemeClr val="lt1"/>
+          </a:fontRef>
+        </p:style>
+        <p:txBody>
+          <a:bodyPr rtlCol="0" anchor="ctr"/>
+          <a:lstStyle/>
+          <a:p>
+            <a:pPr algn="ctr"/>
+            <a:endParaRPr/>
+          </a:p>
+        </p:txBody>
+      </p:sp>
+      <p:sp>
+        <p:nvSpPr>
+          <p:cNvPr id="17" name="TextBox 16"/>
           <p:cNvSpPr txBox="1"/>
           <p:nvPr/>
         </p:nvSpPr>
         <p:spPr>
           <a:xfrm>
-            <a:off x="3749039" y="3749040"/>
-            <a:ext cx="731520" cy="685800"/>
+            <a:off x="8400288" y="1645920"/>
+            <a:ext cx="2965704" cy="1280160"/>
           </a:xfrm>
           <a:prstGeom prst="rect">
             <a:avLst/>
@@ -4117,27 +6194,27 @@
               </a:spcAft>
             </a:pPr>
             <a:r>
-              <a:rPr sz="2800" b="1" i="0">
+              <a:rPr sz="5200" b="1" i="0">
                 <a:solidFill>
                   <a:srgbClr val="FCB514"/>
                 </a:solidFill>
                 <a:latin typeface="Barlow Condensed"/>
               </a:rPr>
-              <a:t>04</a:t>
-            </a:r>
-          </a:p>
-        </p:txBody>
-      </p:sp>
-      <p:sp>
-        <p:nvSpPr>
-          <p:cNvPr id="16" name="TextBox 15"/>
+              <a:t>4.68 / 5</a:t>
+            </a:r>
+          </a:p>
+        </p:txBody>
+      </p:sp>
+      <p:sp>
+        <p:nvSpPr>
+          <p:cNvPr id="18" name="TextBox 17"/>
           <p:cNvSpPr txBox="1"/>
           <p:nvPr/>
         </p:nvSpPr>
         <p:spPr>
           <a:xfrm>
-            <a:off x="4571999" y="3822192"/>
-            <a:ext cx="7132320" cy="548640"/>
+            <a:off x="8400288" y="2971800"/>
+            <a:ext cx="2965704" cy="411480"/>
           </a:xfrm>
           <a:prstGeom prst="rect">
             <a:avLst/>
@@ -4159,70 +6236,27 @@
               </a:spcAft>
             </a:pPr>
             <a:r>
-              <a:rPr sz="1800" b="0" i="0">
+              <a:rPr sz="900" b="1" i="0">
                 <a:solidFill>
-                  <a:srgbClr val="262B4B"/>
+                  <a:srgbClr val="F7CF42"/>
                 </a:solidFill>
                 <a:latin typeface="Inter"/>
               </a:rPr>
-              <a:t>Implementation Roadmap</a:t>
-            </a:r>
-          </a:p>
-        </p:txBody>
-      </p:sp>
-      <p:sp>
-        <p:nvSpPr>
-          <p:cNvPr id="17" name="Rectangle 16"/>
-          <p:cNvSpPr/>
-          <p:nvPr/>
-        </p:nvSpPr>
-        <p:spPr>
-          <a:xfrm>
-            <a:off x="3749039" y="4498848"/>
-            <a:ext cx="7863840" cy="9525"/>
-          </a:xfrm>
-          <a:prstGeom prst="rect">
-            <a:avLst/>
-          </a:prstGeom>
-          <a:solidFill>
-            <a:srgbClr val="E5E7EA"/>
-          </a:solidFill>
-          <a:ln>
-            <a:noFill/>
-          </a:ln>
-        </p:spPr>
-        <p:style>
-          <a:lnRef idx="1">
-            <a:schemeClr val="accent1"/>
-          </a:lnRef>
-          <a:fillRef idx="3">
-            <a:schemeClr val="accent1"/>
-          </a:fillRef>
-          <a:effectRef idx="2">
-            <a:schemeClr val="accent1"/>
-          </a:effectRef>
-          <a:fontRef idx="minor">
-            <a:schemeClr val="lt1"/>
-          </a:fontRef>
-        </p:style>
-        <p:txBody>
-          <a:bodyPr rtlCol="0" anchor="ctr"/>
-          <a:lstStyle/>
-          <a:p>
-            <a:pPr algn="ctr"/>
-          </a:p>
-        </p:txBody>
-      </p:sp>
-      <p:sp>
-        <p:nvSpPr>
-          <p:cNvPr id="18" name="TextBox 17"/>
+              <a:t>SATISFACTION SCORE</a:t>
+            </a:r>
+          </a:p>
+        </p:txBody>
+      </p:sp>
+      <p:sp>
+        <p:nvSpPr>
+          <p:cNvPr id="19" name="TextBox 18"/>
           <p:cNvSpPr txBox="1"/>
           <p:nvPr/>
         </p:nvSpPr>
         <p:spPr>
           <a:xfrm>
-            <a:off x="3749039" y="4663440"/>
-            <a:ext cx="731520" cy="685800"/>
+            <a:off x="8400288" y="3520440"/>
+            <a:ext cx="2965704" cy="1463040"/>
           </a:xfrm>
           <a:prstGeom prst="rect">
             <a:avLst/>
@@ -4230,7 +6264,7 @@
           <a:noFill/>
         </p:spPr>
         <p:txBody>
-          <a:bodyPr wrap="none">
+          <a:bodyPr wrap="square">
             <a:spAutoFit/>
           </a:bodyPr>
           <a:lstStyle/>
@@ -4244,87 +6278,28 @@
               </a:spcAft>
             </a:pPr>
             <a:r>
-              <a:rPr sz="2800" b="1" i="0">
+              <a:rPr sz="1200" b="0" i="0">
                 <a:solidFill>
-                  <a:srgbClr val="FCB514"/>
-                </a:solidFill>
-                <a:latin typeface="Barlow Condensed"/>
-              </a:rPr>
-              <a:t>05</a:t>
-            </a:r>
-          </a:p>
-        </p:txBody>
-      </p:sp>
-      <p:sp>
-        <p:nvSpPr>
-          <p:cNvPr id="19" name="TextBox 18"/>
-          <p:cNvSpPr txBox="1"/>
-          <p:nvPr/>
-        </p:nvSpPr>
-        <p:spPr>
-          <a:xfrm>
-            <a:off x="4571999" y="4736592"/>
-            <a:ext cx="7132320" cy="548640"/>
-          </a:xfrm>
-          <a:prstGeom prst="rect">
-            <a:avLst/>
-          </a:prstGeom>
-          <a:noFill/>
-        </p:spPr>
-        <p:txBody>
-          <a:bodyPr wrap="none">
-            <a:spAutoFit/>
-          </a:bodyPr>
-          <a:lstStyle/>
-          <a:p>
-            <a:pPr algn="l">
-              <a:spcBef>
-                <a:spcPts val="0"/>
-              </a:spcBef>
-              <a:spcAft>
-                <a:spcPts val="0"/>
-              </a:spcAft>
-            </a:pPr>
-            <a:r>
-              <a:rPr sz="1800" b="0" i="0">
-                <a:solidFill>
-                  <a:srgbClr val="262B4B"/>
+                  <a:srgbClr val="B0B8D4"/>
                 </a:solidFill>
                 <a:latin typeface="Inter"/>
               </a:rPr>
-              <a:t>Q &amp; A</a:t>
-            </a:r>
-          </a:p>
-        </p:txBody>
-      </p:sp>
-    </p:spTree>
-  </p:cSld>
-  <p:clrMapOvr>
-    <a:masterClrMapping/>
-  </p:clrMapOvr>
-</p:sld>
-</file>
-
-<file path=ppt/slides/slide3.xml><?xml version="1.0" encoding="utf-8"?>
-<p:sld xmlns:a="http://schemas.openxmlformats.org/drawingml/2006/main" xmlns:p="http://schemas.openxmlformats.org/presentationml/2006/main" xmlns:r="http://schemas.openxmlformats.org/officeDocument/2006/relationships">
-  <p:cSld>
-    <p:spTree>
-      <p:nvGrpSpPr>
-        <p:cNvPr id="1" name=""/>
-        <p:cNvGrpSpPr/>
-        <p:nvPr/>
-      </p:nvGrpSpPr>
-      <p:grpSpPr/>
-      <p:sp>
-        <p:nvSpPr>
-          <p:cNvPr id="2" name="Rectangle 1"/>
+              <a:t>Based on last 12 months
+of service feedback</a:t>
+            </a:r>
+          </a:p>
+        </p:txBody>
+      </p:sp>
+      <p:sp>
+        <p:nvSpPr>
+          <p:cNvPr id="20" name="Rectangle 19"/>
           <p:cNvSpPr/>
           <p:nvPr/>
         </p:nvSpPr>
         <p:spPr>
           <a:xfrm>
-            <a:off x="0" y="0"/>
-            <a:ext cx="12188952" cy="6858000"/>
+            <a:off x="0" y="6793992"/>
+            <a:ext cx="12188952" cy="64008"/>
           </a:xfrm>
           <a:prstGeom prst="rect">
             <a:avLst/>
@@ -4355,219 +6330,7 @@
           <a:lstStyle/>
           <a:p>
             <a:pPr algn="ctr"/>
-          </a:p>
-        </p:txBody>
-      </p:sp>
-      <p:sp>
-        <p:nvSpPr>
-          <p:cNvPr id="3" name="Rectangle 2"/>
-          <p:cNvSpPr/>
-          <p:nvPr/>
-        </p:nvSpPr>
-        <p:spPr>
-          <a:xfrm>
-            <a:off x="0" y="0"/>
-            <a:ext cx="1097280" cy="6858000"/>
-          </a:xfrm>
-          <a:prstGeom prst="rect">
-            <a:avLst/>
-          </a:prstGeom>
-          <a:solidFill>
-            <a:srgbClr val="262B4B"/>
-          </a:solidFill>
-          <a:ln>
-            <a:noFill/>
-          </a:ln>
-        </p:spPr>
-        <p:style>
-          <a:lnRef idx="1">
-            <a:schemeClr val="accent1"/>
-          </a:lnRef>
-          <a:fillRef idx="3">
-            <a:schemeClr val="accent1"/>
-          </a:fillRef>
-          <a:effectRef idx="2">
-            <a:schemeClr val="accent1"/>
-          </a:effectRef>
-          <a:fontRef idx="minor">
-            <a:schemeClr val="lt1"/>
-          </a:fontRef>
-        </p:style>
-        <p:txBody>
-          <a:bodyPr rtlCol="0" anchor="ctr"/>
-          <a:lstStyle/>
-          <a:p>
-            <a:pPr algn="ctr"/>
-          </a:p>
-        </p:txBody>
-      </p:sp>
-      <p:sp>
-        <p:nvSpPr>
-          <p:cNvPr id="4" name="TextBox 3"/>
-          <p:cNvSpPr txBox="1"/>
-          <p:nvPr/>
-        </p:nvSpPr>
-        <p:spPr>
-          <a:xfrm>
-            <a:off x="137160" y="2560320"/>
-            <a:ext cx="822960" cy="1097280"/>
-          </a:xfrm>
-          <a:prstGeom prst="rect">
-            <a:avLst/>
-          </a:prstGeom>
-          <a:noFill/>
-        </p:spPr>
-        <p:txBody>
-          <a:bodyPr wrap="none">
-            <a:spAutoFit/>
-          </a:bodyPr>
-          <a:lstStyle/>
-          <a:p>
-            <a:pPr algn="ctr">
-              <a:spcBef>
-                <a:spcPts val="0"/>
-              </a:spcBef>
-              <a:spcAft>
-                <a:spcPts val="0"/>
-              </a:spcAft>
-            </a:pPr>
-            <a:r>
-              <a:rPr sz="3600" b="1" i="0">
-                <a:solidFill>
-                  <a:srgbClr val="FCB514"/>
-                </a:solidFill>
-                <a:latin typeface="Barlow Condensed"/>
-              </a:rPr>
-              <a:t>01</a:t>
-            </a:r>
-          </a:p>
-        </p:txBody>
-      </p:sp>
-      <p:sp>
-        <p:nvSpPr>
-          <p:cNvPr id="5" name="TextBox 4"/>
-          <p:cNvSpPr txBox="1"/>
-          <p:nvPr/>
-        </p:nvSpPr>
-        <p:spPr>
-          <a:xfrm>
-            <a:off x="1463040" y="1645920"/>
-            <a:ext cx="8229600" cy="457200"/>
-          </a:xfrm>
-          <a:prstGeom prst="rect">
-            <a:avLst/>
-          </a:prstGeom>
-          <a:noFill/>
-        </p:spPr>
-        <p:txBody>
-          <a:bodyPr wrap="none">
-            <a:spAutoFit/>
-          </a:bodyPr>
-          <a:lstStyle/>
-          <a:p>
-            <a:pPr algn="l">
-              <a:spcBef>
-                <a:spcPts val="0"/>
-              </a:spcBef>
-              <a:spcAft>
-                <a:spcPts val="0"/>
-              </a:spcAft>
-            </a:pPr>
-            <a:r>
-              <a:rPr sz="1000" b="1" i="0">
-                <a:solidFill>
-                  <a:srgbClr val="262B4B"/>
-                </a:solidFill>
-                <a:latin typeface="Inter"/>
-              </a:rPr>
-              <a:t>SECTION TITLE</a:t>
-            </a:r>
-          </a:p>
-        </p:txBody>
-      </p:sp>
-      <p:sp>
-        <p:nvSpPr>
-          <p:cNvPr id="6" name="TextBox 5"/>
-          <p:cNvSpPr txBox="1"/>
-          <p:nvPr/>
-        </p:nvSpPr>
-        <p:spPr>
-          <a:xfrm>
-            <a:off x="1463040" y="2194560"/>
-            <a:ext cx="8229600" cy="2286000"/>
-          </a:xfrm>
-          <a:prstGeom prst="rect">
-            <a:avLst/>
-          </a:prstGeom>
-          <a:noFill/>
-        </p:spPr>
-        <p:txBody>
-          <a:bodyPr wrap="square">
-            <a:spAutoFit/>
-          </a:bodyPr>
-          <a:lstStyle/>
-          <a:p>
-            <a:pPr algn="l">
-              <a:spcBef>
-                <a:spcPts val="0"/>
-              </a:spcBef>
-              <a:spcAft>
-                <a:spcPts val="800"/>
-              </a:spcAft>
-            </a:pPr>
-            <a:r>
-              <a:rPr sz="5200" b="1" i="0">
-                <a:solidFill>
-                  <a:srgbClr val="262B4B"/>
-                </a:solidFill>
-                <a:latin typeface="Barlow Condensed"/>
-              </a:rPr>
-              <a:t>Section Heading
-Goes Here</a:t>
-            </a:r>
-          </a:p>
-        </p:txBody>
-      </p:sp>
-      <p:sp>
-        <p:nvSpPr>
-          <p:cNvPr id="7" name="Rectangle 6"/>
-          <p:cNvSpPr/>
-          <p:nvPr/>
-        </p:nvSpPr>
-        <p:spPr>
-          <a:xfrm>
-            <a:off x="0" y="6793992"/>
-            <a:ext cx="12188952" cy="64008"/>
-          </a:xfrm>
-          <a:prstGeom prst="rect">
-            <a:avLst/>
-          </a:prstGeom>
-          <a:solidFill>
-            <a:srgbClr val="262B4B"/>
-          </a:solidFill>
-          <a:ln>
-            <a:noFill/>
-          </a:ln>
-        </p:spPr>
-        <p:style>
-          <a:lnRef idx="1">
-            <a:schemeClr val="accent1"/>
-          </a:lnRef>
-          <a:fillRef idx="3">
-            <a:schemeClr val="accent1"/>
-          </a:fillRef>
-          <a:effectRef idx="2">
-            <a:schemeClr val="accent1"/>
-          </a:effectRef>
-          <a:fontRef idx="minor">
-            <a:schemeClr val="lt1"/>
-          </a:fontRef>
-        </p:style>
-        <p:txBody>
-          <a:bodyPr rtlCol="0" anchor="ctr"/>
-          <a:lstStyle/>
-          <a:p>
-            <a:pPr algn="ctr"/>
+            <a:endParaRPr/>
           </a:p>
         </p:txBody>
       </p:sp>
@@ -4580,7 +6343,7 @@
 </file>
 
 <file path=ppt/slides/slide4.xml><?xml version="1.0" encoding="utf-8"?>
-<p:sld xmlns:a="http://schemas.openxmlformats.org/drawingml/2006/main" xmlns:p="http://schemas.openxmlformats.org/presentationml/2006/main" xmlns:r="http://schemas.openxmlformats.org/officeDocument/2006/relationships">
+<p:sld xmlns:a="http://schemas.openxmlformats.org/drawingml/2006/main" xmlns:r="http://schemas.openxmlformats.org/officeDocument/2006/relationships" xmlns:p="http://schemas.openxmlformats.org/presentationml/2006/main">
   <p:cSld>
     <p:spTree>
       <p:nvGrpSpPr>
@@ -4588,7 +6351,14 @@
         <p:cNvGrpSpPr/>
         <p:nvPr/>
       </p:nvGrpSpPr>
-      <p:grpSpPr/>
+      <p:grpSpPr>
+        <a:xfrm>
+          <a:off x="0" y="0"/>
+          <a:ext cx="0" cy="0"/>
+          <a:chOff x="0" y="0"/>
+          <a:chExt cx="0" cy="0"/>
+        </a:xfrm>
+      </p:grpSpPr>
       <p:sp>
         <p:nvSpPr>
           <p:cNvPr id="2" name="Rectangle 1"/>
@@ -4604,7 +6374,7 @@
             <a:avLst/>
           </a:prstGeom>
           <a:solidFill>
-            <a:srgbClr val="F3F2EA"/>
+            <a:srgbClr val="FCB514"/>
           </a:solidFill>
           <a:ln>
             <a:noFill/>
@@ -4629,6 +6399,7 @@
           <a:lstStyle/>
           <a:p>
             <a:pPr algn="ctr"/>
+            <a:endParaRPr/>
           </a:p>
         </p:txBody>
       </p:sp>
@@ -4641,7 +6412,7 @@
         <p:spPr>
           <a:xfrm>
             <a:off x="0" y="0"/>
-            <a:ext cx="12188952" cy="1051560"/>
+            <a:ext cx="1097280" cy="6858000"/>
           </a:xfrm>
           <a:prstGeom prst="rect">
             <a:avLst/>
@@ -4672,62 +6443,20 @@
           <a:lstStyle/>
           <a:p>
             <a:pPr algn="ctr"/>
-          </a:p>
-        </p:txBody>
-      </p:sp>
-      <p:sp>
-        <p:nvSpPr>
-          <p:cNvPr id="4" name="Rectangle 3"/>
-          <p:cNvSpPr/>
-          <p:nvPr/>
-        </p:nvSpPr>
-        <p:spPr>
-          <a:xfrm>
-            <a:off x="0" y="1051560"/>
-            <a:ext cx="12188952" cy="45720"/>
-          </a:xfrm>
-          <a:prstGeom prst="rect">
-            <a:avLst/>
-          </a:prstGeom>
-          <a:solidFill>
-            <a:srgbClr val="FCB514"/>
-          </a:solidFill>
-          <a:ln>
-            <a:noFill/>
-          </a:ln>
-        </p:spPr>
-        <p:style>
-          <a:lnRef idx="1">
-            <a:schemeClr val="accent1"/>
-          </a:lnRef>
-          <a:fillRef idx="3">
-            <a:schemeClr val="accent1"/>
-          </a:fillRef>
-          <a:effectRef idx="2">
-            <a:schemeClr val="accent1"/>
-          </a:effectRef>
-          <a:fontRef idx="minor">
-            <a:schemeClr val="lt1"/>
-          </a:fontRef>
-        </p:style>
-        <p:txBody>
-          <a:bodyPr rtlCol="0" anchor="ctr"/>
-          <a:lstStyle/>
-          <a:p>
-            <a:pPr algn="ctr"/>
-          </a:p>
-        </p:txBody>
-      </p:sp>
-      <p:sp>
-        <p:nvSpPr>
-          <p:cNvPr id="5" name="TextBox 4"/>
+            <a:endParaRPr/>
+          </a:p>
+        </p:txBody>
+      </p:sp>
+      <p:sp>
+        <p:nvSpPr>
+          <p:cNvPr id="4" name="TextBox 3"/>
           <p:cNvSpPr txBox="1"/>
           <p:nvPr/>
         </p:nvSpPr>
         <p:spPr>
           <a:xfrm>
-            <a:off x="548640" y="164592"/>
-            <a:ext cx="9144000" cy="685800"/>
+            <a:off x="137160" y="2560320"/>
+            <a:ext cx="822960" cy="1097280"/>
           </a:xfrm>
           <a:prstGeom prst="rect">
             <a:avLst/>
@@ -4740,7 +6469,7 @@
           </a:bodyPr>
           <a:lstStyle/>
           <a:p>
-            <a:pPr algn="l">
+            <a:pPr algn="ctr">
               <a:spcBef>
                 <a:spcPts val="0"/>
               </a:spcBef>
@@ -4749,13 +6478,13 @@
               </a:spcAft>
             </a:pPr>
             <a:r>
-              <a:rPr sz="3000" b="1" i="0">
+              <a:rPr sz="3600" b="1" i="0">
                 <a:solidFill>
-                  <a:srgbClr val="FFFFFF"/>
+                  <a:srgbClr val="FCB514"/>
                 </a:solidFill>
                 <a:latin typeface="Barlow Condensed"/>
               </a:rPr>
-              <a:t>Slide Title</a:t>
+              <a:t>01</a:t>
             </a:r>
           </a:p>
         </p:txBody>
@@ -4768,50 +6497,8 @@
         </p:nvSpPr>
         <p:spPr>
           <a:xfrm>
-            <a:off x="9445752" y="347472"/>
-            <a:ext cx="2194560" cy="320040"/>
-          </a:xfrm>
-          <a:prstGeom prst="rect">
-            <a:avLst/>
-          </a:prstGeom>
-          <a:noFill/>
-        </p:spPr>
-        <p:txBody>
-          <a:bodyPr wrap="none">
-            <a:spAutoFit/>
-          </a:bodyPr>
-          <a:lstStyle/>
-          <a:p>
-            <a:pPr algn="r">
-              <a:spcBef>
-                <a:spcPts val="0"/>
-              </a:spcBef>
-              <a:spcAft>
-                <a:spcPts val="0"/>
-              </a:spcAft>
-            </a:pPr>
-            <a:r>
-              <a:rPr sz="700" b="1" i="0">
-                <a:solidFill>
-                  <a:srgbClr val="70789A"/>
-                </a:solidFill>
-                <a:latin typeface="Inter"/>
-              </a:rPr>
-              <a:t>SECTION NAME</a:t>
-            </a:r>
-          </a:p>
-        </p:txBody>
-      </p:sp>
-      <p:sp>
-        <p:nvSpPr>
-          <p:cNvPr id="7" name="TextBox 6"/>
-          <p:cNvSpPr txBox="1"/>
-          <p:nvPr/>
-        </p:nvSpPr>
-        <p:spPr>
-          <a:xfrm>
-            <a:off x="548640" y="1325880"/>
-            <a:ext cx="11064240" cy="5120640"/>
+            <a:off x="1463040" y="2194560"/>
+            <a:ext cx="8229600" cy="892552"/>
           </a:xfrm>
           <a:prstGeom prst="rect">
             <a:avLst/>
@@ -4829,117 +6516,68 @@
                 <a:spcPts val="0"/>
               </a:spcBef>
               <a:spcAft>
-                <a:spcPts val="1000"/>
+                <a:spcPts val="800"/>
               </a:spcAft>
             </a:pPr>
             <a:r>
-              <a:rPr sz="1600" b="0" i="0">
+              <a:rPr lang="de-AT" sz="5200" b="1" i="0" dirty="0">
                 <a:solidFill>
                   <a:srgbClr val="262B4B"/>
                 </a:solidFill>
-                <a:latin typeface="Inter"/>
+                <a:latin typeface="Barlow Condensed"/>
               </a:rPr>
-              <a:t>Body text goes here. Keep lines to 65–72 characters for readability. Body is Inter Regular 16pt on warm-surface background.</a:t>
-            </a:r>
-          </a:p>
-          <a:p>
-            <a:pPr algn="l">
-              <a:spcBef>
-                <a:spcPts val="400"/>
-              </a:spcBef>
-              <a:spcAft>
-                <a:spcPts val="400"/>
-              </a:spcAft>
-            </a:pPr>
-            <a:r>
-              <a:rPr sz="1500" b="0" i="0">
-                <a:solidFill>
-                  <a:srgbClr val="373652"/>
-                </a:solidFill>
-                <a:latin typeface="Inter"/>
-              </a:rPr>
-              <a:t>• Bullet point one with supporting detail</a:t>
-            </a:r>
-          </a:p>
-          <a:p>
-            <a:pPr algn="l">
-              <a:spcBef>
-                <a:spcPts val="400"/>
-              </a:spcBef>
-              <a:spcAft>
-                <a:spcPts val="400"/>
-              </a:spcAft>
-            </a:pPr>
-            <a:r>
-              <a:rPr sz="1500" b="0" i="0">
-                <a:solidFill>
-                  <a:srgbClr val="373652"/>
-                </a:solidFill>
-                <a:latin typeface="Inter"/>
-              </a:rPr>
-              <a:t>• Bullet point two with supporting detail</a:t>
-            </a:r>
-          </a:p>
-          <a:p>
-            <a:pPr algn="l">
-              <a:spcBef>
-                <a:spcPts val="400"/>
-              </a:spcBef>
-              <a:spcAft>
-                <a:spcPts val="400"/>
-              </a:spcAft>
-            </a:pPr>
-            <a:r>
-              <a:rPr sz="1500" b="0" i="0">
-                <a:solidFill>
-                  <a:srgbClr val="373652"/>
-                </a:solidFill>
-                <a:latin typeface="Inter"/>
-              </a:rPr>
-              <a:t>• Bullet point three with supporting detail</a:t>
-            </a:r>
-          </a:p>
-        </p:txBody>
-      </p:sp>
-      <p:sp>
-        <p:nvSpPr>
-          <p:cNvPr id="8" name="TextBox 7"/>
-          <p:cNvSpPr txBox="1"/>
-          <p:nvPr/>
-        </p:nvSpPr>
-        <p:spPr>
-          <a:xfrm>
-            <a:off x="11274552" y="6492240"/>
-            <a:ext cx="731520" cy="274320"/>
-          </a:xfrm>
-          <a:prstGeom prst="rect">
-            <a:avLst/>
-          </a:prstGeom>
-          <a:noFill/>
-        </p:spPr>
-        <p:txBody>
-          <a:bodyPr wrap="none">
-            <a:spAutoFit/>
-          </a:bodyPr>
-          <a:lstStyle/>
-          <a:p>
-            <a:pPr algn="r">
-              <a:spcBef>
-                <a:spcPts val="0"/>
-              </a:spcBef>
-              <a:spcAft>
-                <a:spcPts val="0"/>
-              </a:spcAft>
-            </a:pPr>
-            <a:r>
-              <a:rPr sz="900" b="0" i="0">
-                <a:solidFill>
-                  <a:srgbClr val="808080"/>
-                </a:solidFill>
-                <a:latin typeface="Inter"/>
-              </a:rPr>
-              <a:t>01</a:t>
-            </a:r>
+              <a:t>Architecture</a:t>
+            </a:r>
+            <a:endParaRPr sz="5200" b="1" i="0" dirty="0">
+              <a:solidFill>
+                <a:srgbClr val="262B4B"/>
+              </a:solidFill>
+              <a:latin typeface="Barlow Condensed"/>
+            </a:endParaRPr>
+          </a:p>
+        </p:txBody>
+      </p:sp>
+      <p:sp>
+        <p:nvSpPr>
+          <p:cNvPr id="7" name="Rectangle 6"/>
+          <p:cNvSpPr/>
+          <p:nvPr/>
+        </p:nvSpPr>
+        <p:spPr>
+          <a:xfrm>
+            <a:off x="0" y="6793992"/>
+            <a:ext cx="12188952" cy="64008"/>
+          </a:xfrm>
+          <a:prstGeom prst="rect">
+            <a:avLst/>
+          </a:prstGeom>
+          <a:solidFill>
+            <a:srgbClr val="262B4B"/>
+          </a:solidFill>
+          <a:ln>
+            <a:noFill/>
+          </a:ln>
+        </p:spPr>
+        <p:style>
+          <a:lnRef idx="1">
+            <a:schemeClr val="accent1"/>
+          </a:lnRef>
+          <a:fillRef idx="3">
+            <a:schemeClr val="accent1"/>
+          </a:fillRef>
+          <a:effectRef idx="2">
+            <a:schemeClr val="accent1"/>
+          </a:effectRef>
+          <a:fontRef idx="minor">
+            <a:schemeClr val="lt1"/>
+          </a:fontRef>
+        </p:style>
+        <p:txBody>
+          <a:bodyPr rtlCol="0" anchor="ctr"/>
+          <a:lstStyle/>
+          <a:p>
+            <a:pPr algn="ctr"/>
+            <a:endParaRPr/>
           </a:p>
         </p:txBody>
       </p:sp>
@@ -4952,7 +6590,7 @@
 </file>
 
 <file path=ppt/slides/slide5.xml><?xml version="1.0" encoding="utf-8"?>
-<p:sld xmlns:a="http://schemas.openxmlformats.org/drawingml/2006/main" xmlns:p="http://schemas.openxmlformats.org/presentationml/2006/main" xmlns:r="http://schemas.openxmlformats.org/officeDocument/2006/relationships">
+<p:sld xmlns:a="http://schemas.openxmlformats.org/drawingml/2006/main" xmlns:r="http://schemas.openxmlformats.org/officeDocument/2006/relationships" xmlns:p="http://schemas.openxmlformats.org/presentationml/2006/main">
   <p:cSld>
     <p:spTree>
       <p:nvGrpSpPr>
@@ -4960,7 +6598,14 @@
         <p:cNvGrpSpPr/>
         <p:nvPr/>
       </p:nvGrpSpPr>
-      <p:grpSpPr/>
+      <p:grpSpPr>
+        <a:xfrm>
+          <a:off x="0" y="0"/>
+          <a:ext cx="0" cy="0"/>
+          <a:chOff x="0" y="0"/>
+          <a:chExt cx="0" cy="0"/>
+        </a:xfrm>
+      </p:grpSpPr>
       <p:sp>
         <p:nvSpPr>
           <p:cNvPr id="2" name="Rectangle 1"/>
@@ -5001,6 +6646,7 @@
           <a:lstStyle/>
           <a:p>
             <a:pPr algn="ctr"/>
+            <a:endParaRPr/>
           </a:p>
         </p:txBody>
       </p:sp>
@@ -5044,6 +6690,7 @@
           <a:lstStyle/>
           <a:p>
             <a:pPr algn="ctr"/>
+            <a:endParaRPr/>
           </a:p>
         </p:txBody>
       </p:sp>
@@ -5087,6 +6734,7 @@
           <a:lstStyle/>
           <a:p>
             <a:pPr algn="ctr"/>
+            <a:endParaRPr/>
           </a:p>
         </p:txBody>
       </p:sp>
@@ -5099,7 +6747,7 @@
         <p:spPr>
           <a:xfrm>
             <a:off x="548640" y="164592"/>
-            <a:ext cx="9144000" cy="685800"/>
+            <a:ext cx="2055371" cy="584775"/>
           </a:xfrm>
           <a:prstGeom prst="rect">
             <a:avLst/>
@@ -5112,282 +6760,34 @@
           </a:bodyPr>
           <a:lstStyle/>
           <a:p>
-            <a:pPr algn="l">
-              <a:spcBef>
-                <a:spcPts val="0"/>
-              </a:spcBef>
-              <a:spcAft>
-                <a:spcPts val="0"/>
-              </a:spcAft>
-            </a:pPr>
-            <a:r>
-              <a:rPr sz="3000" b="1" i="0">
+            <a:r>
+              <a:rPr lang="de-AT" sz="3200" b="1" dirty="0">
                 <a:solidFill>
-                  <a:srgbClr val="FFFFFF"/>
+                  <a:schemeClr val="bg1"/>
                 </a:solidFill>
                 <a:latin typeface="Barlow Condensed"/>
               </a:rPr>
-              <a:t>Two-Column Layout</a:t>
-            </a:r>
-          </a:p>
-        </p:txBody>
-      </p:sp>
-      <p:sp>
-        <p:nvSpPr>
-          <p:cNvPr id="6" name="Rectangle 5"/>
-          <p:cNvSpPr/>
-          <p:nvPr/>
-        </p:nvSpPr>
-        <p:spPr>
-          <a:xfrm>
-            <a:off x="548640" y="1234440"/>
-            <a:ext cx="5431536" cy="5349240"/>
-          </a:xfrm>
-          <a:prstGeom prst="rect">
-            <a:avLst/>
-          </a:prstGeom>
-          <a:solidFill>
-            <a:srgbClr val="262B4B"/>
-          </a:solidFill>
-          <a:ln>
-            <a:noFill/>
-          </a:ln>
-        </p:spPr>
-        <p:style>
-          <a:lnRef idx="1">
-            <a:schemeClr val="accent1"/>
-          </a:lnRef>
-          <a:fillRef idx="3">
-            <a:schemeClr val="accent1"/>
-          </a:fillRef>
-          <a:effectRef idx="2">
-            <a:schemeClr val="accent1"/>
-          </a:effectRef>
-          <a:fontRef idx="minor">
-            <a:schemeClr val="lt1"/>
-          </a:fontRef>
-        </p:style>
-        <p:txBody>
-          <a:bodyPr rtlCol="0" anchor="ctr"/>
-          <a:lstStyle/>
-          <a:p>
-            <a:pPr algn="ctr"/>
-          </a:p>
-        </p:txBody>
-      </p:sp>
-      <p:sp>
-        <p:nvSpPr>
-          <p:cNvPr id="7" name="Rectangle 6"/>
-          <p:cNvSpPr/>
-          <p:nvPr/>
-        </p:nvSpPr>
-        <p:spPr>
-          <a:xfrm>
-            <a:off x="548640" y="1234440"/>
-            <a:ext cx="5431536" cy="50292"/>
-          </a:xfrm>
-          <a:prstGeom prst="rect">
-            <a:avLst/>
-          </a:prstGeom>
-          <a:solidFill>
-            <a:srgbClr val="FCB514"/>
-          </a:solidFill>
-          <a:ln>
-            <a:noFill/>
-          </a:ln>
-        </p:spPr>
-        <p:style>
-          <a:lnRef idx="1">
-            <a:schemeClr val="accent1"/>
-          </a:lnRef>
-          <a:fillRef idx="3">
-            <a:schemeClr val="accent1"/>
-          </a:fillRef>
-          <a:effectRef idx="2">
-            <a:schemeClr val="accent1"/>
-          </a:effectRef>
-          <a:fontRef idx="minor">
-            <a:schemeClr val="lt1"/>
-          </a:fontRef>
-        </p:style>
-        <p:txBody>
-          <a:bodyPr rtlCol="0" anchor="ctr"/>
-          <a:lstStyle/>
-          <a:p>
-            <a:pPr algn="ctr"/>
-          </a:p>
-        </p:txBody>
-      </p:sp>
-      <p:sp>
-        <p:nvSpPr>
-          <p:cNvPr id="8" name="TextBox 7"/>
+              <a:t>Architecture</a:t>
+            </a:r>
+            <a:endParaRPr sz="3000" b="1" i="0" dirty="0">
+              <a:solidFill>
+                <a:schemeClr val="bg1"/>
+              </a:solidFill>
+              <a:latin typeface="Barlow Condensed"/>
+            </a:endParaRPr>
+          </a:p>
+        </p:txBody>
+      </p:sp>
+      <p:sp>
+        <p:nvSpPr>
+          <p:cNvPr id="6" name="TextBox 5"/>
           <p:cNvSpPr txBox="1"/>
           <p:nvPr/>
         </p:nvSpPr>
         <p:spPr>
           <a:xfrm>
-            <a:off x="822960" y="1554480"/>
-            <a:ext cx="4882896" cy="4892040"/>
-          </a:xfrm>
-          <a:prstGeom prst="rect">
-            <a:avLst/>
-          </a:prstGeom>
-          <a:noFill/>
-        </p:spPr>
-        <p:txBody>
-          <a:bodyPr wrap="square">
-            <a:spAutoFit/>
-          </a:bodyPr>
-          <a:lstStyle/>
-          <a:p>
-            <a:pPr algn="l">
-              <a:spcBef>
-                <a:spcPts val="0"/>
-              </a:spcBef>
-              <a:spcAft>
-                <a:spcPts val="1200"/>
-              </a:spcAft>
-            </a:pPr>
-            <a:r>
-              <a:rPr sz="2200" b="1" i="0">
-                <a:solidFill>
-                  <a:srgbClr val="FCB514"/>
-                </a:solidFill>
-                <a:latin typeface="Barlow Condensed"/>
-              </a:rPr>
-              <a:t>Key Point</a:t>
-            </a:r>
-          </a:p>
-          <a:p>
-            <a:pPr algn="l">
-              <a:spcBef>
-                <a:spcPts val="0"/>
-              </a:spcBef>
-              <a:spcAft>
-                <a:spcPts val="0"/>
-              </a:spcAft>
-            </a:pPr>
-            <a:r>
-              <a:rPr sz="1400" b="0" i="0">
-                <a:solidFill>
-                  <a:srgbClr val="FFFFFF"/>
-                </a:solidFill>
-                <a:latin typeface="Inter"/>
-              </a:rPr>
-              <a:t>Supporting text or metric. Keep it short and impactful. Use this column for the key claim.</a:t>
-            </a:r>
-          </a:p>
-        </p:txBody>
-      </p:sp>
-      <p:sp>
-        <p:nvSpPr>
-          <p:cNvPr id="9" name="TextBox 8"/>
-          <p:cNvSpPr txBox="1"/>
-          <p:nvPr/>
-        </p:nvSpPr>
-        <p:spPr>
-          <a:xfrm>
-            <a:off x="6208776" y="1463040"/>
-            <a:ext cx="5431536" cy="5029200"/>
-          </a:xfrm>
-          <a:prstGeom prst="rect">
-            <a:avLst/>
-          </a:prstGeom>
-          <a:noFill/>
-        </p:spPr>
-        <p:txBody>
-          <a:bodyPr wrap="square">
-            <a:spAutoFit/>
-          </a:bodyPr>
-          <a:lstStyle/>
-          <a:p>
-            <a:pPr algn="l">
-              <a:spcBef>
-                <a:spcPts val="0"/>
-              </a:spcBef>
-              <a:spcAft>
-                <a:spcPts val="1000"/>
-              </a:spcAft>
-            </a:pPr>
-            <a:r>
-              <a:rPr sz="1600" b="1" i="0">
-                <a:solidFill>
-                  <a:srgbClr val="262B4B"/>
-                </a:solidFill>
-                <a:latin typeface="Inter"/>
-              </a:rPr>
-              <a:t>Detail heading</a:t>
-            </a:r>
-          </a:p>
-          <a:p>
-            <a:pPr algn="l">
-              <a:spcBef>
-                <a:spcPts val="600"/>
-              </a:spcBef>
-              <a:spcAft>
-                <a:spcPts val="200"/>
-              </a:spcAft>
-            </a:pPr>
-            <a:r>
-              <a:rPr sz="1300" b="0" i="0">
-                <a:solidFill>
-                  <a:srgbClr val="373652"/>
-                </a:solidFill>
-                <a:latin typeface="Inter"/>
-              </a:rPr>
-              <a:t>• Supporting detail one that elaborates on the key point.</a:t>
-            </a:r>
-          </a:p>
-          <a:p>
-            <a:pPr algn="l">
-              <a:spcBef>
-                <a:spcPts val="600"/>
-              </a:spcBef>
-              <a:spcAft>
-                <a:spcPts val="200"/>
-              </a:spcAft>
-            </a:pPr>
-            <a:r>
-              <a:rPr sz="1300" b="0" i="0">
-                <a:solidFill>
-                  <a:srgbClr val="373652"/>
-                </a:solidFill>
-                <a:latin typeface="Inter"/>
-              </a:rPr>
-              <a:t>• Supporting detail two with additional context or data.</a:t>
-            </a:r>
-          </a:p>
-          <a:p>
-            <a:pPr algn="l">
-              <a:spcBef>
-                <a:spcPts val="600"/>
-              </a:spcBef>
-              <a:spcAft>
-                <a:spcPts val="200"/>
-              </a:spcAft>
-            </a:pPr>
-            <a:r>
-              <a:rPr sz="1300" b="0" i="0">
-                <a:solidFill>
-                  <a:srgbClr val="373652"/>
-                </a:solidFill>
-                <a:latin typeface="Inter"/>
-              </a:rPr>
-              <a:t>• Supporting detail three closing the argument.</a:t>
-            </a:r>
-          </a:p>
-        </p:txBody>
-      </p:sp>
-      <p:sp>
-        <p:nvSpPr>
-          <p:cNvPr id="10" name="TextBox 9"/>
-          <p:cNvSpPr txBox="1"/>
-          <p:nvPr/>
-        </p:nvSpPr>
-        <p:spPr>
-          <a:xfrm>
-            <a:off x="11274552" y="6492240"/>
-            <a:ext cx="731520" cy="274320"/>
+            <a:off x="9445752" y="347472"/>
+            <a:ext cx="2194560" cy="320040"/>
           </a:xfrm>
           <a:prstGeom prst="rect">
             <a:avLst/>
@@ -5409,13 +6809,55 @@
               </a:spcAft>
             </a:pPr>
             <a:r>
+              <a:rPr sz="700" b="1" i="0">
+                <a:solidFill>
+                  <a:srgbClr val="70789A"/>
+                </a:solidFill>
+                <a:latin typeface="Inter"/>
+              </a:rPr>
+              <a:t>SECTION NAME</a:t>
+            </a:r>
+          </a:p>
+        </p:txBody>
+      </p:sp>
+      <p:sp>
+        <p:nvSpPr>
+          <p:cNvPr id="8" name="TextBox 7"/>
+          <p:cNvSpPr txBox="1"/>
+          <p:nvPr/>
+        </p:nvSpPr>
+        <p:spPr>
+          <a:xfrm>
+            <a:off x="11274552" y="6492240"/>
+            <a:ext cx="731520" cy="274320"/>
+          </a:xfrm>
+          <a:prstGeom prst="rect">
+            <a:avLst/>
+          </a:prstGeom>
+          <a:noFill/>
+        </p:spPr>
+        <p:txBody>
+          <a:bodyPr wrap="none">
+            <a:spAutoFit/>
+          </a:bodyPr>
+          <a:lstStyle/>
+          <a:p>
+            <a:pPr algn="r">
+              <a:spcBef>
+                <a:spcPts val="0"/>
+              </a:spcBef>
+              <a:spcAft>
+                <a:spcPts val="0"/>
+              </a:spcAft>
+            </a:pPr>
+            <a:r>
               <a:rPr sz="900" b="0" i="0">
                 <a:solidFill>
                   <a:srgbClr val="808080"/>
                 </a:solidFill>
                 <a:latin typeface="Inter"/>
               </a:rPr>
-              <a:t>02</a:t>
+              <a:t>01</a:t>
             </a:r>
           </a:p>
         </p:txBody>
@@ -5429,7 +6871,623 @@
 </file>
 
 <file path=ppt/slides/slide6.xml><?xml version="1.0" encoding="utf-8"?>
-<p:sld xmlns:a="http://schemas.openxmlformats.org/drawingml/2006/main" xmlns:p="http://schemas.openxmlformats.org/presentationml/2006/main" xmlns:r="http://schemas.openxmlformats.org/officeDocument/2006/relationships">
+<p:sld xmlns:a="http://schemas.openxmlformats.org/drawingml/2006/main" xmlns:r="http://schemas.openxmlformats.org/officeDocument/2006/relationships" xmlns:p="http://schemas.openxmlformats.org/presentationml/2006/main">
+  <p:cSld>
+    <p:spTree>
+      <p:nvGrpSpPr>
+        <p:cNvPr id="1" name="">
+          <a:extLst>
+            <a:ext uri="{FF2B5EF4-FFF2-40B4-BE49-F238E27FC236}">
+              <a16:creationId xmlns:a16="http://schemas.microsoft.com/office/drawing/2014/main" id="{689620E3-3611-3D90-10A2-813149A2D490}"/>
+            </a:ext>
+          </a:extLst>
+        </p:cNvPr>
+        <p:cNvGrpSpPr/>
+        <p:nvPr/>
+      </p:nvGrpSpPr>
+      <p:grpSpPr>
+        <a:xfrm>
+          <a:off x="0" y="0"/>
+          <a:ext cx="0" cy="0"/>
+          <a:chOff x="0" y="0"/>
+          <a:chExt cx="0" cy="0"/>
+        </a:xfrm>
+      </p:grpSpPr>
+      <p:sp>
+        <p:nvSpPr>
+          <p:cNvPr id="2" name="Rectangle 1">
+            <a:extLst>
+              <a:ext uri="{FF2B5EF4-FFF2-40B4-BE49-F238E27FC236}">
+                <a16:creationId xmlns:a16="http://schemas.microsoft.com/office/drawing/2014/main" id="{3317AF51-C72C-B69B-A18B-EFC367305CAC}"/>
+              </a:ext>
+            </a:extLst>
+          </p:cNvPr>
+          <p:cNvSpPr/>
+          <p:nvPr/>
+        </p:nvSpPr>
+        <p:spPr>
+          <a:xfrm>
+            <a:off x="0" y="0"/>
+            <a:ext cx="12188952" cy="6858000"/>
+          </a:xfrm>
+          <a:prstGeom prst="rect">
+            <a:avLst/>
+          </a:prstGeom>
+          <a:solidFill>
+            <a:srgbClr val="FCB514"/>
+          </a:solidFill>
+          <a:ln>
+            <a:noFill/>
+          </a:ln>
+        </p:spPr>
+        <p:style>
+          <a:lnRef idx="1">
+            <a:schemeClr val="accent1"/>
+          </a:lnRef>
+          <a:fillRef idx="3">
+            <a:schemeClr val="accent1"/>
+          </a:fillRef>
+          <a:effectRef idx="2">
+            <a:schemeClr val="accent1"/>
+          </a:effectRef>
+          <a:fontRef idx="minor">
+            <a:schemeClr val="lt1"/>
+          </a:fontRef>
+        </p:style>
+        <p:txBody>
+          <a:bodyPr rtlCol="0" anchor="ctr"/>
+          <a:lstStyle/>
+          <a:p>
+            <a:pPr algn="ctr"/>
+            <a:endParaRPr/>
+          </a:p>
+        </p:txBody>
+      </p:sp>
+      <p:sp>
+        <p:nvSpPr>
+          <p:cNvPr id="3" name="Rectangle 2">
+            <a:extLst>
+              <a:ext uri="{FF2B5EF4-FFF2-40B4-BE49-F238E27FC236}">
+                <a16:creationId xmlns:a16="http://schemas.microsoft.com/office/drawing/2014/main" id="{DD81A711-22B4-6671-453A-40BF6A6273FC}"/>
+              </a:ext>
+            </a:extLst>
+          </p:cNvPr>
+          <p:cNvSpPr/>
+          <p:nvPr/>
+        </p:nvSpPr>
+        <p:spPr>
+          <a:xfrm>
+            <a:off x="0" y="0"/>
+            <a:ext cx="1097280" cy="6858000"/>
+          </a:xfrm>
+          <a:prstGeom prst="rect">
+            <a:avLst/>
+          </a:prstGeom>
+          <a:solidFill>
+            <a:srgbClr val="262B4B"/>
+          </a:solidFill>
+          <a:ln>
+            <a:noFill/>
+          </a:ln>
+        </p:spPr>
+        <p:style>
+          <a:lnRef idx="1">
+            <a:schemeClr val="accent1"/>
+          </a:lnRef>
+          <a:fillRef idx="3">
+            <a:schemeClr val="accent1"/>
+          </a:fillRef>
+          <a:effectRef idx="2">
+            <a:schemeClr val="accent1"/>
+          </a:effectRef>
+          <a:fontRef idx="minor">
+            <a:schemeClr val="lt1"/>
+          </a:fontRef>
+        </p:style>
+        <p:txBody>
+          <a:bodyPr rtlCol="0" anchor="ctr"/>
+          <a:lstStyle/>
+          <a:p>
+            <a:pPr algn="ctr"/>
+            <a:endParaRPr/>
+          </a:p>
+        </p:txBody>
+      </p:sp>
+      <p:sp>
+        <p:nvSpPr>
+          <p:cNvPr id="4" name="TextBox 3">
+            <a:extLst>
+              <a:ext uri="{FF2B5EF4-FFF2-40B4-BE49-F238E27FC236}">
+                <a16:creationId xmlns:a16="http://schemas.microsoft.com/office/drawing/2014/main" id="{67A19FB6-3640-409C-1B19-916CED8E27F9}"/>
+              </a:ext>
+            </a:extLst>
+          </p:cNvPr>
+          <p:cNvSpPr txBox="1"/>
+          <p:nvPr/>
+        </p:nvSpPr>
+        <p:spPr>
+          <a:xfrm>
+            <a:off x="137160" y="2560320"/>
+            <a:ext cx="822960" cy="1097280"/>
+          </a:xfrm>
+          <a:prstGeom prst="rect">
+            <a:avLst/>
+          </a:prstGeom>
+          <a:noFill/>
+        </p:spPr>
+        <p:txBody>
+          <a:bodyPr wrap="none">
+            <a:spAutoFit/>
+          </a:bodyPr>
+          <a:lstStyle/>
+          <a:p>
+            <a:pPr algn="ctr">
+              <a:spcBef>
+                <a:spcPts val="0"/>
+              </a:spcBef>
+              <a:spcAft>
+                <a:spcPts val="0"/>
+              </a:spcAft>
+            </a:pPr>
+            <a:r>
+              <a:rPr sz="3600" b="1" i="0">
+                <a:solidFill>
+                  <a:srgbClr val="FCB514"/>
+                </a:solidFill>
+                <a:latin typeface="Barlow Condensed"/>
+              </a:rPr>
+              <a:t>01</a:t>
+            </a:r>
+          </a:p>
+        </p:txBody>
+      </p:sp>
+      <p:sp>
+        <p:nvSpPr>
+          <p:cNvPr id="6" name="TextBox 5">
+            <a:extLst>
+              <a:ext uri="{FF2B5EF4-FFF2-40B4-BE49-F238E27FC236}">
+                <a16:creationId xmlns:a16="http://schemas.microsoft.com/office/drawing/2014/main" id="{02373162-445F-AC6C-B700-3EB4B5BBD2B9}"/>
+              </a:ext>
+            </a:extLst>
+          </p:cNvPr>
+          <p:cNvSpPr txBox="1"/>
+          <p:nvPr/>
+        </p:nvSpPr>
+        <p:spPr>
+          <a:xfrm>
+            <a:off x="1463040" y="2194560"/>
+            <a:ext cx="8229600" cy="892552"/>
+          </a:xfrm>
+          <a:prstGeom prst="rect">
+            <a:avLst/>
+          </a:prstGeom>
+          <a:noFill/>
+        </p:spPr>
+        <p:txBody>
+          <a:bodyPr wrap="square">
+            <a:spAutoFit/>
+          </a:bodyPr>
+          <a:lstStyle/>
+          <a:p>
+            <a:pPr algn="l">
+              <a:spcBef>
+                <a:spcPts val="0"/>
+              </a:spcBef>
+              <a:spcAft>
+                <a:spcPts val="800"/>
+              </a:spcAft>
+            </a:pPr>
+            <a:r>
+              <a:rPr lang="de-AT" sz="5200" b="1" i="0" dirty="0">
+                <a:solidFill>
+                  <a:srgbClr val="262B4B"/>
+                </a:solidFill>
+                <a:latin typeface="Barlow Condensed"/>
+              </a:rPr>
+              <a:t>Demonstration</a:t>
+            </a:r>
+            <a:endParaRPr sz="5200" b="1" i="0" dirty="0">
+              <a:solidFill>
+                <a:srgbClr val="262B4B"/>
+              </a:solidFill>
+              <a:latin typeface="Barlow Condensed"/>
+            </a:endParaRPr>
+          </a:p>
+        </p:txBody>
+      </p:sp>
+      <p:sp>
+        <p:nvSpPr>
+          <p:cNvPr id="7" name="Rectangle 6">
+            <a:extLst>
+              <a:ext uri="{FF2B5EF4-FFF2-40B4-BE49-F238E27FC236}">
+                <a16:creationId xmlns:a16="http://schemas.microsoft.com/office/drawing/2014/main" id="{9DB8D153-56AA-7F06-A12C-BB76495775A6}"/>
+              </a:ext>
+            </a:extLst>
+          </p:cNvPr>
+          <p:cNvSpPr/>
+          <p:nvPr/>
+        </p:nvSpPr>
+        <p:spPr>
+          <a:xfrm>
+            <a:off x="0" y="6793992"/>
+            <a:ext cx="12188952" cy="64008"/>
+          </a:xfrm>
+          <a:prstGeom prst="rect">
+            <a:avLst/>
+          </a:prstGeom>
+          <a:solidFill>
+            <a:srgbClr val="262B4B"/>
+          </a:solidFill>
+          <a:ln>
+            <a:noFill/>
+          </a:ln>
+        </p:spPr>
+        <p:style>
+          <a:lnRef idx="1">
+            <a:schemeClr val="accent1"/>
+          </a:lnRef>
+          <a:fillRef idx="3">
+            <a:schemeClr val="accent1"/>
+          </a:fillRef>
+          <a:effectRef idx="2">
+            <a:schemeClr val="accent1"/>
+          </a:effectRef>
+          <a:fontRef idx="minor">
+            <a:schemeClr val="lt1"/>
+          </a:fontRef>
+        </p:style>
+        <p:txBody>
+          <a:bodyPr rtlCol="0" anchor="ctr"/>
+          <a:lstStyle/>
+          <a:p>
+            <a:pPr algn="ctr"/>
+            <a:endParaRPr/>
+          </a:p>
+        </p:txBody>
+      </p:sp>
+    </p:spTree>
+    <p:extLst>
+      <p:ext uri="{BB962C8B-B14F-4D97-AF65-F5344CB8AC3E}">
+        <p14:creationId xmlns:p14="http://schemas.microsoft.com/office/powerpoint/2010/main" val="2429206103"/>
+      </p:ext>
+    </p:extLst>
+  </p:cSld>
+  <p:clrMapOvr>
+    <a:masterClrMapping/>
+  </p:clrMapOvr>
+</p:sld>
+</file>
+
+<file path=ppt/slides/slide7.xml><?xml version="1.0" encoding="utf-8"?>
+<p:sld xmlns:a="http://schemas.openxmlformats.org/drawingml/2006/main" xmlns:r="http://schemas.openxmlformats.org/officeDocument/2006/relationships" xmlns:p="http://schemas.openxmlformats.org/presentationml/2006/main">
+  <p:cSld>
+    <p:spTree>
+      <p:nvGrpSpPr>
+        <p:cNvPr id="1" name="">
+          <a:extLst>
+            <a:ext uri="{FF2B5EF4-FFF2-40B4-BE49-F238E27FC236}">
+              <a16:creationId xmlns:a16="http://schemas.microsoft.com/office/drawing/2014/main" id="{25488908-9930-57BD-9E7D-7B22D37C2645}"/>
+            </a:ext>
+          </a:extLst>
+        </p:cNvPr>
+        <p:cNvGrpSpPr/>
+        <p:nvPr/>
+      </p:nvGrpSpPr>
+      <p:grpSpPr>
+        <a:xfrm>
+          <a:off x="0" y="0"/>
+          <a:ext cx="0" cy="0"/>
+          <a:chOff x="0" y="0"/>
+          <a:chExt cx="0" cy="0"/>
+        </a:xfrm>
+      </p:grpSpPr>
+      <p:sp>
+        <p:nvSpPr>
+          <p:cNvPr id="2" name="Rectangle 1">
+            <a:extLst>
+              <a:ext uri="{FF2B5EF4-FFF2-40B4-BE49-F238E27FC236}">
+                <a16:creationId xmlns:a16="http://schemas.microsoft.com/office/drawing/2014/main" id="{562BE80B-B1AB-326E-FB04-9E908D4FD2C8}"/>
+              </a:ext>
+            </a:extLst>
+          </p:cNvPr>
+          <p:cNvSpPr/>
+          <p:nvPr/>
+        </p:nvSpPr>
+        <p:spPr>
+          <a:xfrm>
+            <a:off x="0" y="0"/>
+            <a:ext cx="12188952" cy="6858000"/>
+          </a:xfrm>
+          <a:prstGeom prst="rect">
+            <a:avLst/>
+          </a:prstGeom>
+          <a:solidFill>
+            <a:srgbClr val="F3F2EA"/>
+          </a:solidFill>
+          <a:ln>
+            <a:noFill/>
+          </a:ln>
+        </p:spPr>
+        <p:style>
+          <a:lnRef idx="1">
+            <a:schemeClr val="accent1"/>
+          </a:lnRef>
+          <a:fillRef idx="3">
+            <a:schemeClr val="accent1"/>
+          </a:fillRef>
+          <a:effectRef idx="2">
+            <a:schemeClr val="accent1"/>
+          </a:effectRef>
+          <a:fontRef idx="minor">
+            <a:schemeClr val="lt1"/>
+          </a:fontRef>
+        </p:style>
+        <p:txBody>
+          <a:bodyPr rtlCol="0" anchor="ctr"/>
+          <a:lstStyle/>
+          <a:p>
+            <a:pPr algn="ctr"/>
+            <a:endParaRPr/>
+          </a:p>
+        </p:txBody>
+      </p:sp>
+      <p:sp>
+        <p:nvSpPr>
+          <p:cNvPr id="3" name="Rectangle 2">
+            <a:extLst>
+              <a:ext uri="{FF2B5EF4-FFF2-40B4-BE49-F238E27FC236}">
+                <a16:creationId xmlns:a16="http://schemas.microsoft.com/office/drawing/2014/main" id="{F2D543FE-4A76-77D0-4633-52FBDC50744D}"/>
+              </a:ext>
+            </a:extLst>
+          </p:cNvPr>
+          <p:cNvSpPr/>
+          <p:nvPr/>
+        </p:nvSpPr>
+        <p:spPr>
+          <a:xfrm>
+            <a:off x="0" y="0"/>
+            <a:ext cx="12188952" cy="1051560"/>
+          </a:xfrm>
+          <a:prstGeom prst="rect">
+            <a:avLst/>
+          </a:prstGeom>
+          <a:solidFill>
+            <a:srgbClr val="262B4B"/>
+          </a:solidFill>
+          <a:ln>
+            <a:noFill/>
+          </a:ln>
+        </p:spPr>
+        <p:style>
+          <a:lnRef idx="1">
+            <a:schemeClr val="accent1"/>
+          </a:lnRef>
+          <a:fillRef idx="3">
+            <a:schemeClr val="accent1"/>
+          </a:fillRef>
+          <a:effectRef idx="2">
+            <a:schemeClr val="accent1"/>
+          </a:effectRef>
+          <a:fontRef idx="minor">
+            <a:schemeClr val="lt1"/>
+          </a:fontRef>
+        </p:style>
+        <p:txBody>
+          <a:bodyPr rtlCol="0" anchor="ctr"/>
+          <a:lstStyle/>
+          <a:p>
+            <a:pPr algn="ctr"/>
+            <a:endParaRPr/>
+          </a:p>
+        </p:txBody>
+      </p:sp>
+      <p:sp>
+        <p:nvSpPr>
+          <p:cNvPr id="4" name="Rectangle 3">
+            <a:extLst>
+              <a:ext uri="{FF2B5EF4-FFF2-40B4-BE49-F238E27FC236}">
+                <a16:creationId xmlns:a16="http://schemas.microsoft.com/office/drawing/2014/main" id="{F9479A94-98EA-D6DA-29BB-A52FB8DC5EC6}"/>
+              </a:ext>
+            </a:extLst>
+          </p:cNvPr>
+          <p:cNvSpPr/>
+          <p:nvPr/>
+        </p:nvSpPr>
+        <p:spPr>
+          <a:xfrm>
+            <a:off x="0" y="1051560"/>
+            <a:ext cx="12188952" cy="45720"/>
+          </a:xfrm>
+          <a:prstGeom prst="rect">
+            <a:avLst/>
+          </a:prstGeom>
+          <a:solidFill>
+            <a:srgbClr val="FCB514"/>
+          </a:solidFill>
+          <a:ln>
+            <a:noFill/>
+          </a:ln>
+        </p:spPr>
+        <p:style>
+          <a:lnRef idx="1">
+            <a:schemeClr val="accent1"/>
+          </a:lnRef>
+          <a:fillRef idx="3">
+            <a:schemeClr val="accent1"/>
+          </a:fillRef>
+          <a:effectRef idx="2">
+            <a:schemeClr val="accent1"/>
+          </a:effectRef>
+          <a:fontRef idx="minor">
+            <a:schemeClr val="lt1"/>
+          </a:fontRef>
+        </p:style>
+        <p:txBody>
+          <a:bodyPr rtlCol="0" anchor="ctr"/>
+          <a:lstStyle/>
+          <a:p>
+            <a:pPr algn="ctr"/>
+            <a:endParaRPr/>
+          </a:p>
+        </p:txBody>
+      </p:sp>
+      <p:sp>
+        <p:nvSpPr>
+          <p:cNvPr id="5" name="TextBox 4">
+            <a:extLst>
+              <a:ext uri="{FF2B5EF4-FFF2-40B4-BE49-F238E27FC236}">
+                <a16:creationId xmlns:a16="http://schemas.microsoft.com/office/drawing/2014/main" id="{AD074D1C-753D-D9A9-42C6-54825625165F}"/>
+              </a:ext>
+            </a:extLst>
+          </p:cNvPr>
+          <p:cNvSpPr txBox="1"/>
+          <p:nvPr/>
+        </p:nvSpPr>
+        <p:spPr>
+          <a:xfrm>
+            <a:off x="548640" y="164592"/>
+            <a:ext cx="2375971" cy="584775"/>
+          </a:xfrm>
+          <a:prstGeom prst="rect">
+            <a:avLst/>
+          </a:prstGeom>
+          <a:noFill/>
+        </p:spPr>
+        <p:txBody>
+          <a:bodyPr wrap="none">
+            <a:spAutoFit/>
+          </a:bodyPr>
+          <a:lstStyle/>
+          <a:p>
+            <a:r>
+              <a:rPr lang="de-AT" sz="3200" b="1" dirty="0">
+                <a:solidFill>
+                  <a:schemeClr val="bg1"/>
+                </a:solidFill>
+                <a:latin typeface="Barlow Condensed"/>
+              </a:rPr>
+              <a:t>Demonstration</a:t>
+            </a:r>
+            <a:endParaRPr sz="3000" b="1" i="0" dirty="0">
+              <a:solidFill>
+                <a:schemeClr val="bg1"/>
+              </a:solidFill>
+              <a:latin typeface="Barlow Condensed"/>
+            </a:endParaRPr>
+          </a:p>
+        </p:txBody>
+      </p:sp>
+      <p:sp>
+        <p:nvSpPr>
+          <p:cNvPr id="6" name="TextBox 5">
+            <a:extLst>
+              <a:ext uri="{FF2B5EF4-FFF2-40B4-BE49-F238E27FC236}">
+                <a16:creationId xmlns:a16="http://schemas.microsoft.com/office/drawing/2014/main" id="{5FE7EFC5-9B83-4A82-E325-215ADCB1A9C6}"/>
+              </a:ext>
+            </a:extLst>
+          </p:cNvPr>
+          <p:cNvSpPr txBox="1"/>
+          <p:nvPr/>
+        </p:nvSpPr>
+        <p:spPr>
+          <a:xfrm>
+            <a:off x="9445752" y="347472"/>
+            <a:ext cx="2194560" cy="320040"/>
+          </a:xfrm>
+          <a:prstGeom prst="rect">
+            <a:avLst/>
+          </a:prstGeom>
+          <a:noFill/>
+        </p:spPr>
+        <p:txBody>
+          <a:bodyPr wrap="none">
+            <a:spAutoFit/>
+          </a:bodyPr>
+          <a:lstStyle/>
+          <a:p>
+            <a:pPr algn="r">
+              <a:spcBef>
+                <a:spcPts val="0"/>
+              </a:spcBef>
+              <a:spcAft>
+                <a:spcPts val="0"/>
+              </a:spcAft>
+            </a:pPr>
+            <a:r>
+              <a:rPr sz="700" b="1" i="0">
+                <a:solidFill>
+                  <a:srgbClr val="70789A"/>
+                </a:solidFill>
+                <a:latin typeface="Inter"/>
+              </a:rPr>
+              <a:t>SECTION NAME</a:t>
+            </a:r>
+          </a:p>
+        </p:txBody>
+      </p:sp>
+      <p:sp>
+        <p:nvSpPr>
+          <p:cNvPr id="8" name="TextBox 7">
+            <a:extLst>
+              <a:ext uri="{FF2B5EF4-FFF2-40B4-BE49-F238E27FC236}">
+                <a16:creationId xmlns:a16="http://schemas.microsoft.com/office/drawing/2014/main" id="{53442A26-9CF4-782C-1D0A-FBA1296E3997}"/>
+              </a:ext>
+            </a:extLst>
+          </p:cNvPr>
+          <p:cNvSpPr txBox="1"/>
+          <p:nvPr/>
+        </p:nvSpPr>
+        <p:spPr>
+          <a:xfrm>
+            <a:off x="11274552" y="6492240"/>
+            <a:ext cx="731520" cy="274320"/>
+          </a:xfrm>
+          <a:prstGeom prst="rect">
+            <a:avLst/>
+          </a:prstGeom>
+          <a:noFill/>
+        </p:spPr>
+        <p:txBody>
+          <a:bodyPr wrap="none">
+            <a:spAutoFit/>
+          </a:bodyPr>
+          <a:lstStyle/>
+          <a:p>
+            <a:pPr algn="r">
+              <a:spcBef>
+                <a:spcPts val="0"/>
+              </a:spcBef>
+              <a:spcAft>
+                <a:spcPts val="0"/>
+              </a:spcAft>
+            </a:pPr>
+            <a:r>
+              <a:rPr sz="900" b="0" i="0">
+                <a:solidFill>
+                  <a:srgbClr val="808080"/>
+                </a:solidFill>
+                <a:latin typeface="Inter"/>
+              </a:rPr>
+              <a:t>01</a:t>
+            </a:r>
+          </a:p>
+        </p:txBody>
+      </p:sp>
+    </p:spTree>
+    <p:extLst>
+      <p:ext uri="{BB962C8B-B14F-4D97-AF65-F5344CB8AC3E}">
+        <p14:creationId xmlns:p14="http://schemas.microsoft.com/office/powerpoint/2010/main" val="600208392"/>
+      </p:ext>
+    </p:extLst>
+  </p:cSld>
+  <p:clrMapOvr>
+    <a:masterClrMapping/>
+  </p:clrMapOvr>
+</p:sld>
+</file>
+
+<file path=ppt/slides/slide8.xml><?xml version="1.0" encoding="utf-8"?>
+<p:sld xmlns:a="http://schemas.openxmlformats.org/drawingml/2006/main" xmlns:r="http://schemas.openxmlformats.org/officeDocument/2006/relationships" xmlns:p="http://schemas.openxmlformats.org/presentationml/2006/main">
   <p:cSld>
     <p:spTree>
       <p:nvGrpSpPr>
@@ -5437,7 +7495,14 @@
         <p:cNvGrpSpPr/>
         <p:nvPr/>
       </p:nvGrpSpPr>
-      <p:grpSpPr/>
+      <p:grpSpPr>
+        <a:xfrm>
+          <a:off x="0" y="0"/>
+          <a:ext cx="0" cy="0"/>
+          <a:chOff x="0" y="0"/>
+          <a:chExt cx="0" cy="0"/>
+        </a:xfrm>
+      </p:grpSpPr>
       <p:sp>
         <p:nvSpPr>
           <p:cNvPr id="2" name="Rectangle 1"/>
@@ -5478,6 +7543,7 @@
           <a:lstStyle/>
           <a:p>
             <a:pPr algn="ctr"/>
+            <a:endParaRPr/>
           </a:p>
         </p:txBody>
       </p:sp>
@@ -5490,7 +7556,7 @@
         <p:spPr>
           <a:xfrm>
             <a:off x="0" y="0"/>
-            <a:ext cx="12188952" cy="64008"/>
+            <a:ext cx="73152" cy="6858000"/>
           </a:xfrm>
           <a:prstGeom prst="rect">
             <a:avLst/>
@@ -5521,19 +7587,70 @@
           <a:lstStyle/>
           <a:p>
             <a:pPr algn="ctr"/>
-          </a:p>
-        </p:txBody>
-      </p:sp>
-      <p:sp>
-        <p:nvSpPr>
-          <p:cNvPr id="4" name="TextBox 3"/>
+            <a:endParaRPr/>
+          </a:p>
+        </p:txBody>
+      </p:sp>
+      <p:sp>
+        <p:nvSpPr>
+          <p:cNvPr id="6" name="Rectangle 5"/>
+          <p:cNvSpPr/>
+          <p:nvPr/>
+        </p:nvSpPr>
+        <p:spPr>
+          <a:xfrm>
+            <a:off x="0" y="6793992"/>
+            <a:ext cx="12188952" cy="64008"/>
+          </a:xfrm>
+          <a:prstGeom prst="rect">
+            <a:avLst/>
+          </a:prstGeom>
+          <a:solidFill>
+            <a:srgbClr val="FCB514"/>
+          </a:solidFill>
+          <a:ln>
+            <a:noFill/>
+          </a:ln>
+        </p:spPr>
+        <p:style>
+          <a:lnRef idx="1">
+            <a:schemeClr val="accent1"/>
+          </a:lnRef>
+          <a:fillRef idx="3">
+            <a:schemeClr val="accent1"/>
+          </a:fillRef>
+          <a:effectRef idx="2">
+            <a:schemeClr val="accent1"/>
+          </a:effectRef>
+          <a:fontRef idx="minor">
+            <a:schemeClr val="lt1"/>
+          </a:fontRef>
+        </p:style>
+        <p:txBody>
+          <a:bodyPr rtlCol="0" anchor="ctr"/>
+          <a:lstStyle/>
+          <a:p>
+            <a:pPr algn="ctr"/>
+            <a:endParaRPr/>
+          </a:p>
+        </p:txBody>
+      </p:sp>
+      <p:sp>
+        <p:nvSpPr>
+          <p:cNvPr id="7" name="TextBox 6">
+            <a:extLst>
+              <a:ext uri="{FF2B5EF4-FFF2-40B4-BE49-F238E27FC236}">
+                <a16:creationId xmlns:a16="http://schemas.microsoft.com/office/drawing/2014/main" id="{AAA6474F-7F1A-6D17-EBEA-AF676817878A}"/>
+              </a:ext>
+            </a:extLst>
+          </p:cNvPr>
           <p:cNvSpPr txBox="1"/>
           <p:nvPr/>
         </p:nvSpPr>
         <p:spPr>
           <a:xfrm>
-            <a:off x="548640" y="274320"/>
-            <a:ext cx="10058400" cy="685800"/>
+            <a:off x="2404745" y="1950343"/>
+            <a:ext cx="1828800" cy="1828800"/>
           </a:xfrm>
           <a:prstGeom prst="rect">
             <a:avLst/>
@@ -5555,33 +7672,134 @@
               </a:spcAft>
             </a:pPr>
             <a:r>
-              <a:rPr sz="3400" b="1" i="0">
+              <a:rPr sz="12000" b="1" i="0" dirty="0">
+                <a:solidFill>
+                  <a:srgbClr val="FCB514"/>
+                </a:solidFill>
+                <a:latin typeface="Barlow Condensed"/>
+              </a:rPr>
+              <a:t>“</a:t>
+            </a:r>
+          </a:p>
+        </p:txBody>
+      </p:sp>
+      <p:sp>
+        <p:nvSpPr>
+          <p:cNvPr id="8" name="TextBox 7">
+            <a:extLst>
+              <a:ext uri="{FF2B5EF4-FFF2-40B4-BE49-F238E27FC236}">
+                <a16:creationId xmlns:a16="http://schemas.microsoft.com/office/drawing/2014/main" id="{DA312122-B4ED-1BB5-B134-16039D3E4F63}"/>
+              </a:ext>
+            </a:extLst>
+          </p:cNvPr>
+          <p:cNvSpPr txBox="1"/>
+          <p:nvPr/>
+        </p:nvSpPr>
+        <p:spPr>
+          <a:xfrm>
+            <a:off x="2587625" y="2864743"/>
+            <a:ext cx="9601200" cy="1128514"/>
+          </a:xfrm>
+          <a:prstGeom prst="rect">
+            <a:avLst/>
+          </a:prstGeom>
+          <a:noFill/>
+        </p:spPr>
+        <p:txBody>
+          <a:bodyPr wrap="square">
+            <a:spAutoFit/>
+          </a:bodyPr>
+          <a:lstStyle/>
+          <a:p>
+            <a:pPr>
+              <a:spcAft>
+                <a:spcPts val="1600"/>
+              </a:spcAft>
+            </a:pPr>
+            <a:r>
+              <a:rPr lang="en-US" sz="4000" b="1" dirty="0">
                 <a:solidFill>
                   <a:srgbClr val="FFFFFF"/>
                 </a:solidFill>
                 <a:latin typeface="Barlow Condensed"/>
               </a:rPr>
-              <a:t>Key Metrics</a:t>
-            </a:r>
-          </a:p>
-        </p:txBody>
-      </p:sp>
-      <p:sp>
-        <p:nvSpPr>
-          <p:cNvPr id="5" name="Rectangle 4"/>
+              <a:t>Going the extra mile is our standard.</a:t>
+            </a:r>
+          </a:p>
+          <a:p>
+            <a:pPr>
+              <a:spcAft>
+                <a:spcPts val="1600"/>
+              </a:spcAft>
+            </a:pPr>
+            <a:r>
+              <a:rPr sz="1400" b="0" i="0" dirty="0">
+                <a:solidFill>
+                  <a:srgbClr val="9098B8"/>
+                </a:solidFill>
+                <a:latin typeface="Inter"/>
+              </a:rPr>
+              <a:t>— </a:t>
+            </a:r>
+            <a:r>
+              <a:rPr sz="1400" b="0" i="0" dirty="0" err="1">
+                <a:solidFill>
+                  <a:srgbClr val="9098B8"/>
+                </a:solidFill>
+                <a:latin typeface="Inter"/>
+              </a:rPr>
+              <a:t>techbold</a:t>
+            </a:r>
+            <a:endParaRPr sz="1400" b="0" i="0" dirty="0">
+              <a:solidFill>
+                <a:srgbClr val="9098B8"/>
+              </a:solidFill>
+              <a:latin typeface="Inter"/>
+            </a:endParaRPr>
+          </a:p>
+        </p:txBody>
+      </p:sp>
+    </p:spTree>
+  </p:cSld>
+  <p:clrMapOvr>
+    <a:masterClrMapping/>
+  </p:clrMapOvr>
+</p:sld>
+</file>
+
+<file path=ppt/slides/slide9.xml><?xml version="1.0" encoding="utf-8"?>
+<p:sld xmlns:a="http://schemas.openxmlformats.org/drawingml/2006/main" xmlns:r="http://schemas.openxmlformats.org/officeDocument/2006/relationships" xmlns:p="http://schemas.openxmlformats.org/presentationml/2006/main" show="0">
+  <p:cSld>
+    <p:spTree>
+      <p:nvGrpSpPr>
+        <p:cNvPr id="1" name=""/>
+        <p:cNvGrpSpPr/>
+        <p:nvPr/>
+      </p:nvGrpSpPr>
+      <p:grpSpPr>
+        <a:xfrm>
+          <a:off x="0" y="0"/>
+          <a:ext cx="0" cy="0"/>
+          <a:chOff x="0" y="0"/>
+          <a:chExt cx="0" cy="0"/>
+        </a:xfrm>
+      </p:grpSpPr>
+      <p:sp>
+        <p:nvSpPr>
+          <p:cNvPr id="2" name="Rectangle 1"/>
           <p:cNvSpPr/>
           <p:nvPr/>
         </p:nvSpPr>
         <p:spPr>
           <a:xfrm>
-            <a:off x="548640" y="1280160"/>
-            <a:ext cx="3514344" cy="4114800"/>
+            <a:off x="0" y="0"/>
+            <a:ext cx="12188952" cy="6858000"/>
           </a:xfrm>
           <a:prstGeom prst="rect">
             <a:avLst/>
           </a:prstGeom>
           <a:solidFill>
-            <a:srgbClr val="373652"/>
+            <a:srgbClr val="F3F2EA"/>
           </a:solidFill>
           <a:ln>
             <a:noFill/>
@@ -5606,19 +7824,64 @@
           <a:lstStyle/>
           <a:p>
             <a:pPr algn="ctr"/>
-          </a:p>
-        </p:txBody>
-      </p:sp>
-      <p:sp>
-        <p:nvSpPr>
-          <p:cNvPr id="6" name="Rectangle 5"/>
+            <a:endParaRPr/>
+          </a:p>
+        </p:txBody>
+      </p:sp>
+      <p:sp>
+        <p:nvSpPr>
+          <p:cNvPr id="3" name="Rectangle 2"/>
           <p:cNvSpPr/>
           <p:nvPr/>
         </p:nvSpPr>
         <p:spPr>
           <a:xfrm>
-            <a:off x="548640" y="1280160"/>
-            <a:ext cx="3514344" cy="50292"/>
+            <a:off x="0" y="0"/>
+            <a:ext cx="12188952" cy="1051560"/>
+          </a:xfrm>
+          <a:prstGeom prst="rect">
+            <a:avLst/>
+          </a:prstGeom>
+          <a:solidFill>
+            <a:srgbClr val="262B4B"/>
+          </a:solidFill>
+          <a:ln>
+            <a:noFill/>
+          </a:ln>
+        </p:spPr>
+        <p:style>
+          <a:lnRef idx="1">
+            <a:schemeClr val="accent1"/>
+          </a:lnRef>
+          <a:fillRef idx="3">
+            <a:schemeClr val="accent1"/>
+          </a:fillRef>
+          <a:effectRef idx="2">
+            <a:schemeClr val="accent1"/>
+          </a:effectRef>
+          <a:fontRef idx="minor">
+            <a:schemeClr val="lt1"/>
+          </a:fontRef>
+        </p:style>
+        <p:txBody>
+          <a:bodyPr rtlCol="0" anchor="ctr"/>
+          <a:lstStyle/>
+          <a:p>
+            <a:pPr algn="ctr"/>
+            <a:endParaRPr/>
+          </a:p>
+        </p:txBody>
+      </p:sp>
+      <p:sp>
+        <p:nvSpPr>
+          <p:cNvPr id="4" name="Rectangle 3"/>
+          <p:cNvSpPr/>
+          <p:nvPr/>
+        </p:nvSpPr>
+        <p:spPr>
+          <a:xfrm>
+            <a:off x="0" y="1051560"/>
+            <a:ext cx="12188952" cy="45720"/>
           </a:xfrm>
           <a:prstGeom prst="rect">
             <a:avLst/>
@@ -5649,19 +7912,20 @@
           <a:lstStyle/>
           <a:p>
             <a:pPr algn="ctr"/>
-          </a:p>
-        </p:txBody>
-      </p:sp>
-      <p:sp>
-        <p:nvSpPr>
-          <p:cNvPr id="7" name="TextBox 6"/>
+            <a:endParaRPr/>
+          </a:p>
+        </p:txBody>
+      </p:sp>
+      <p:sp>
+        <p:nvSpPr>
+          <p:cNvPr id="5" name="TextBox 4"/>
           <p:cNvSpPr txBox="1"/>
           <p:nvPr/>
         </p:nvSpPr>
         <p:spPr>
           <a:xfrm>
-            <a:off x="822960" y="1645920"/>
-            <a:ext cx="2965704" cy="1280160"/>
+            <a:off x="548640" y="164592"/>
+            <a:ext cx="1641796" cy="553998"/>
           </a:xfrm>
           <a:prstGeom prst="rect">
             <a:avLst/>
@@ -5683,38 +7947,151 @@
               </a:spcAft>
             </a:pPr>
             <a:r>
-              <a:rPr sz="5200" b="1" i="0">
+              <a:rPr lang="de-AT" sz="3000" b="1" i="0" dirty="0">
+                <a:solidFill>
+                  <a:srgbClr val="FFFFFF"/>
+                </a:solidFill>
+                <a:latin typeface="Barlow Condensed"/>
+              </a:rPr>
+              <a:t>Motivation</a:t>
+            </a:r>
+            <a:endParaRPr sz="3000" b="1" i="0" dirty="0">
+              <a:solidFill>
+                <a:srgbClr val="FFFFFF"/>
+              </a:solidFill>
+              <a:latin typeface="Barlow Condensed"/>
+            </a:endParaRPr>
+          </a:p>
+        </p:txBody>
+      </p:sp>
+      <p:sp>
+        <p:nvSpPr>
+          <p:cNvPr id="6" name="Rectangle 5"/>
+          <p:cNvSpPr/>
+          <p:nvPr/>
+        </p:nvSpPr>
+        <p:spPr>
+          <a:xfrm>
+            <a:off x="548640" y="1234440"/>
+            <a:ext cx="5431536" cy="5349240"/>
+          </a:xfrm>
+          <a:prstGeom prst="rect">
+            <a:avLst/>
+          </a:prstGeom>
+          <a:solidFill>
+            <a:srgbClr val="262B4B"/>
+          </a:solidFill>
+          <a:ln>
+            <a:noFill/>
+          </a:ln>
+        </p:spPr>
+        <p:style>
+          <a:lnRef idx="1">
+            <a:schemeClr val="accent1"/>
+          </a:lnRef>
+          <a:fillRef idx="3">
+            <a:schemeClr val="accent1"/>
+          </a:fillRef>
+          <a:effectRef idx="2">
+            <a:schemeClr val="accent1"/>
+          </a:effectRef>
+          <a:fontRef idx="minor">
+            <a:schemeClr val="lt1"/>
+          </a:fontRef>
+        </p:style>
+        <p:txBody>
+          <a:bodyPr rtlCol="0" anchor="ctr"/>
+          <a:lstStyle/>
+          <a:p>
+            <a:pPr algn="ctr"/>
+            <a:endParaRPr/>
+          </a:p>
+        </p:txBody>
+      </p:sp>
+      <p:sp>
+        <p:nvSpPr>
+          <p:cNvPr id="7" name="Rectangle 6"/>
+          <p:cNvSpPr/>
+          <p:nvPr/>
+        </p:nvSpPr>
+        <p:spPr>
+          <a:xfrm>
+            <a:off x="548640" y="1234440"/>
+            <a:ext cx="5431536" cy="50292"/>
+          </a:xfrm>
+          <a:prstGeom prst="rect">
+            <a:avLst/>
+          </a:prstGeom>
+          <a:solidFill>
+            <a:srgbClr val="FCB514"/>
+          </a:solidFill>
+          <a:ln>
+            <a:noFill/>
+          </a:ln>
+        </p:spPr>
+        <p:style>
+          <a:lnRef idx="1">
+            <a:schemeClr val="accent1"/>
+          </a:lnRef>
+          <a:fillRef idx="3">
+            <a:schemeClr val="accent1"/>
+          </a:fillRef>
+          <a:effectRef idx="2">
+            <a:schemeClr val="accent1"/>
+          </a:effectRef>
+          <a:fontRef idx="minor">
+            <a:schemeClr val="lt1"/>
+          </a:fontRef>
+        </p:style>
+        <p:txBody>
+          <a:bodyPr rtlCol="0" anchor="ctr"/>
+          <a:lstStyle/>
+          <a:p>
+            <a:pPr algn="ctr"/>
+            <a:endParaRPr/>
+          </a:p>
+        </p:txBody>
+      </p:sp>
+      <p:sp>
+        <p:nvSpPr>
+          <p:cNvPr id="8" name="TextBox 7"/>
+          <p:cNvSpPr txBox="1"/>
+          <p:nvPr/>
+        </p:nvSpPr>
+        <p:spPr>
+          <a:xfrm>
+            <a:off x="822960" y="1554480"/>
+            <a:ext cx="4882896" cy="4892040"/>
+          </a:xfrm>
+          <a:prstGeom prst="rect">
+            <a:avLst/>
+          </a:prstGeom>
+          <a:noFill/>
+        </p:spPr>
+        <p:txBody>
+          <a:bodyPr wrap="square">
+            <a:spAutoFit/>
+          </a:bodyPr>
+          <a:lstStyle/>
+          <a:p>
+            <a:pPr algn="l">
+              <a:spcBef>
+                <a:spcPts val="0"/>
+              </a:spcBef>
+              <a:spcAft>
+                <a:spcPts val="1200"/>
+              </a:spcAft>
+            </a:pPr>
+            <a:r>
+              <a:rPr sz="2200" b="1" i="0" dirty="0">
                 <a:solidFill>
                   <a:srgbClr val="FCB514"/>
                 </a:solidFill>
                 <a:latin typeface="Barlow Condensed"/>
               </a:rPr>
-              <a:t>170+</a:t>
-            </a:r>
-          </a:p>
-        </p:txBody>
-      </p:sp>
-      <p:sp>
-        <p:nvSpPr>
-          <p:cNvPr id="8" name="TextBox 7"/>
-          <p:cNvSpPr txBox="1"/>
-          <p:nvPr/>
-        </p:nvSpPr>
-        <p:spPr>
-          <a:xfrm>
-            <a:off x="822960" y="2971800"/>
-            <a:ext cx="2965704" cy="411480"/>
-          </a:xfrm>
-          <a:prstGeom prst="rect">
-            <a:avLst/>
-          </a:prstGeom>
-          <a:noFill/>
-        </p:spPr>
-        <p:txBody>
-          <a:bodyPr wrap="none">
-            <a:spAutoFit/>
-          </a:bodyPr>
-          <a:lstStyle/>
+              <a:t>Key Point</a:t>
+            </a:r>
+          </a:p>
           <a:p>
             <a:pPr algn="l">
               <a:spcBef>
@@ -5725,13 +8102,13 @@
               </a:spcAft>
             </a:pPr>
             <a:r>
-              <a:rPr sz="900" b="1" i="0">
+              <a:rPr sz="1400" b="0" i="0" dirty="0">
                 <a:solidFill>
-                  <a:srgbClr val="F7CF42"/>
+                  <a:srgbClr val="FFFFFF"/>
                 </a:solidFill>
                 <a:latin typeface="Inter"/>
               </a:rPr>
-              <a:t>IT SPECIALISTS</a:t>
+              <a:t>Supporting text or metric. Keep it short and impactful. Use this column for the key claim.</a:t>
             </a:r>
           </a:p>
         </p:txBody>
@@ -5744,8 +8121,8 @@
         </p:nvSpPr>
         <p:spPr>
           <a:xfrm>
-            <a:off x="822960" y="3520440"/>
-            <a:ext cx="2965704" cy="1463040"/>
+            <a:off x="6208776" y="1463040"/>
+            <a:ext cx="5431536" cy="5029200"/>
           </a:xfrm>
           <a:prstGeom prst="rect">
             <a:avLst/>
@@ -5759,6 +8136,105 @@
           <a:lstStyle/>
           <a:p>
             <a:pPr algn="l">
+              <a:spcBef>
+                <a:spcPts val="0"/>
+              </a:spcBef>
+              <a:spcAft>
+                <a:spcPts val="1000"/>
+              </a:spcAft>
+            </a:pPr>
+            <a:r>
+              <a:rPr sz="1600" b="1" i="0">
+                <a:solidFill>
+                  <a:srgbClr val="262B4B"/>
+                </a:solidFill>
+                <a:latin typeface="Inter"/>
+              </a:rPr>
+              <a:t>Detail heading</a:t>
+            </a:r>
+          </a:p>
+          <a:p>
+            <a:pPr algn="l">
+              <a:spcBef>
+                <a:spcPts val="600"/>
+              </a:spcBef>
+              <a:spcAft>
+                <a:spcPts val="200"/>
+              </a:spcAft>
+            </a:pPr>
+            <a:r>
+              <a:rPr sz="1300" b="0" i="0">
+                <a:solidFill>
+                  <a:srgbClr val="373652"/>
+                </a:solidFill>
+                <a:latin typeface="Inter"/>
+              </a:rPr>
+              <a:t>• Supporting detail one that elaborates on the key point.</a:t>
+            </a:r>
+          </a:p>
+          <a:p>
+            <a:pPr algn="l">
+              <a:spcBef>
+                <a:spcPts val="600"/>
+              </a:spcBef>
+              <a:spcAft>
+                <a:spcPts val="200"/>
+              </a:spcAft>
+            </a:pPr>
+            <a:r>
+              <a:rPr sz="1300" b="0" i="0">
+                <a:solidFill>
+                  <a:srgbClr val="373652"/>
+                </a:solidFill>
+                <a:latin typeface="Inter"/>
+              </a:rPr>
+              <a:t>• Supporting detail two with additional context or data.</a:t>
+            </a:r>
+          </a:p>
+          <a:p>
+            <a:pPr algn="l">
+              <a:spcBef>
+                <a:spcPts val="600"/>
+              </a:spcBef>
+              <a:spcAft>
+                <a:spcPts val="200"/>
+              </a:spcAft>
+            </a:pPr>
+            <a:r>
+              <a:rPr sz="1300" b="0" i="0">
+                <a:solidFill>
+                  <a:srgbClr val="373652"/>
+                </a:solidFill>
+                <a:latin typeface="Inter"/>
+              </a:rPr>
+              <a:t>• Supporting detail three closing the argument.</a:t>
+            </a:r>
+          </a:p>
+        </p:txBody>
+      </p:sp>
+      <p:sp>
+        <p:nvSpPr>
+          <p:cNvPr id="10" name="TextBox 9"/>
+          <p:cNvSpPr txBox="1"/>
+          <p:nvPr/>
+        </p:nvSpPr>
+        <p:spPr>
+          <a:xfrm>
+            <a:off x="11274552" y="6492240"/>
+            <a:ext cx="731520" cy="274320"/>
+          </a:xfrm>
+          <a:prstGeom prst="rect">
+            <a:avLst/>
+          </a:prstGeom>
+          <a:noFill/>
+        </p:spPr>
+        <p:txBody>
+          <a:bodyPr wrap="none">
+            <a:spAutoFit/>
+          </a:bodyPr>
+          <a:lstStyle/>
+          <a:p>
+            <a:pPr algn="r">
               <a:spcBef>
                 <a:spcPts val="0"/>
               </a:spcBef>
@@ -5767,1069 +8243,14 @@
               </a:spcAft>
             </a:pPr>
             <a:r>
-              <a:rPr sz="1200" b="0" i="0">
+              <a:rPr sz="900" b="0" i="0">
                 <a:solidFill>
-                  <a:srgbClr val="B0B8D4"/>
+                  <a:srgbClr val="808080"/>
                 </a:solidFill>
                 <a:latin typeface="Inter"/>
               </a:rPr>
-              <a:t>Dedicated technicians
-across all service areas</a:t>
-            </a:r>
-          </a:p>
-        </p:txBody>
-      </p:sp>
-      <p:sp>
-        <p:nvSpPr>
-          <p:cNvPr id="10" name="Rectangle 9"/>
-          <p:cNvSpPr/>
-          <p:nvPr/>
-        </p:nvSpPr>
-        <p:spPr>
-          <a:xfrm>
-            <a:off x="4337304" y="1280160"/>
-            <a:ext cx="3514344" cy="4114800"/>
-          </a:xfrm>
-          <a:prstGeom prst="rect">
-            <a:avLst/>
-          </a:prstGeom>
-          <a:solidFill>
-            <a:srgbClr val="373652"/>
-          </a:solidFill>
-          <a:ln>
-            <a:noFill/>
-          </a:ln>
-        </p:spPr>
-        <p:style>
-          <a:lnRef idx="1">
-            <a:schemeClr val="accent1"/>
-          </a:lnRef>
-          <a:fillRef idx="3">
-            <a:schemeClr val="accent1"/>
-          </a:fillRef>
-          <a:effectRef idx="2">
-            <a:schemeClr val="accent1"/>
-          </a:effectRef>
-          <a:fontRef idx="minor">
-            <a:schemeClr val="lt1"/>
-          </a:fontRef>
-        </p:style>
-        <p:txBody>
-          <a:bodyPr rtlCol="0" anchor="ctr"/>
-          <a:lstStyle/>
-          <a:p>
-            <a:pPr algn="ctr"/>
-          </a:p>
-        </p:txBody>
-      </p:sp>
-      <p:sp>
-        <p:nvSpPr>
-          <p:cNvPr id="11" name="Rectangle 10"/>
-          <p:cNvSpPr/>
-          <p:nvPr/>
-        </p:nvSpPr>
-        <p:spPr>
-          <a:xfrm>
-            <a:off x="4337304" y="1280160"/>
-            <a:ext cx="3514344" cy="50292"/>
-          </a:xfrm>
-          <a:prstGeom prst="rect">
-            <a:avLst/>
-          </a:prstGeom>
-          <a:solidFill>
-            <a:srgbClr val="FCB514"/>
-          </a:solidFill>
-          <a:ln>
-            <a:noFill/>
-          </a:ln>
-        </p:spPr>
-        <p:style>
-          <a:lnRef idx="1">
-            <a:schemeClr val="accent1"/>
-          </a:lnRef>
-          <a:fillRef idx="3">
-            <a:schemeClr val="accent1"/>
-          </a:fillRef>
-          <a:effectRef idx="2">
-            <a:schemeClr val="accent1"/>
-          </a:effectRef>
-          <a:fontRef idx="minor">
-            <a:schemeClr val="lt1"/>
-          </a:fontRef>
-        </p:style>
-        <p:txBody>
-          <a:bodyPr rtlCol="0" anchor="ctr"/>
-          <a:lstStyle/>
-          <a:p>
-            <a:pPr algn="ctr"/>
-          </a:p>
-        </p:txBody>
-      </p:sp>
-      <p:sp>
-        <p:nvSpPr>
-          <p:cNvPr id="12" name="TextBox 11"/>
-          <p:cNvSpPr txBox="1"/>
-          <p:nvPr/>
-        </p:nvSpPr>
-        <p:spPr>
-          <a:xfrm>
-            <a:off x="4611624" y="1645920"/>
-            <a:ext cx="2965704" cy="1280160"/>
-          </a:xfrm>
-          <a:prstGeom prst="rect">
-            <a:avLst/>
-          </a:prstGeom>
-          <a:noFill/>
-        </p:spPr>
-        <p:txBody>
-          <a:bodyPr wrap="none">
-            <a:spAutoFit/>
-          </a:bodyPr>
-          <a:lstStyle/>
-          <a:p>
-            <a:pPr algn="l">
-              <a:spcBef>
-                <a:spcPts val="0"/>
-              </a:spcBef>
-              <a:spcAft>
-                <a:spcPts val="0"/>
-              </a:spcAft>
-            </a:pPr>
-            <a:r>
-              <a:rPr sz="5200" b="1" i="0">
-                <a:solidFill>
-                  <a:srgbClr val="FCB514"/>
-                </a:solidFill>
-                <a:latin typeface="Barlow Condensed"/>
-              </a:rPr>
-              <a:t>1,200</a:t>
-            </a:r>
-          </a:p>
-        </p:txBody>
-      </p:sp>
-      <p:sp>
-        <p:nvSpPr>
-          <p:cNvPr id="13" name="TextBox 12"/>
-          <p:cNvSpPr txBox="1"/>
-          <p:nvPr/>
-        </p:nvSpPr>
-        <p:spPr>
-          <a:xfrm>
-            <a:off x="4611624" y="2971800"/>
-            <a:ext cx="2965704" cy="411480"/>
-          </a:xfrm>
-          <a:prstGeom prst="rect">
-            <a:avLst/>
-          </a:prstGeom>
-          <a:noFill/>
-        </p:spPr>
-        <p:txBody>
-          <a:bodyPr wrap="none">
-            <a:spAutoFit/>
-          </a:bodyPr>
-          <a:lstStyle/>
-          <a:p>
-            <a:pPr algn="l">
-              <a:spcBef>
-                <a:spcPts val="0"/>
-              </a:spcBef>
-              <a:spcAft>
-                <a:spcPts val="0"/>
-              </a:spcAft>
-            </a:pPr>
-            <a:r>
-              <a:rPr sz="900" b="1" i="0">
-                <a:solidFill>
-                  <a:srgbClr val="F7CF42"/>
-                </a:solidFill>
-                <a:latin typeface="Inter"/>
-              </a:rPr>
-              <a:t>CUSTOMERS SERVED</a:t>
-            </a:r>
-          </a:p>
-        </p:txBody>
-      </p:sp>
-      <p:sp>
-        <p:nvSpPr>
-          <p:cNvPr id="14" name="TextBox 13"/>
-          <p:cNvSpPr txBox="1"/>
-          <p:nvPr/>
-        </p:nvSpPr>
-        <p:spPr>
-          <a:xfrm>
-            <a:off x="4611624" y="3520440"/>
-            <a:ext cx="2965704" cy="1463040"/>
-          </a:xfrm>
-          <a:prstGeom prst="rect">
-            <a:avLst/>
-          </a:prstGeom>
-          <a:noFill/>
-        </p:spPr>
-        <p:txBody>
-          <a:bodyPr wrap="square">
-            <a:spAutoFit/>
-          </a:bodyPr>
-          <a:lstStyle/>
-          <a:p>
-            <a:pPr algn="l">
-              <a:spcBef>
-                <a:spcPts val="0"/>
-              </a:spcBef>
-              <a:spcAft>
-                <a:spcPts val="0"/>
-              </a:spcAft>
-            </a:pPr>
-            <a:r>
-              <a:rPr sz="1200" b="0" i="0">
-                <a:solidFill>
-                  <a:srgbClr val="B0B8D4"/>
-                </a:solidFill>
-                <a:latin typeface="Inter"/>
-              </a:rPr>
-              <a:t>Spanning 27 industries
-and counting</a:t>
-            </a:r>
-          </a:p>
-        </p:txBody>
-      </p:sp>
-      <p:sp>
-        <p:nvSpPr>
-          <p:cNvPr id="15" name="Rectangle 14"/>
-          <p:cNvSpPr/>
-          <p:nvPr/>
-        </p:nvSpPr>
-        <p:spPr>
-          <a:xfrm>
-            <a:off x="8125968" y="1280160"/>
-            <a:ext cx="3514344" cy="4114800"/>
-          </a:xfrm>
-          <a:prstGeom prst="rect">
-            <a:avLst/>
-          </a:prstGeom>
-          <a:solidFill>
-            <a:srgbClr val="373652"/>
-          </a:solidFill>
-          <a:ln>
-            <a:noFill/>
-          </a:ln>
-        </p:spPr>
-        <p:style>
-          <a:lnRef idx="1">
-            <a:schemeClr val="accent1"/>
-          </a:lnRef>
-          <a:fillRef idx="3">
-            <a:schemeClr val="accent1"/>
-          </a:fillRef>
-          <a:effectRef idx="2">
-            <a:schemeClr val="accent1"/>
-          </a:effectRef>
-          <a:fontRef idx="minor">
-            <a:schemeClr val="lt1"/>
-          </a:fontRef>
-        </p:style>
-        <p:txBody>
-          <a:bodyPr rtlCol="0" anchor="ctr"/>
-          <a:lstStyle/>
-          <a:p>
-            <a:pPr algn="ctr"/>
-          </a:p>
-        </p:txBody>
-      </p:sp>
-      <p:sp>
-        <p:nvSpPr>
-          <p:cNvPr id="16" name="Rectangle 15"/>
-          <p:cNvSpPr/>
-          <p:nvPr/>
-        </p:nvSpPr>
-        <p:spPr>
-          <a:xfrm>
-            <a:off x="8125968" y="1280160"/>
-            <a:ext cx="3514344" cy="50292"/>
-          </a:xfrm>
-          <a:prstGeom prst="rect">
-            <a:avLst/>
-          </a:prstGeom>
-          <a:solidFill>
-            <a:srgbClr val="FCB514"/>
-          </a:solidFill>
-          <a:ln>
-            <a:noFill/>
-          </a:ln>
-        </p:spPr>
-        <p:style>
-          <a:lnRef idx="1">
-            <a:schemeClr val="accent1"/>
-          </a:lnRef>
-          <a:fillRef idx="3">
-            <a:schemeClr val="accent1"/>
-          </a:fillRef>
-          <a:effectRef idx="2">
-            <a:schemeClr val="accent1"/>
-          </a:effectRef>
-          <a:fontRef idx="minor">
-            <a:schemeClr val="lt1"/>
-          </a:fontRef>
-        </p:style>
-        <p:txBody>
-          <a:bodyPr rtlCol="0" anchor="ctr"/>
-          <a:lstStyle/>
-          <a:p>
-            <a:pPr algn="ctr"/>
-          </a:p>
-        </p:txBody>
-      </p:sp>
-      <p:sp>
-        <p:nvSpPr>
-          <p:cNvPr id="17" name="TextBox 16"/>
-          <p:cNvSpPr txBox="1"/>
-          <p:nvPr/>
-        </p:nvSpPr>
-        <p:spPr>
-          <a:xfrm>
-            <a:off x="8400288" y="1645920"/>
-            <a:ext cx="2965704" cy="1280160"/>
-          </a:xfrm>
-          <a:prstGeom prst="rect">
-            <a:avLst/>
-          </a:prstGeom>
-          <a:noFill/>
-        </p:spPr>
-        <p:txBody>
-          <a:bodyPr wrap="none">
-            <a:spAutoFit/>
-          </a:bodyPr>
-          <a:lstStyle/>
-          <a:p>
-            <a:pPr algn="l">
-              <a:spcBef>
-                <a:spcPts val="0"/>
-              </a:spcBef>
-              <a:spcAft>
-                <a:spcPts val="0"/>
-              </a:spcAft>
-            </a:pPr>
-            <a:r>
-              <a:rPr sz="5200" b="1" i="0">
-                <a:solidFill>
-                  <a:srgbClr val="FCB514"/>
-                </a:solidFill>
-                <a:latin typeface="Barlow Condensed"/>
-              </a:rPr>
-              <a:t>4.68 / 5</a:t>
-            </a:r>
-          </a:p>
-        </p:txBody>
-      </p:sp>
-      <p:sp>
-        <p:nvSpPr>
-          <p:cNvPr id="18" name="TextBox 17"/>
-          <p:cNvSpPr txBox="1"/>
-          <p:nvPr/>
-        </p:nvSpPr>
-        <p:spPr>
-          <a:xfrm>
-            <a:off x="8400288" y="2971800"/>
-            <a:ext cx="2965704" cy="411480"/>
-          </a:xfrm>
-          <a:prstGeom prst="rect">
-            <a:avLst/>
-          </a:prstGeom>
-          <a:noFill/>
-        </p:spPr>
-        <p:txBody>
-          <a:bodyPr wrap="none">
-            <a:spAutoFit/>
-          </a:bodyPr>
-          <a:lstStyle/>
-          <a:p>
-            <a:pPr algn="l">
-              <a:spcBef>
-                <a:spcPts val="0"/>
-              </a:spcBef>
-              <a:spcAft>
-                <a:spcPts val="0"/>
-              </a:spcAft>
-            </a:pPr>
-            <a:r>
-              <a:rPr sz="900" b="1" i="0">
-                <a:solidFill>
-                  <a:srgbClr val="F7CF42"/>
-                </a:solidFill>
-                <a:latin typeface="Inter"/>
-              </a:rPr>
-              <a:t>SATISFACTION SCORE</a:t>
-            </a:r>
-          </a:p>
-        </p:txBody>
-      </p:sp>
-      <p:sp>
-        <p:nvSpPr>
-          <p:cNvPr id="19" name="TextBox 18"/>
-          <p:cNvSpPr txBox="1"/>
-          <p:nvPr/>
-        </p:nvSpPr>
-        <p:spPr>
-          <a:xfrm>
-            <a:off x="8400288" y="3520440"/>
-            <a:ext cx="2965704" cy="1463040"/>
-          </a:xfrm>
-          <a:prstGeom prst="rect">
-            <a:avLst/>
-          </a:prstGeom>
-          <a:noFill/>
-        </p:spPr>
-        <p:txBody>
-          <a:bodyPr wrap="square">
-            <a:spAutoFit/>
-          </a:bodyPr>
-          <a:lstStyle/>
-          <a:p>
-            <a:pPr algn="l">
-              <a:spcBef>
-                <a:spcPts val="0"/>
-              </a:spcBef>
-              <a:spcAft>
-                <a:spcPts val="0"/>
-              </a:spcAft>
-            </a:pPr>
-            <a:r>
-              <a:rPr sz="1200" b="0" i="0">
-                <a:solidFill>
-                  <a:srgbClr val="B0B8D4"/>
-                </a:solidFill>
-                <a:latin typeface="Inter"/>
-              </a:rPr>
-              <a:t>Based on last 12 months
-of service feedback</a:t>
-            </a:r>
-          </a:p>
-        </p:txBody>
-      </p:sp>
-      <p:sp>
-        <p:nvSpPr>
-          <p:cNvPr id="20" name="Rectangle 19"/>
-          <p:cNvSpPr/>
-          <p:nvPr/>
-        </p:nvSpPr>
-        <p:spPr>
-          <a:xfrm>
-            <a:off x="0" y="6793992"/>
-            <a:ext cx="12188952" cy="64008"/>
-          </a:xfrm>
-          <a:prstGeom prst="rect">
-            <a:avLst/>
-          </a:prstGeom>
-          <a:solidFill>
-            <a:srgbClr val="FCB514"/>
-          </a:solidFill>
-          <a:ln>
-            <a:noFill/>
-          </a:ln>
-        </p:spPr>
-        <p:style>
-          <a:lnRef idx="1">
-            <a:schemeClr val="accent1"/>
-          </a:lnRef>
-          <a:fillRef idx="3">
-            <a:schemeClr val="accent1"/>
-          </a:fillRef>
-          <a:effectRef idx="2">
-            <a:schemeClr val="accent1"/>
-          </a:effectRef>
-          <a:fontRef idx="minor">
-            <a:schemeClr val="lt1"/>
-          </a:fontRef>
-        </p:style>
-        <p:txBody>
-          <a:bodyPr rtlCol="0" anchor="ctr"/>
-          <a:lstStyle/>
-          <a:p>
-            <a:pPr algn="ctr"/>
-          </a:p>
-        </p:txBody>
-      </p:sp>
-    </p:spTree>
-  </p:cSld>
-  <p:clrMapOvr>
-    <a:masterClrMapping/>
-  </p:clrMapOvr>
-</p:sld>
-</file>
-
-<file path=ppt/slides/slide7.xml><?xml version="1.0" encoding="utf-8"?>
-<p:sld xmlns:a="http://schemas.openxmlformats.org/drawingml/2006/main" xmlns:p="http://schemas.openxmlformats.org/presentationml/2006/main" xmlns:r="http://schemas.openxmlformats.org/officeDocument/2006/relationships">
-  <p:cSld>
-    <p:spTree>
-      <p:nvGrpSpPr>
-        <p:cNvPr id="1" name=""/>
-        <p:cNvGrpSpPr/>
-        <p:nvPr/>
-      </p:nvGrpSpPr>
-      <p:grpSpPr/>
-      <p:sp>
-        <p:nvSpPr>
-          <p:cNvPr id="2" name="Rectangle 1"/>
-          <p:cNvSpPr/>
-          <p:nvPr/>
-        </p:nvSpPr>
-        <p:spPr>
-          <a:xfrm>
-            <a:off x="0" y="0"/>
-            <a:ext cx="12188952" cy="6858000"/>
-          </a:xfrm>
-          <a:prstGeom prst="rect">
-            <a:avLst/>
-          </a:prstGeom>
-          <a:solidFill>
-            <a:srgbClr val="262B4B"/>
-          </a:solidFill>
-          <a:ln>
-            <a:noFill/>
-          </a:ln>
-        </p:spPr>
-        <p:style>
-          <a:lnRef idx="1">
-            <a:schemeClr val="accent1"/>
-          </a:lnRef>
-          <a:fillRef idx="3">
-            <a:schemeClr val="accent1"/>
-          </a:fillRef>
-          <a:effectRef idx="2">
-            <a:schemeClr val="accent1"/>
-          </a:effectRef>
-          <a:fontRef idx="minor">
-            <a:schemeClr val="lt1"/>
-          </a:fontRef>
-        </p:style>
-        <p:txBody>
-          <a:bodyPr rtlCol="0" anchor="ctr"/>
-          <a:lstStyle/>
-          <a:p>
-            <a:pPr algn="ctr"/>
-          </a:p>
-        </p:txBody>
-      </p:sp>
-      <p:sp>
-        <p:nvSpPr>
-          <p:cNvPr id="3" name="Rectangle 2"/>
-          <p:cNvSpPr/>
-          <p:nvPr/>
-        </p:nvSpPr>
-        <p:spPr>
-          <a:xfrm>
-            <a:off x="0" y="0"/>
-            <a:ext cx="73152" cy="6858000"/>
-          </a:xfrm>
-          <a:prstGeom prst="rect">
-            <a:avLst/>
-          </a:prstGeom>
-          <a:solidFill>
-            <a:srgbClr val="FCB514"/>
-          </a:solidFill>
-          <a:ln>
-            <a:noFill/>
-          </a:ln>
-        </p:spPr>
-        <p:style>
-          <a:lnRef idx="1">
-            <a:schemeClr val="accent1"/>
-          </a:lnRef>
-          <a:fillRef idx="3">
-            <a:schemeClr val="accent1"/>
-          </a:fillRef>
-          <a:effectRef idx="2">
-            <a:schemeClr val="accent1"/>
-          </a:effectRef>
-          <a:fontRef idx="minor">
-            <a:schemeClr val="lt1"/>
-          </a:fontRef>
-        </p:style>
-        <p:txBody>
-          <a:bodyPr rtlCol="0" anchor="ctr"/>
-          <a:lstStyle/>
-          <a:p>
-            <a:pPr algn="ctr"/>
-          </a:p>
-        </p:txBody>
-      </p:sp>
-      <p:sp>
-        <p:nvSpPr>
-          <p:cNvPr id="4" name="TextBox 3"/>
-          <p:cNvSpPr txBox="1"/>
-          <p:nvPr/>
-        </p:nvSpPr>
-        <p:spPr>
-          <a:xfrm>
-            <a:off x="1097280" y="1097280"/>
-            <a:ext cx="1828800" cy="1828800"/>
-          </a:xfrm>
-          <a:prstGeom prst="rect">
-            <a:avLst/>
-          </a:prstGeom>
-          <a:noFill/>
-        </p:spPr>
-        <p:txBody>
-          <a:bodyPr wrap="none">
-            <a:spAutoFit/>
-          </a:bodyPr>
-          <a:lstStyle/>
-          <a:p>
-            <a:pPr algn="l">
-              <a:spcBef>
-                <a:spcPts val="0"/>
-              </a:spcBef>
-              <a:spcAft>
-                <a:spcPts val="0"/>
-              </a:spcAft>
-            </a:pPr>
-            <a:r>
-              <a:rPr sz="12000" b="1" i="0">
-                <a:solidFill>
-                  <a:srgbClr val="FCB514"/>
-                </a:solidFill>
-                <a:latin typeface="Barlow Condensed"/>
-              </a:rPr>
-              <a:t>“</a:t>
-            </a:r>
-          </a:p>
-        </p:txBody>
-      </p:sp>
-      <p:sp>
-        <p:nvSpPr>
-          <p:cNvPr id="5" name="TextBox 4"/>
-          <p:cNvSpPr txBox="1"/>
-          <p:nvPr/>
-        </p:nvSpPr>
-        <p:spPr>
-          <a:xfrm>
-            <a:off x="1280160" y="2011680"/>
-            <a:ext cx="9601200" cy="2743200"/>
-          </a:xfrm>
-          <a:prstGeom prst="rect">
-            <a:avLst/>
-          </a:prstGeom>
-          <a:noFill/>
-        </p:spPr>
-        <p:txBody>
-          <a:bodyPr wrap="square">
-            <a:spAutoFit/>
-          </a:bodyPr>
-          <a:lstStyle/>
-          <a:p>
-            <a:pPr algn="l">
-              <a:spcBef>
-                <a:spcPts val="0"/>
-              </a:spcBef>
-              <a:spcAft>
-                <a:spcPts val="1600"/>
-              </a:spcAft>
-            </a:pPr>
-            <a:r>
-              <a:rPr sz="4000" b="1" i="0">
-                <a:solidFill>
-                  <a:srgbClr val="FFFFFF"/>
-                </a:solidFill>
-                <a:latin typeface="Barlow Condensed"/>
-              </a:rPr>
-              <a:t>Die Extrameile ist unser Standard.</a:t>
-            </a:r>
-          </a:p>
-          <a:p>
-            <a:pPr algn="l">
-              <a:spcBef>
-                <a:spcPts val="0"/>
-              </a:spcBef>
-              <a:spcAft>
-                <a:spcPts val="0"/>
-              </a:spcAft>
-            </a:pPr>
-            <a:r>
-              <a:rPr sz="1400" b="0" i="0">
-                <a:solidFill>
-                  <a:srgbClr val="9098B8"/>
-                </a:solidFill>
-                <a:latin typeface="Inter"/>
-              </a:rPr>
-              <a:t>— techbold</a:t>
-            </a:r>
-          </a:p>
-        </p:txBody>
-      </p:sp>
-      <p:sp>
-        <p:nvSpPr>
-          <p:cNvPr id="6" name="Rectangle 5"/>
-          <p:cNvSpPr/>
-          <p:nvPr/>
-        </p:nvSpPr>
-        <p:spPr>
-          <a:xfrm>
-            <a:off x="0" y="6793992"/>
-            <a:ext cx="12188952" cy="64008"/>
-          </a:xfrm>
-          <a:prstGeom prst="rect">
-            <a:avLst/>
-          </a:prstGeom>
-          <a:solidFill>
-            <a:srgbClr val="FCB514"/>
-          </a:solidFill>
-          <a:ln>
-            <a:noFill/>
-          </a:ln>
-        </p:spPr>
-        <p:style>
-          <a:lnRef idx="1">
-            <a:schemeClr val="accent1"/>
-          </a:lnRef>
-          <a:fillRef idx="3">
-            <a:schemeClr val="accent1"/>
-          </a:fillRef>
-          <a:effectRef idx="2">
-            <a:schemeClr val="accent1"/>
-          </a:effectRef>
-          <a:fontRef idx="minor">
-            <a:schemeClr val="lt1"/>
-          </a:fontRef>
-        </p:style>
-        <p:txBody>
-          <a:bodyPr rtlCol="0" anchor="ctr"/>
-          <a:lstStyle/>
-          <a:p>
-            <a:pPr algn="ctr"/>
-          </a:p>
-        </p:txBody>
-      </p:sp>
-    </p:spTree>
-  </p:cSld>
-  <p:clrMapOvr>
-    <a:masterClrMapping/>
-  </p:clrMapOvr>
-</p:sld>
-</file>
-
-<file path=ppt/slides/slide8.xml><?xml version="1.0" encoding="utf-8"?>
-<p:sld xmlns:a="http://schemas.openxmlformats.org/drawingml/2006/main" xmlns:p="http://schemas.openxmlformats.org/presentationml/2006/main" xmlns:r="http://schemas.openxmlformats.org/officeDocument/2006/relationships">
-  <p:cSld>
-    <p:spTree>
-      <p:nvGrpSpPr>
-        <p:cNvPr id="1" name=""/>
-        <p:cNvGrpSpPr/>
-        <p:nvPr/>
-      </p:nvGrpSpPr>
-      <p:grpSpPr/>
-      <p:sp>
-        <p:nvSpPr>
-          <p:cNvPr id="2" name="Rectangle 1"/>
-          <p:cNvSpPr/>
-          <p:nvPr/>
-        </p:nvSpPr>
-        <p:spPr>
-          <a:xfrm>
-            <a:off x="0" y="0"/>
-            <a:ext cx="12188952" cy="6858000"/>
-          </a:xfrm>
-          <a:prstGeom prst="rect">
-            <a:avLst/>
-          </a:prstGeom>
-          <a:solidFill>
-            <a:srgbClr val="262B4B"/>
-          </a:solidFill>
-          <a:ln>
-            <a:noFill/>
-          </a:ln>
-        </p:spPr>
-        <p:style>
-          <a:lnRef idx="1">
-            <a:schemeClr val="accent1"/>
-          </a:lnRef>
-          <a:fillRef idx="3">
-            <a:schemeClr val="accent1"/>
-          </a:fillRef>
-          <a:effectRef idx="2">
-            <a:schemeClr val="accent1"/>
-          </a:effectRef>
-          <a:fontRef idx="minor">
-            <a:schemeClr val="lt1"/>
-          </a:fontRef>
-        </p:style>
-        <p:txBody>
-          <a:bodyPr rtlCol="0" anchor="ctr"/>
-          <a:lstStyle/>
-          <a:p>
-            <a:pPr algn="ctr"/>
-          </a:p>
-        </p:txBody>
-      </p:sp>
-      <p:sp>
-        <p:nvSpPr>
-          <p:cNvPr id="3" name="Rectangle 2"/>
-          <p:cNvSpPr/>
-          <p:nvPr/>
-        </p:nvSpPr>
-        <p:spPr>
-          <a:xfrm>
-            <a:off x="0" y="0"/>
-            <a:ext cx="12188952" cy="64008"/>
-          </a:xfrm>
-          <a:prstGeom prst="rect">
-            <a:avLst/>
-          </a:prstGeom>
-          <a:solidFill>
-            <a:srgbClr val="FCB514"/>
-          </a:solidFill>
-          <a:ln>
-            <a:noFill/>
-          </a:ln>
-        </p:spPr>
-        <p:style>
-          <a:lnRef idx="1">
-            <a:schemeClr val="accent1"/>
-          </a:lnRef>
-          <a:fillRef idx="3">
-            <a:schemeClr val="accent1"/>
-          </a:fillRef>
-          <a:effectRef idx="2">
-            <a:schemeClr val="accent1"/>
-          </a:effectRef>
-          <a:fontRef idx="minor">
-            <a:schemeClr val="lt1"/>
-          </a:fontRef>
-        </p:style>
-        <p:txBody>
-          <a:bodyPr rtlCol="0" anchor="ctr"/>
-          <a:lstStyle/>
-          <a:p>
-            <a:pPr algn="ctr"/>
-          </a:p>
-        </p:txBody>
-      </p:sp>
-      <p:sp>
-        <p:nvSpPr>
-          <p:cNvPr id="4" name="TextBox 3"/>
-          <p:cNvSpPr txBox="1"/>
-          <p:nvPr/>
-        </p:nvSpPr>
-        <p:spPr>
-          <a:xfrm>
-            <a:off x="548640" y="1645920"/>
-            <a:ext cx="7315200" cy="1828800"/>
-          </a:xfrm>
-          <a:prstGeom prst="rect">
-            <a:avLst/>
-          </a:prstGeom>
-          <a:noFill/>
-        </p:spPr>
-        <p:txBody>
-          <a:bodyPr wrap="none">
-            <a:spAutoFit/>
-          </a:bodyPr>
-          <a:lstStyle/>
-          <a:p>
-            <a:pPr algn="l">
-              <a:spcBef>
-                <a:spcPts val="0"/>
-              </a:spcBef>
-              <a:spcAft>
-                <a:spcPts val="0"/>
-              </a:spcAft>
-            </a:pPr>
-            <a:r>
-              <a:rPr sz="8000" b="1" i="0">
-                <a:solidFill>
-                  <a:srgbClr val="FFFFFF"/>
-                </a:solidFill>
-                <a:latin typeface="Barlow Condensed"/>
-              </a:rPr>
-              <a:t>techbold</a:t>
-            </a:r>
-          </a:p>
-        </p:txBody>
-      </p:sp>
-      <p:sp>
-        <p:nvSpPr>
-          <p:cNvPr id="5" name="Rectangle 4"/>
-          <p:cNvSpPr/>
-          <p:nvPr/>
-        </p:nvSpPr>
-        <p:spPr>
-          <a:xfrm>
-            <a:off x="548640" y="3749039"/>
-            <a:ext cx="5029200" cy="64008"/>
-          </a:xfrm>
-          <a:prstGeom prst="rect">
-            <a:avLst/>
-          </a:prstGeom>
-          <a:solidFill>
-            <a:srgbClr val="FCB514"/>
-          </a:solidFill>
-          <a:ln>
-            <a:noFill/>
-          </a:ln>
-        </p:spPr>
-        <p:style>
-          <a:lnRef idx="1">
-            <a:schemeClr val="accent1"/>
-          </a:lnRef>
-          <a:fillRef idx="3">
-            <a:schemeClr val="accent1"/>
-          </a:fillRef>
-          <a:effectRef idx="2">
-            <a:schemeClr val="accent1"/>
-          </a:effectRef>
-          <a:fontRef idx="minor">
-            <a:schemeClr val="lt1"/>
-          </a:fontRef>
-        </p:style>
-        <p:txBody>
-          <a:bodyPr rtlCol="0" anchor="ctr"/>
-          <a:lstStyle/>
-          <a:p>
-            <a:pPr algn="ctr"/>
-          </a:p>
-        </p:txBody>
-      </p:sp>
-      <p:sp>
-        <p:nvSpPr>
-          <p:cNvPr id="6" name="TextBox 5"/>
-          <p:cNvSpPr txBox="1"/>
-          <p:nvPr/>
-        </p:nvSpPr>
-        <p:spPr>
-          <a:xfrm>
-            <a:off x="548640" y="3977639"/>
-            <a:ext cx="7315200" cy="457200"/>
-          </a:xfrm>
-          <a:prstGeom prst="rect">
-            <a:avLst/>
-          </a:prstGeom>
-          <a:noFill/>
-        </p:spPr>
-        <p:txBody>
-          <a:bodyPr wrap="none">
-            <a:spAutoFit/>
-          </a:bodyPr>
-          <a:lstStyle/>
-          <a:p>
-            <a:pPr algn="l">
-              <a:spcBef>
-                <a:spcPts val="0"/>
-              </a:spcBef>
-              <a:spcAft>
-                <a:spcPts val="0"/>
-              </a:spcAft>
-            </a:pPr>
-            <a:r>
-              <a:rPr sz="1600" b="0" i="1">
-                <a:solidFill>
-                  <a:srgbClr val="9098B8"/>
-                </a:solidFill>
-                <a:latin typeface="Inter"/>
-              </a:rPr>
-              <a:t>die Extrameile ist unser Standard</a:t>
-            </a:r>
-          </a:p>
-        </p:txBody>
-      </p:sp>
-      <p:sp>
-        <p:nvSpPr>
-          <p:cNvPr id="7" name="TextBox 6"/>
-          <p:cNvSpPr txBox="1"/>
-          <p:nvPr/>
-        </p:nvSpPr>
-        <p:spPr>
-          <a:xfrm>
-            <a:off x="548640" y="4846320"/>
-            <a:ext cx="5486400" cy="1097280"/>
-          </a:xfrm>
-          <a:prstGeom prst="rect">
-            <a:avLst/>
-          </a:prstGeom>
-          <a:noFill/>
-        </p:spPr>
-        <p:txBody>
-          <a:bodyPr wrap="none">
-            <a:spAutoFit/>
-          </a:bodyPr>
-          <a:lstStyle/>
-          <a:p>
-            <a:pPr algn="l">
-              <a:spcBef>
-                <a:spcPts val="0"/>
-              </a:spcBef>
-              <a:spcAft>
-                <a:spcPts val="400"/>
-              </a:spcAft>
-            </a:pPr>
-            <a:r>
-              <a:rPr sz="1400" b="0" i="0">
-                <a:solidFill>
-                  <a:srgbClr val="B0B8D4"/>
-                </a:solidFill>
-                <a:latin typeface="Inter"/>
-              </a:rPr>
-              <a:t>www.techbold.at</a:t>
-            </a:r>
-          </a:p>
-          <a:p>
-            <a:pPr algn="l">
-              <a:spcBef>
-                <a:spcPts val="0"/>
-              </a:spcBef>
-              <a:spcAft>
-                <a:spcPts val="400"/>
-              </a:spcAft>
-            </a:pPr>
-            <a:r>
-              <a:rPr sz="1300" b="0" i="0">
-                <a:solidFill>
-                  <a:srgbClr val="B0B8D4"/>
-                </a:solidFill>
-                <a:latin typeface="Inter"/>
-              </a:rPr>
-              <a:t>+43 59 555</a:t>
-            </a:r>
-          </a:p>
-        </p:txBody>
-      </p:sp>
-      <p:sp>
-        <p:nvSpPr>
-          <p:cNvPr id="8" name="Rectangle 7"/>
-          <p:cNvSpPr/>
-          <p:nvPr/>
-        </p:nvSpPr>
-        <p:spPr>
-          <a:xfrm>
-            <a:off x="0" y="6793992"/>
-            <a:ext cx="12188952" cy="64008"/>
-          </a:xfrm>
-          <a:prstGeom prst="rect">
-            <a:avLst/>
-          </a:prstGeom>
-          <a:solidFill>
-            <a:srgbClr val="FCB514"/>
-          </a:solidFill>
-          <a:ln>
-            <a:noFill/>
-          </a:ln>
-        </p:spPr>
-        <p:style>
-          <a:lnRef idx="1">
-            <a:schemeClr val="accent1"/>
-          </a:lnRef>
-          <a:fillRef idx="3">
-            <a:schemeClr val="accent1"/>
-          </a:fillRef>
-          <a:effectRef idx="2">
-            <a:schemeClr val="accent1"/>
-          </a:effectRef>
-          <a:fontRef idx="minor">
-            <a:schemeClr val="lt1"/>
-          </a:fontRef>
-        </p:style>
-        <p:txBody>
-          <a:bodyPr rtlCol="0" anchor="ctr"/>
-          <a:lstStyle/>
-          <a:p>
-            <a:pPr algn="ctr"/>
+              <a:t>02</a:t>
+            </a:r>
           </a:p>
         </p:txBody>
       </p:sp>
@@ -7159,4 +8580,319 @@
   </a:objectDefaults>
   <a:extraClrSchemeLst/>
 </a:theme>
+</file>
+
+<file path=ppt/theme/theme2.xml><?xml version="1.0" encoding="utf-8"?>
+<a:theme xmlns:a="http://schemas.openxmlformats.org/drawingml/2006/main" name="Office Theme">
+  <a:themeElements>
+    <a:clrScheme name="Office">
+      <a:dk1>
+        <a:sysClr val="windowText" lastClr="000000"/>
+      </a:dk1>
+      <a:lt1>
+        <a:sysClr val="window" lastClr="FFFFFF"/>
+      </a:lt1>
+      <a:dk2>
+        <a:srgbClr val="0E2841"/>
+      </a:dk2>
+      <a:lt2>
+        <a:srgbClr val="E8E8E8"/>
+      </a:lt2>
+      <a:accent1>
+        <a:srgbClr val="156082"/>
+      </a:accent1>
+      <a:accent2>
+        <a:srgbClr val="E97132"/>
+      </a:accent2>
+      <a:accent3>
+        <a:srgbClr val="196B24"/>
+      </a:accent3>
+      <a:accent4>
+        <a:srgbClr val="0F9ED5"/>
+      </a:accent4>
+      <a:accent5>
+        <a:srgbClr val="A02B93"/>
+      </a:accent5>
+      <a:accent6>
+        <a:srgbClr val="4EA72E"/>
+      </a:accent6>
+      <a:hlink>
+        <a:srgbClr val="467886"/>
+      </a:hlink>
+      <a:folHlink>
+        <a:srgbClr val="96607D"/>
+      </a:folHlink>
+    </a:clrScheme>
+    <a:fontScheme name="Office">
+      <a:majorFont>
+        <a:latin typeface="Aptos Display" panose="02110004020202020204"/>
+        <a:ea typeface=""/>
+        <a:cs typeface=""/>
+        <a:font script="Jpan" typeface="游ゴシック Light"/>
+        <a:font script="Hang" typeface="맑은 고딕"/>
+        <a:font script="Hans" typeface="等线 Light"/>
+        <a:font script="Hant" typeface="新細明體"/>
+        <a:font script="Arab" typeface="Times New Roman"/>
+        <a:font script="Hebr" typeface="Times New Roman"/>
+        <a:font script="Thai" typeface="Angsana New"/>
+        <a:font script="Ethi" typeface="Nyala"/>
+        <a:font script="Beng" typeface="Vrinda"/>
+        <a:font script="Gujr" typeface="Shruti"/>
+        <a:font script="Khmr" typeface="MoolBoran"/>
+        <a:font script="Knda" typeface="Tunga"/>
+        <a:font script="Guru" typeface="Raavi"/>
+        <a:font script="Cans" typeface="Euphemia"/>
+        <a:font script="Cher" typeface="Plantagenet Cherokee"/>
+        <a:font script="Yiii" typeface="Microsoft Yi Baiti"/>
+        <a:font script="Tibt" typeface="Microsoft Himalaya"/>
+        <a:font script="Thaa" typeface="MV Boli"/>
+        <a:font script="Deva" typeface="Mangal"/>
+        <a:font script="Telu" typeface="Gautami"/>
+        <a:font script="Taml" typeface="Latha"/>
+        <a:font script="Syrc" typeface="Estrangelo Edessa"/>
+        <a:font script="Orya" typeface="Kalinga"/>
+        <a:font script="Mlym" typeface="Kartika"/>
+        <a:font script="Laoo" typeface="DokChampa"/>
+        <a:font script="Sinh" typeface="Iskoola Pota"/>
+        <a:font script="Mong" typeface="Mongolian Baiti"/>
+        <a:font script="Viet" typeface="Times New Roman"/>
+        <a:font script="Uigh" typeface="Microsoft Uighur"/>
+        <a:font script="Geor" typeface="Sylfaen"/>
+        <a:font script="Armn" typeface="Arial"/>
+        <a:font script="Bugi" typeface="Leelawadee UI"/>
+        <a:font script="Bopo" typeface="Microsoft JhengHei"/>
+        <a:font script="Java" typeface="Javanese Text"/>
+        <a:font script="Lisu" typeface="Segoe UI"/>
+        <a:font script="Mymr" typeface="Myanmar Text"/>
+        <a:font script="Nkoo" typeface="Ebrima"/>
+        <a:font script="Olck" typeface="Nirmala UI"/>
+        <a:font script="Osma" typeface="Ebrima"/>
+        <a:font script="Phag" typeface="Phagspa"/>
+        <a:font script="Syrn" typeface="Estrangelo Edessa"/>
+        <a:font script="Syrj" typeface="Estrangelo Edessa"/>
+        <a:font script="Syre" typeface="Estrangelo Edessa"/>
+        <a:font script="Sora" typeface="Nirmala UI"/>
+        <a:font script="Tale" typeface="Microsoft Tai Le"/>
+        <a:font script="Talu" typeface="Microsoft New Tai Lue"/>
+        <a:font script="Tfng" typeface="Ebrima"/>
+      </a:majorFont>
+      <a:minorFont>
+        <a:latin typeface="Aptos" panose="02110004020202020204"/>
+        <a:ea typeface=""/>
+        <a:cs typeface=""/>
+        <a:font script="Jpan" typeface="游ゴシック"/>
+        <a:font script="Hang" typeface="맑은 고딕"/>
+        <a:font script="Hans" typeface="等线"/>
+        <a:font script="Hant" typeface="新細明體"/>
+        <a:font script="Arab" typeface="Arial"/>
+        <a:font script="Hebr" typeface="Arial"/>
+        <a:font script="Thai" typeface="Cordia New"/>
+        <a:font script="Ethi" typeface="Nyala"/>
+        <a:font script="Beng" typeface="Vrinda"/>
+        <a:font script="Gujr" typeface="Shruti"/>
+        <a:font script="Khmr" typeface="DaunPenh"/>
+        <a:font script="Knda" typeface="Tunga"/>
+        <a:font script="Guru" typeface="Raavi"/>
+        <a:font script="Cans" typeface="Euphemia"/>
+        <a:font script="Cher" typeface="Plantagenet Cherokee"/>
+        <a:font script="Yiii" typeface="Microsoft Yi Baiti"/>
+        <a:font script="Tibt" typeface="Microsoft Himalaya"/>
+        <a:font script="Thaa" typeface="MV Boli"/>
+        <a:font script="Deva" typeface="Mangal"/>
+        <a:font script="Telu" typeface="Gautami"/>
+        <a:font script="Taml" typeface="Latha"/>
+        <a:font script="Syrc" typeface="Estrangelo Edessa"/>
+        <a:font script="Orya" typeface="Kalinga"/>
+        <a:font script="Mlym" typeface="Kartika"/>
+        <a:font script="Laoo" typeface="DokChampa"/>
+        <a:font script="Sinh" typeface="Iskoola Pota"/>
+        <a:font script="Mong" typeface="Mongolian Baiti"/>
+        <a:font script="Viet" typeface="Arial"/>
+        <a:font script="Uigh" typeface="Microsoft Uighur"/>
+        <a:font script="Geor" typeface="Sylfaen"/>
+        <a:font script="Armn" typeface="Arial"/>
+        <a:font script="Bugi" typeface="Leelawadee UI"/>
+        <a:font script="Bopo" typeface="Microsoft JhengHei"/>
+        <a:font script="Java" typeface="Javanese Text"/>
+        <a:font script="Lisu" typeface="Segoe UI"/>
+        <a:font script="Mymr" typeface="Myanmar Text"/>
+        <a:font script="Nkoo" typeface="Ebrima"/>
+        <a:font script="Olck" typeface="Nirmala UI"/>
+        <a:font script="Osma" typeface="Ebrima"/>
+        <a:font script="Phag" typeface="Phagspa"/>
+        <a:font script="Syrn" typeface="Estrangelo Edessa"/>
+        <a:font script="Syrj" typeface="Estrangelo Edessa"/>
+        <a:font script="Syre" typeface="Estrangelo Edessa"/>
+        <a:font script="Sora" typeface="Nirmala UI"/>
+        <a:font script="Tale" typeface="Microsoft Tai Le"/>
+        <a:font script="Talu" typeface="Microsoft New Tai Lue"/>
+        <a:font script="Tfng" typeface="Ebrima"/>
+      </a:minorFont>
+    </a:fontScheme>
+    <a:fmtScheme name="Office">
+      <a:fillStyleLst>
+        <a:solidFill>
+          <a:schemeClr val="phClr"/>
+        </a:solidFill>
+        <a:gradFill rotWithShape="1">
+          <a:gsLst>
+            <a:gs pos="0">
+              <a:schemeClr val="phClr">
+                <a:lumMod val="110000"/>
+                <a:satMod val="105000"/>
+                <a:tint val="67000"/>
+              </a:schemeClr>
+            </a:gs>
+            <a:gs pos="50000">
+              <a:schemeClr val="phClr">
+                <a:lumMod val="105000"/>
+                <a:satMod val="103000"/>
+                <a:tint val="73000"/>
+              </a:schemeClr>
+            </a:gs>
+            <a:gs pos="100000">
+              <a:schemeClr val="phClr">
+                <a:lumMod val="105000"/>
+                <a:satMod val="109000"/>
+                <a:tint val="81000"/>
+              </a:schemeClr>
+            </a:gs>
+          </a:gsLst>
+          <a:lin ang="5400000" scaled="0"/>
+        </a:gradFill>
+        <a:gradFill rotWithShape="1">
+          <a:gsLst>
+            <a:gs pos="0">
+              <a:schemeClr val="phClr">
+                <a:satMod val="103000"/>
+                <a:lumMod val="102000"/>
+                <a:tint val="94000"/>
+              </a:schemeClr>
+            </a:gs>
+            <a:gs pos="50000">
+              <a:schemeClr val="phClr">
+                <a:satMod val="110000"/>
+                <a:lumMod val="100000"/>
+                <a:shade val="100000"/>
+              </a:schemeClr>
+            </a:gs>
+            <a:gs pos="100000">
+              <a:schemeClr val="phClr">
+                <a:lumMod val="99000"/>
+                <a:satMod val="120000"/>
+                <a:shade val="78000"/>
+              </a:schemeClr>
+            </a:gs>
+          </a:gsLst>
+          <a:lin ang="5400000" scaled="0"/>
+        </a:gradFill>
+      </a:fillStyleLst>
+      <a:lnStyleLst>
+        <a:ln w="12700" cap="flat" cmpd="sng" algn="ctr">
+          <a:solidFill>
+            <a:schemeClr val="phClr"/>
+          </a:solidFill>
+          <a:prstDash val="solid"/>
+          <a:miter lim="800000"/>
+        </a:ln>
+        <a:ln w="19050" cap="flat" cmpd="sng" algn="ctr">
+          <a:solidFill>
+            <a:schemeClr val="phClr"/>
+          </a:solidFill>
+          <a:prstDash val="solid"/>
+          <a:miter lim="800000"/>
+        </a:ln>
+        <a:ln w="25400" cap="flat" cmpd="sng" algn="ctr">
+          <a:solidFill>
+            <a:schemeClr val="phClr"/>
+          </a:solidFill>
+          <a:prstDash val="solid"/>
+          <a:miter lim="800000"/>
+        </a:ln>
+      </a:lnStyleLst>
+      <a:effectStyleLst>
+        <a:effectStyle>
+          <a:effectLst/>
+        </a:effectStyle>
+        <a:effectStyle>
+          <a:effectLst/>
+        </a:effectStyle>
+        <a:effectStyle>
+          <a:effectLst>
+            <a:outerShdw blurRad="57150" dist="19050" dir="5400000" algn="ctr" rotWithShape="0">
+              <a:srgbClr val="000000">
+                <a:alpha val="63000"/>
+              </a:srgbClr>
+            </a:outerShdw>
+          </a:effectLst>
+        </a:effectStyle>
+      </a:effectStyleLst>
+      <a:bgFillStyleLst>
+        <a:solidFill>
+          <a:schemeClr val="phClr"/>
+        </a:solidFill>
+        <a:solidFill>
+          <a:schemeClr val="phClr">
+            <a:tint val="95000"/>
+            <a:satMod val="170000"/>
+          </a:schemeClr>
+        </a:solidFill>
+        <a:gradFill rotWithShape="1">
+          <a:gsLst>
+            <a:gs pos="0">
+              <a:schemeClr val="phClr">
+                <a:tint val="93000"/>
+                <a:satMod val="150000"/>
+                <a:shade val="98000"/>
+                <a:lumMod val="102000"/>
+              </a:schemeClr>
+            </a:gs>
+            <a:gs pos="50000">
+              <a:schemeClr val="phClr">
+                <a:tint val="98000"/>
+                <a:satMod val="130000"/>
+                <a:shade val="90000"/>
+                <a:lumMod val="103000"/>
+              </a:schemeClr>
+            </a:gs>
+            <a:gs pos="100000">
+              <a:schemeClr val="phClr">
+                <a:shade val="63000"/>
+                <a:satMod val="120000"/>
+              </a:schemeClr>
+            </a:gs>
+          </a:gsLst>
+          <a:lin ang="5400000" scaled="0"/>
+        </a:gradFill>
+      </a:bgFillStyleLst>
+    </a:fmtScheme>
+  </a:themeElements>
+  <a:objectDefaults>
+    <a:lnDef>
+      <a:spPr/>
+      <a:bodyPr/>
+      <a:lstStyle/>
+      <a:style>
+        <a:lnRef idx="2">
+          <a:schemeClr val="accent1"/>
+        </a:lnRef>
+        <a:fillRef idx="0">
+          <a:schemeClr val="accent1"/>
+        </a:fillRef>
+        <a:effectRef idx="1">
+          <a:schemeClr val="accent1"/>
+        </a:effectRef>
+        <a:fontRef idx="minor">
+          <a:schemeClr val="tx1"/>
+        </a:fontRef>
+      </a:style>
+    </a:lnDef>
+  </a:objectDefaults>
+  <a:extraClrSchemeLst/>
+  <a:extLst>
+    <a:ext uri="{05A4C25C-085E-4340-85A3-A5531E510DB2}">
+      <thm15:themeFamily xmlns:thm15="http://schemas.microsoft.com/office/thememl/2012/main" name="Office Theme" id="{2E142A2C-CD16-42D6-873A-C26D2A0506FA}" vid="{1BDDFF52-6CD6-40A5-AB3C-68EB2F1E4D0A}"/>
+    </a:ext>
+  </a:extLst>
+</a:theme>
 </file>